--- a/Soutenance_Renovation_Saint-Jean-de-Chevelu.pptx
+++ b/Soutenance_Renovation_Saint-Jean-de-Chevelu.pptx
@@ -547,7 +547,7 @@
               <a:defRPr sz="1200"/>
             </a:pPr>
             <a:r>
-              <a:t>Cout global sur 30 ans (travaux + energie)</a:t>
+              <a:t>Cout global 30 ans (travaux + energie, +5 %/an)</a:t>
             </a:r>
           </a:p>
         </c:rich>
@@ -622,13 +622,13 @@
                 <c:formatCode>General</c:formatCode>
                 <c:ptCount val="3"/>
                 <c:pt idx="0">
-                  <c:v>250650</c:v>
+                  <c:v>252000</c:v>
                 </c:pt>
                 <c:pt idx="1">
-                  <c:v>177500</c:v>
+                  <c:v>188500</c:v>
                 </c:pt>
                 <c:pt idx="2">
-                  <c:v>153000</c:v>
+                  <c:v>169000</c:v>
                 </c:pt>
               </c:numCache>
             </c:numRef>
@@ -1799,7 +1799,7 @@
           <a:lstStyle/>
           <a:p>
             <a:r>
-              <a:t>Le financement, calcule pour ce foyer modeste de 4 personnes a 40 000 euros par an. Les travaux sont une renovation d'ampleur, eligible a MaPrimeRenov' parcours accompagne, avec des taux eleves pour les revenus modestes : 65 % pour un gain de 3 classes au scenario 1, 70 % pour 5 classes au scenario 2. Avec les CEE, le reste a charge tombe a 14 000 euros pour le scenario 1 et 17 500 pour le scenario 2. On deduit l'apport de 10 000 euros : il ne reste que 4 000 a 7 500 euros, finances par un eco-PTZ a taux zero. Le projet reste donc tout a fait dans le budget de la famille - et l'eco-PTZ se rembourse pour environ 40 euros par mois, tres inferieurs aux economies d'energie.</a:t>
+              <a:t>Le financement, avec une estimation PRUDENTE des aides - plus realiste que les taux maximaux. Pour ce foyer de 4 personnes, MaPrimeRenov' et les CEE couvrent environ 20 000 euros au scenario 1 et 30 000 euros au scenario 2. Le reste a charge s'eleve donc a 22 500 euros pour le scenario 1 et 33 000 euros pour le scenario 2 - des montants coherents avec ce qu'observent des projets comparables. On deduit l'apport de 10 000 euros, et le solde - 12 500 a 23 000 euros - est finance par un eco-PTZ a taux zero. Le projet reste dans le budget : la mensualite de l'eco-PTZ est largement couverte par les economies d'energie.</a:t>
             </a:r>
           </a:p>
         </p:txBody>
@@ -1939,7 +1939,7 @@
           <a:lstStyle/>
           <a:p>
             <a:r>
-              <a:t>L'analyse en cout global tranche. Sur 30 ans, sans rien faire on depense 250 000 euros ; le scenario 1 ramene a 177 500, le scenario 2 a 153 000 - travaux compris. Malgre un investissement initial plus eleve, le scenario 2 reste le moins cher au final. Les couts mensuels d'energie passent de 696 a 250 euros. Et grace aux aides elevees, l'amortissement sur le reste a charge est tres rapide : environ 3,6 ans pour le scenario 1 et 3,3 ans pour le scenario 2. Si le jury m'interroge : j'ai retenu 30 ans ; en integrant la hausse du prix de l'energie, l'ecart se creuserait encore en faveur du scenario 2.</a:t>
+              <a:t>L'analyse economique se base sur la facture REELLE du foyer - environ 3 800 euros par an - et non sur le cout conventionnel du DPE, qui le surestime. Apres travaux, la facture tombe a 2 200 euros au scenario 1 et 1 600 euros au scenario 2, soit des economies de 1 600 a 2 200 euros par an. Sur le reste a charge, le retour sur investissement est d'environ 14 ans pour le scenario 1 et 15 ans pour le scenario 2 - coherent avec des projets comparables. Pour le cout global, j'integre une hausse du prix de l'energie de 5 % par an, comme attendu : sur 30 ans, ne rien faire coute 252 000 euros, le scenario 1 188 500, et le scenario 2 169 000. Malgre un investissement plus eleve, le scenario 2 reste le plus avantageux sur la duree.</a:t>
             </a:r>
           </a:p>
         </p:txBody>
@@ -2079,7 +2079,7 @@
           <a:lstStyle/>
           <a:p>
             <a:r>
-              <a:t>Pour conclure : au regard de la performance, de la sortie du fioul, de la rentabilite et du respect du bati, je recommande le scenario 2, qui fait passer le logement de G a B et reste le moins cher sur 30 ans, tout en restant dans le budget grace aux aides et a l'apport. Si le budget initial est un frein, le scenario 1 par etapes est une excellente premiere etape, completee plus tard par le chauffage. J'ai aussi remis au maitre d'ouvrage des conseils de sobriete simples qui amplifient les economies. Je vous remercie et je suis pret pour vos questions.</a:t>
+              <a:t>Pour conclure : au regard de la performance, de la sortie du fioul, de la rentabilite et du respect du bati, je recommande le scenario 2, qui fait passer le logement de G a B et reste le moins cher sur 30 ans (avec hausse de l'energie), tout en restant dans le budget grace aux aides et a l'apport. Si le budget initial est un frein, le scenario 1 par etapes est une excellente premiere etape, completee plus tard par le chauffage. J'ai aussi remis au maitre d'ouvrage des conseils de sobriete simples qui amplifient les economies. Je vous remercie et je suis pret pour vos questions.</a:t>
             </a:r>
           </a:p>
         </p:txBody>
@@ -21529,7 +21529,7 @@
         </p:nvGraphicFramePr>
         <p:xfrm>
           <a:off x="822960" y="1691640"/>
-          <a:ext cx="10515600" cy="3328416"/>
+          <a:ext cx="10515600" cy="3364992"/>
         </p:xfrm>
         <a:graphic>
           <a:graphicData uri="http://schemas.openxmlformats.org/drawingml/2006/table">
@@ -21542,7 +21542,7 @@
                 <a:gridCol w="2834640"/>
                 <a:gridCol w="2834640"/>
               </a:tblGrid>
-              <a:tr h="475488">
+              <a:tr h="420624">
                 <a:tc>
                   <a:txBody>
                     <a:bodyPr wrap="square"/>
@@ -21613,7 +21613,7 @@
                   </a:tcPr>
                 </a:tc>
               </a:tr>
-              <a:tr h="475488">
+              <a:tr h="420624">
                 <a:tc>
                   <a:txBody>
                     <a:bodyPr wrap="square"/>
@@ -21684,7 +21684,7 @@
                   </a:tcPr>
                 </a:tc>
               </a:tr>
-              <a:tr h="475488">
+              <a:tr h="420624">
                 <a:tc>
                   <a:txBody>
                     <a:bodyPr wrap="square"/>
@@ -21698,7 +21698,7 @@
                           </a:solidFill>
                           <a:latin typeface="Calibri"/>
                         </a:rPr>
-                        <a:t>MaPrimeRenov' (parcours accompagne)</a:t>
+                        <a:t>MaPrimeRenov' (estimation prudente)</a:t>
                       </a:r>
                     </a:p>
                   </a:txBody>
@@ -21721,7 +21721,7 @@
                           </a:solidFill>
                           <a:latin typeface="Calibri"/>
                         </a:rPr>
-                        <a:t>- 26 000 €</a:t>
+                        <a:t>- 15 000 €</a:t>
                       </a:r>
                     </a:p>
                   </a:txBody>
@@ -21744,7 +21744,7 @@
                           </a:solidFill>
                           <a:latin typeface="Calibri"/>
                         </a:rPr>
-                        <a:t>- 42 000 €</a:t>
+                        <a:t>- 24 000 €</a:t>
                       </a:r>
                     </a:p>
                   </a:txBody>
@@ -21755,7 +21755,7 @@
                   </a:tcPr>
                 </a:tc>
               </a:tr>
-              <a:tr h="475488">
+              <a:tr h="420624">
                 <a:tc>
                   <a:txBody>
                     <a:bodyPr wrap="square"/>
@@ -21815,7 +21815,7 @@
                           </a:solidFill>
                           <a:latin typeface="Calibri"/>
                         </a:rPr>
-                        <a:t>- 3 500 €</a:t>
+                        <a:t>- 4 000 €</a:t>
                       </a:r>
                     </a:p>
                   </a:txBody>
@@ -21826,7 +21826,78 @@
                   </a:tcPr>
                 </a:tc>
               </a:tr>
-              <a:tr h="475488">
+              <a:tr h="420624">
+                <a:tc>
+                  <a:txBody>
+                    <a:bodyPr wrap="square"/>
+                    <a:lstStyle/>
+                    <a:p>
+                      <a:pPr algn="l"/>
+                      <a:r>
+                        <a:rPr sz="1200" b="1">
+                          <a:solidFill>
+                            <a:srgbClr val="37474F"/>
+                          </a:solidFill>
+                          <a:latin typeface="Calibri"/>
+                        </a:rPr>
+                        <a:t>Aides locales eventuelles</a:t>
+                      </a:r>
+                    </a:p>
+                  </a:txBody>
+                  <a:tcPr marL="76200" marR="76200" marT="12700" marB="12700" anchor="ctr">
+                    <a:solidFill>
+                      <a:srgbClr val="E8F5E9"/>
+                    </a:solidFill>
+                  </a:tcPr>
+                </a:tc>
+                <a:tc>
+                  <a:txBody>
+                    <a:bodyPr wrap="square"/>
+                    <a:lstStyle/>
+                    <a:p>
+                      <a:pPr algn="ctr"/>
+                      <a:r>
+                        <a:rPr sz="1200" b="0">
+                          <a:solidFill>
+                            <a:srgbClr val="37474F"/>
+                          </a:solidFill>
+                          <a:latin typeface="Calibri"/>
+                        </a:rPr>
+                        <a:t>- 2 500 €</a:t>
+                      </a:r>
+                    </a:p>
+                  </a:txBody>
+                  <a:tcPr marL="76200" marR="76200" marT="12700" marB="12700" anchor="ctr">
+                    <a:solidFill>
+                      <a:srgbClr val="E8F5E9"/>
+                    </a:solidFill>
+                  </a:tcPr>
+                </a:tc>
+                <a:tc>
+                  <a:txBody>
+                    <a:bodyPr wrap="square"/>
+                    <a:lstStyle/>
+                    <a:p>
+                      <a:pPr algn="ctr"/>
+                      <a:r>
+                        <a:rPr sz="1200" b="0">
+                          <a:solidFill>
+                            <a:srgbClr val="37474F"/>
+                          </a:solidFill>
+                          <a:latin typeface="Calibri"/>
+                        </a:rPr>
+                        <a:t>- 2 000 €</a:t>
+                      </a:r>
+                    </a:p>
+                  </a:txBody>
+                  <a:tcPr marL="76200" marR="76200" marT="12700" marB="12700" anchor="ctr">
+                    <a:solidFill>
+                      <a:srgbClr val="E8F5E9"/>
+                    </a:solidFill>
+                  </a:tcPr>
+                </a:tc>
+              </a:tr>
+              <a:tr h="420624">
                 <a:tc>
                   <a:txBody>
                     <a:bodyPr wrap="square"/>
@@ -21863,7 +21934,7 @@
                           </a:solidFill>
                           <a:latin typeface="Calibri"/>
                         </a:rPr>
-                        <a:t>14 000 €</a:t>
+                        <a:t>22 500 €</a:t>
                       </a:r>
                     </a:p>
                   </a:txBody>
@@ -21886,7 +21957,7 @@
                           </a:solidFill>
                           <a:latin typeface="Calibri"/>
                         </a:rPr>
-                        <a:t>17 500 €</a:t>
+                        <a:t>33 000 €</a:t>
                       </a:r>
                     </a:p>
                   </a:txBody>
@@ -21897,7 +21968,7 @@
                   </a:tcPr>
                 </a:tc>
               </a:tr>
-              <a:tr h="475488">
+              <a:tr h="420624">
                 <a:tc>
                   <a:txBody>
                     <a:bodyPr wrap="square"/>
@@ -21917,7 +21988,7 @@
                   </a:txBody>
                   <a:tcPr marL="76200" marR="76200" marT="12700" marB="12700" anchor="ctr">
                     <a:solidFill>
-                      <a:srgbClr val="FFFFFF"/>
+                      <a:srgbClr val="E8F5E9"/>
                     </a:solidFill>
                   </a:tcPr>
                 </a:tc>
@@ -21940,7 +22011,7 @@
                   </a:txBody>
                   <a:tcPr marL="76200" marR="76200" marT="12700" marB="12700" anchor="ctr">
                     <a:solidFill>
-                      <a:srgbClr val="FFFFFF"/>
+                      <a:srgbClr val="E8F5E9"/>
                     </a:solidFill>
                   </a:tcPr>
                 </a:tc>
@@ -21963,12 +22034,12 @@
                   </a:txBody>
                   <a:tcPr marL="76200" marR="76200" marT="12700" marB="12700" anchor="ctr">
                     <a:solidFill>
-                      <a:srgbClr val="FFFFFF"/>
+                      <a:srgbClr val="E8F5E9"/>
                     </a:solidFill>
                   </a:tcPr>
                 </a:tc>
               </a:tr>
-              <a:tr h="475488">
+              <a:tr h="420624">
                 <a:tc>
                   <a:txBody>
                     <a:bodyPr wrap="square"/>
@@ -22005,7 +22076,7 @@
                           </a:solidFill>
                           <a:latin typeface="Calibri"/>
                         </a:rPr>
-                        <a:t>4 000 €</a:t>
+                        <a:t>12 500 €</a:t>
                       </a:r>
                     </a:p>
                   </a:txBody>
@@ -22028,7 +22099,7 @@
                           </a:solidFill>
                           <a:latin typeface="Calibri"/>
                         </a:rPr>
-                        <a:t>7 500 €</a:t>
+                        <a:t>23 000 €</a:t>
                       </a:r>
                     </a:p>
                   </a:txBody>
@@ -22051,8 +22122,8 @@
         </p:nvSpPr>
         <p:spPr>
           <a:xfrm>
-            <a:off x="822960" y="5349240"/>
-            <a:ext cx="10515600" cy="914400"/>
+            <a:off x="822960" y="5440680"/>
+            <a:ext cx="10515600" cy="868680"/>
           </a:xfrm>
           <a:prstGeom prst="roundRect">
             <a:avLst/>
@@ -22095,8 +22166,8 @@
         </p:nvSpPr>
         <p:spPr>
           <a:xfrm>
-            <a:off x="1051560" y="5422392"/>
-            <a:ext cx="10058400" cy="777240"/>
+            <a:off x="1051560" y="5504688"/>
+            <a:ext cx="10058400" cy="731520"/>
           </a:xfrm>
           <a:prstGeom prst="rect">
             <a:avLst/>
@@ -22124,7 +22195,7 @@
                 </a:solidFill>
                 <a:latin typeface="Calibri"/>
               </a:rPr>
-              <a:t>Famille modeste (4 pers., ~40 000 €/an) : taux MaPrimeRenov' eleves (65 % a 70 %) pour un gain de 3 a 5 classes. Avec l'apport, le solde (4 000 a 7 500 €) est couvert par un eco-PTZ a 0 % -&gt; projet dans le budget.</a:t>
+              <a:t>Estimation prudente des aides (~20 000 € et ~30 000 €). Apres apport, le solde (12 500 a 23 000 €) est finance par un eco-PTZ a 0 % -&gt; projet dans le budget de la famille.</a:t>
             </a:r>
           </a:p>
         </p:txBody>
@@ -24012,7 +24083,7 @@
                 </a:solidFill>
                 <a:latin typeface="Calibri"/>
               </a:rPr>
-              <a:t>Couts mensuels &amp; ROI</a:t>
+              <a:t>Factures reelles &amp; ROI</a:t>
             </a:r>
           </a:p>
         </p:txBody>
@@ -24148,7 +24219,7 @@
                           </a:solidFill>
                           <a:latin typeface="Calibri"/>
                         </a:rPr>
-                        <a:t>8 355</a:t>
+                        <a:t>3 800</a:t>
                       </a:r>
                     </a:p>
                   </a:txBody>
@@ -24171,7 +24242,7 @@
                           </a:solidFill>
                           <a:latin typeface="Calibri"/>
                         </a:rPr>
-                        <a:t>696</a:t>
+                        <a:t>317</a:t>
                       </a:r>
                     </a:p>
                   </a:txBody>
@@ -24219,7 +24290,7 @@
                           </a:solidFill>
                           <a:latin typeface="Calibri"/>
                         </a:rPr>
-                        <a:t>4 500</a:t>
+                        <a:t>2 200</a:t>
                       </a:r>
                     </a:p>
                   </a:txBody>
@@ -24242,7 +24313,7 @@
                           </a:solidFill>
                           <a:latin typeface="Calibri"/>
                         </a:rPr>
-                        <a:t>375</a:t>
+                        <a:t>183</a:t>
                       </a:r>
                     </a:p>
                   </a:txBody>
@@ -24290,7 +24361,7 @@
                           </a:solidFill>
                           <a:latin typeface="Calibri"/>
                         </a:rPr>
-                        <a:t>3 000</a:t>
+                        <a:t>1 600</a:t>
                       </a:r>
                     </a:p>
                   </a:txBody>
@@ -24313,7 +24384,7 @@
                           </a:solidFill>
                           <a:latin typeface="Calibri"/>
                         </a:rPr>
-                        <a:t>250</a:t>
+                        <a:t>133</a:t>
                       </a:r>
                     </a:p>
                   </a:txBody>
@@ -24459,7 +24530,7 @@
                           </a:solidFill>
                           <a:latin typeface="Calibri"/>
                         </a:rPr>
-                        <a:t>14 000 €</a:t>
+                        <a:t>22 500 €</a:t>
                       </a:r>
                     </a:p>
                   </a:txBody>
@@ -24482,7 +24553,7 @@
                           </a:solidFill>
                           <a:latin typeface="Calibri"/>
                         </a:rPr>
-                        <a:t>17 500 €</a:t>
+                        <a:t>33 000 €</a:t>
                       </a:r>
                     </a:p>
                   </a:txBody>
@@ -24530,7 +24601,7 @@
                           </a:solidFill>
                           <a:latin typeface="Calibri"/>
                         </a:rPr>
-                        <a:t>3 855 €</a:t>
+                        <a:t>1 600 €</a:t>
                       </a:r>
                     </a:p>
                   </a:txBody>
@@ -24553,7 +24624,7 @@
                           </a:solidFill>
                           <a:latin typeface="Calibri"/>
                         </a:rPr>
-                        <a:t>5 355 €</a:t>
+                        <a:t>2 200 €</a:t>
                       </a:r>
                     </a:p>
                   </a:txBody>
@@ -24601,7 +24672,7 @@
                           </a:solidFill>
                           <a:latin typeface="Calibri"/>
                         </a:rPr>
-                        <a:t>~3,6 ans</a:t>
+                        <a:t>~14 ans</a:t>
                       </a:r>
                     </a:p>
                   </a:txBody>
@@ -24624,7 +24695,7 @@
                           </a:solidFill>
                           <a:latin typeface="Calibri"/>
                         </a:rPr>
-                        <a:t>~3,3 ans</a:t>
+                        <a:t>~15 ans</a:t>
                       </a:r>
                     </a:p>
                   </a:txBody>
@@ -25555,7 +25626,7 @@
                           </a:solidFill>
                           <a:latin typeface="Calibri"/>
                         </a:rPr>
-                        <a:t>~28 500 €</a:t>
+                        <a:t>~20 000 €</a:t>
                       </a:r>
                     </a:p>
                   </a:txBody>
@@ -25578,7 +25649,7 @@
                           </a:solidFill>
                           <a:latin typeface="Calibri"/>
                         </a:rPr>
-                        <a:t>~45 500 €</a:t>
+                        <a:t>~30 000 €</a:t>
                       </a:r>
                     </a:p>
                   </a:txBody>
@@ -25649,7 +25720,7 @@
                           </a:solidFill>
                           <a:latin typeface="Calibri"/>
                         </a:rPr>
-                        <a:t>14 000 €</a:t>
+                        <a:t>22 500 €</a:t>
                       </a:r>
                     </a:p>
                   </a:txBody>
@@ -25672,7 +25743,7 @@
                           </a:solidFill>
                           <a:latin typeface="Calibri"/>
                         </a:rPr>
-                        <a:t>17 500 €</a:t>
+                        <a:t>33 000 €</a:t>
                       </a:r>
                     </a:p>
                   </a:txBody>
@@ -25697,7 +25768,7 @@
                           </a:solidFill>
                           <a:latin typeface="Calibri"/>
                         </a:rPr>
-                        <a:t>Cout energie / an</a:t>
+                        <a:t>Cout energie / an (reel)</a:t>
                       </a:r>
                     </a:p>
                   </a:txBody>
@@ -25720,7 +25791,7 @@
                           </a:solidFill>
                           <a:latin typeface="Calibri"/>
                         </a:rPr>
-                        <a:t>8 355 €</a:t>
+                        <a:t>3 800 €</a:t>
                       </a:r>
                     </a:p>
                   </a:txBody>
@@ -25743,7 +25814,7 @@
                           </a:solidFill>
                           <a:latin typeface="Calibri"/>
                         </a:rPr>
-                        <a:t>4 500 €</a:t>
+                        <a:t>2 200 €</a:t>
                       </a:r>
                     </a:p>
                   </a:txBody>
@@ -25766,7 +25837,7 @@
                           </a:solidFill>
                           <a:latin typeface="Calibri"/>
                         </a:rPr>
-                        <a:t>3 000 €</a:t>
+                        <a:t>1 600 €</a:t>
                       </a:r>
                     </a:p>
                   </a:txBody>
@@ -25814,7 +25885,7 @@
                           </a:solidFill>
                           <a:latin typeface="Calibri"/>
                         </a:rPr>
-                        <a:t>250 650 €</a:t>
+                        <a:t>252 000 €</a:t>
                       </a:r>
                     </a:p>
                   </a:txBody>
@@ -25837,7 +25908,7 @@
                           </a:solidFill>
                           <a:latin typeface="Calibri"/>
                         </a:rPr>
-                        <a:t>177 500 €</a:t>
+                        <a:t>188 500 €</a:t>
                       </a:r>
                     </a:p>
                   </a:txBody>
@@ -25860,7 +25931,7 @@
                           </a:solidFill>
                           <a:latin typeface="Calibri"/>
                         </a:rPr>
-                        <a:t>153 000 €</a:t>
+                        <a:t>169 000 €</a:t>
                       </a:r>
                     </a:p>
                   </a:txBody>
@@ -25931,7 +26002,7 @@
                           </a:solidFill>
                           <a:latin typeface="Calibri"/>
                         </a:rPr>
-                        <a:t>~3,6 ans</a:t>
+                        <a:t>~14 ans</a:t>
                       </a:r>
                     </a:p>
                   </a:txBody>
@@ -25954,7 +26025,7 @@
                           </a:solidFill>
                           <a:latin typeface="Calibri"/>
                         </a:rPr>
-                        <a:t>~3,3 ans</a:t>
+                        <a:t>~15 ans</a:t>
                       </a:r>
                     </a:p>
                   </a:txBody>
@@ -26332,7 +26403,7 @@
                 </a:solidFill>
                 <a:latin typeface="Calibri"/>
               </a:rPr>
-              <a:t>cout global le plus bas, ROI ~3,3 ans</a:t>
+              <a:t>cout global le plus bas, ROI ~15 ans</a:t>
             </a:r>
           </a:p>
           <a:p>
@@ -26406,7 +26477,7 @@
                 </a:solidFill>
                 <a:latin typeface="Calibri"/>
               </a:rPr>
-              <a:t>reste a charge 17 500 €, soutenu par aides + apport</a:t>
+              <a:t>reste a charge ~33 000 €, aides ~30 000 € + apport</a:t>
             </a:r>
           </a:p>
         </p:txBody>
@@ -32319,7 +32390,7 @@
                 </a:solidFill>
                 <a:latin typeface="Calibri"/>
               </a:rPr>
-              <a:t>rigueur climatique integree (Savoie, 498 m, zone H1) ; coherence factures / DPE verifiee ; 535 vs ~250 kWhEP/m2.an en moyenne nationale -&gt; plus du double.</a:t>
+              <a:t>rigueur climatique integree (Savoie, 498 m, zone H1) ; facture reelle ~3 800 €/an (chauffage partiel + appoint bois), sous l'estimation conventionnelle du DPE ; 535 vs ~250 kWhEP/m2.an en moyenne nationale.</a:t>
             </a:r>
           </a:p>
         </p:txBody>

--- a/Soutenance_Renovation_Saint-Jean-de-Chevelu.pptx
+++ b/Soutenance_Renovation_Saint-Jean-de-Chevelu.pptx
@@ -27,6 +27,7 @@
     <p:sldId id="275" r:id="rId27"/>
     <p:sldId id="276" r:id="rId28"/>
     <p:sldId id="277" r:id="rId29"/>
+    <p:sldId id="278" r:id="rId30"/>
   </p:sldIdLst>
   <p:sldSz cx="12191695" cy="6858000" type="screen4x3"/>
   <p:notesSz cx="6858000" cy="9144000"/>
@@ -2080,6 +2081,76 @@
           <a:p>
             <a:r>
               <a:t>Pour conclure : au regard de la performance, de la sortie du fioul, de la rentabilite et du respect du bati, je recommande le scenario 2, qui fait passer le logement de G a B et reste le moins cher sur 30 ans (avec hausse de l'energie), tout en restant dans le budget grace aux aides et a l'apport. Si le budget initial est un frein, le scenario 1 par etapes est une excellente premiere etape, completee plus tard par le chauffage. J'ai aussi remis au maitre d'ouvrage des conseils de sobriete simples qui amplifient les economies. Je vous remercie et je suis pret pour vos questions.</a:t>
+            </a:r>
+          </a:p>
+        </p:txBody>
+      </p:sp>
+      <p:sp>
+        <p:nvSpPr>
+          <p:cNvPr id="4" name="Slide Number Placeholder 3"/>
+          <p:cNvSpPr>
+            <a:spLocks noGrp="1"/>
+          </p:cNvSpPr>
+          <p:nvPr>
+            <p:ph type="sldNum" idx="5" sz="quarter"/>
+          </p:nvPr>
+        </p:nvSpPr>
+        <p:spPr/>
+      </p:sp>
+    </p:spTree>
+  </p:cSld>
+  <p:clrMapOvr>
+    <a:masterClrMapping/>
+  </p:clrMapOvr>
+</p:notes>
+</file>
+
+<file path=ppt/notesSlides/notesSlide23.xml><?xml version="1.0" encoding="utf-8"?>
+<p:notes xmlns:a="http://schemas.openxmlformats.org/drawingml/2006/main" xmlns:p="http://schemas.openxmlformats.org/presentationml/2006/main" xmlns:r="http://schemas.openxmlformats.org/officeDocument/2006/relationships">
+  <p:cSld>
+    <p:spTree>
+      <p:nvGrpSpPr>
+        <p:cNvPr id="1" name=""/>
+        <p:cNvGrpSpPr/>
+        <p:nvPr/>
+      </p:nvGrpSpPr>
+      <p:grpSpPr>
+        <a:xfrm>
+          <a:off x="0" y="0"/>
+          <a:ext cx="0" cy="0"/>
+          <a:chOff x="0" y="0"/>
+          <a:chExt cx="0" cy="0"/>
+        </a:xfrm>
+      </p:grpSpPr>
+      <p:sp>
+        <p:nvSpPr>
+          <p:cNvPr id="2" name="Slide Image Placeholder 1"/>
+          <p:cNvSpPr>
+            <a:spLocks noGrp="1"/>
+          </p:cNvSpPr>
+          <p:nvPr>
+            <p:ph type="sldImg" idx="2"/>
+          </p:nvPr>
+        </p:nvSpPr>
+        <p:spPr/>
+      </p:sp>
+      <p:sp>
+        <p:nvSpPr>
+          <p:cNvPr id="3" name="Notes Placeholder 2"/>
+          <p:cNvSpPr>
+            <a:spLocks noGrp="1"/>
+          </p:cNvSpPr>
+          <p:nvPr>
+            <p:ph type="body" idx="3" sz="quarter"/>
+          </p:nvPr>
+        </p:nvSpPr>
+        <p:spPr/>
+        <p:txBody>
+          <a:bodyPr/>
+          <a:lstStyle/>
+          <a:p>
+            <a:r>
+              <a:t>En annexe, j'ai regroupe toutes mes sources : a gauche les aides et le financement - France Renov', MaPrimeRenov', le simulateur officiel, l'Anah, l'eco-PTZ et l'ASDER qui est l'agence locale de l'energie en Savoie. Au centre, les fournisseurs et marques des materiaux et equipements que j'ai retenus. A droite, les sources techniques et reglementaires : l'ADEME, la methode 3CL du DPE, Legifrance pour la reglementation, le geoportail de l'urbanisme, les statistiques de prix de l'energie et Meteo-France pour les donnees climatiques. Je me tiens a votre disposition si vous souhaitez des precisions sur l'une de ces sources.</a:t>
             </a:r>
           </a:p>
         </p:txBody>
@@ -26795,6 +26866,1491 @@
 </p:sld>
 </file>
 
+<file path=ppt/slides/slide23.xml><?xml version="1.0" encoding="utf-8"?>
+<p:sld xmlns:a="http://schemas.openxmlformats.org/drawingml/2006/main" xmlns:p="http://schemas.openxmlformats.org/presentationml/2006/main" xmlns:r="http://schemas.openxmlformats.org/officeDocument/2006/relationships">
+  <p:cSld>
+    <p:spTree>
+      <p:nvGrpSpPr>
+        <p:cNvPr id="1" name=""/>
+        <p:cNvGrpSpPr/>
+        <p:nvPr/>
+      </p:nvGrpSpPr>
+      <p:grpSpPr/>
+      <p:sp>
+        <p:nvSpPr>
+          <p:cNvPr id="2" name="Rectangle 1"/>
+          <p:cNvSpPr/>
+          <p:nvPr/>
+        </p:nvSpPr>
+        <p:spPr>
+          <a:xfrm>
+            <a:off x="0" y="0"/>
+            <a:ext cx="12191695" cy="6858000"/>
+          </a:xfrm>
+          <a:prstGeom prst="rect">
+            <a:avLst/>
+          </a:prstGeom>
+          <a:solidFill>
+            <a:srgbClr val="FFFFFF"/>
+          </a:solidFill>
+          <a:ln>
+            <a:noFill/>
+          </a:ln>
+          <a:effectLst/>
+        </p:spPr>
+        <p:style>
+          <a:lnRef idx="1">
+            <a:schemeClr val="accent1"/>
+          </a:lnRef>
+          <a:fillRef idx="3">
+            <a:schemeClr val="accent1"/>
+          </a:fillRef>
+          <a:effectRef idx="2">
+            <a:schemeClr val="accent1"/>
+          </a:effectRef>
+          <a:fontRef idx="minor">
+            <a:schemeClr val="lt1"/>
+          </a:fontRef>
+        </p:style>
+        <p:txBody>
+          <a:bodyPr rtlCol="0" anchor="ctr"/>
+          <a:lstStyle/>
+          <a:p>
+            <a:pPr algn="ctr"/>
+          </a:p>
+        </p:txBody>
+      </p:sp>
+      <p:sp>
+        <p:nvSpPr>
+          <p:cNvPr id="3" name="Rectangle 2"/>
+          <p:cNvSpPr/>
+          <p:nvPr/>
+        </p:nvSpPr>
+        <p:spPr>
+          <a:xfrm>
+            <a:off x="0" y="0"/>
+            <a:ext cx="201168" cy="6858000"/>
+          </a:xfrm>
+          <a:prstGeom prst="rect">
+            <a:avLst/>
+          </a:prstGeom>
+          <a:solidFill>
+            <a:srgbClr val="1B5E20"/>
+          </a:solidFill>
+          <a:ln>
+            <a:noFill/>
+          </a:ln>
+          <a:effectLst/>
+        </p:spPr>
+        <p:style>
+          <a:lnRef idx="1">
+            <a:schemeClr val="accent1"/>
+          </a:lnRef>
+          <a:fillRef idx="3">
+            <a:schemeClr val="accent1"/>
+          </a:fillRef>
+          <a:effectRef idx="2">
+            <a:schemeClr val="accent1"/>
+          </a:effectRef>
+          <a:fontRef idx="minor">
+            <a:schemeClr val="lt1"/>
+          </a:fontRef>
+        </p:style>
+        <p:txBody>
+          <a:bodyPr rtlCol="0" anchor="ctr"/>
+          <a:lstStyle/>
+          <a:p>
+            <a:pPr algn="ctr"/>
+          </a:p>
+        </p:txBody>
+      </p:sp>
+      <p:sp>
+        <p:nvSpPr>
+          <p:cNvPr id="4" name="TextBox 3"/>
+          <p:cNvSpPr txBox="1"/>
+          <p:nvPr/>
+        </p:nvSpPr>
+        <p:spPr>
+          <a:xfrm>
+            <a:off x="548640" y="365760"/>
+            <a:ext cx="10332720" cy="731520"/>
+          </a:xfrm>
+          <a:prstGeom prst="rect">
+            <a:avLst/>
+          </a:prstGeom>
+          <a:noFill/>
+        </p:spPr>
+        <p:txBody>
+          <a:bodyPr wrap="square" anchor="ctr" lIns="25400" rIns="25400" tIns="25400" bIns="25400">
+            <a:spAutoFit/>
+          </a:bodyPr>
+          <a:lstStyle/>
+          <a:p>
+            <a:pPr algn="l">
+              <a:lnSpc>
+                <a:spcPct val="100000"/>
+              </a:lnSpc>
+              <a:spcAft>
+                <a:spcPts val="400"/>
+              </a:spcAft>
+            </a:pPr>
+            <a:r>
+              <a:rPr sz="2800" b="1" i="0">
+                <a:solidFill>
+                  <a:srgbClr val="1B5E20"/>
+                </a:solidFill>
+                <a:latin typeface="Calibri"/>
+              </a:rPr>
+              <a:t>References &amp; sources</a:t>
+            </a:r>
+          </a:p>
+        </p:txBody>
+      </p:sp>
+      <p:sp>
+        <p:nvSpPr>
+          <p:cNvPr id="5" name="TextBox 4"/>
+          <p:cNvSpPr txBox="1"/>
+          <p:nvPr/>
+        </p:nvSpPr>
+        <p:spPr>
+          <a:xfrm>
+            <a:off x="548640" y="1042415"/>
+            <a:ext cx="10332720" cy="365760"/>
+          </a:xfrm>
+          <a:prstGeom prst="rect">
+            <a:avLst/>
+          </a:prstGeom>
+          <a:noFill/>
+        </p:spPr>
+        <p:txBody>
+          <a:bodyPr wrap="square" anchor="t" lIns="25400" rIns="25400" tIns="25400" bIns="25400">
+            <a:spAutoFit/>
+          </a:bodyPr>
+          <a:lstStyle/>
+          <a:p>
+            <a:pPr algn="l">
+              <a:lnSpc>
+                <a:spcPct val="100000"/>
+              </a:lnSpc>
+              <a:spcAft>
+                <a:spcPts val="400"/>
+              </a:spcAft>
+            </a:pPr>
+            <a:r>
+              <a:rPr sz="1400" b="0" i="1">
+                <a:solidFill>
+                  <a:srgbClr val="90A4AE"/>
+                </a:solidFill>
+                <a:latin typeface="Calibri"/>
+              </a:rPr>
+              <a:t>Annexe - aides, fournisseurs et donnees techniques</a:t>
+            </a:r>
+          </a:p>
+        </p:txBody>
+      </p:sp>
+      <p:sp>
+        <p:nvSpPr>
+          <p:cNvPr id="6" name="Rectangle 5"/>
+          <p:cNvSpPr/>
+          <p:nvPr/>
+        </p:nvSpPr>
+        <p:spPr>
+          <a:xfrm>
+            <a:off x="548640" y="1152144"/>
+            <a:ext cx="10058400" cy="27940"/>
+          </a:xfrm>
+          <a:prstGeom prst="rect">
+            <a:avLst/>
+          </a:prstGeom>
+          <a:solidFill>
+            <a:srgbClr val="2E7D32"/>
+          </a:solidFill>
+          <a:ln>
+            <a:noFill/>
+          </a:ln>
+          <a:effectLst/>
+        </p:spPr>
+        <p:style>
+          <a:lnRef idx="1">
+            <a:schemeClr val="accent1"/>
+          </a:lnRef>
+          <a:fillRef idx="3">
+            <a:schemeClr val="accent1"/>
+          </a:fillRef>
+          <a:effectRef idx="2">
+            <a:schemeClr val="accent1"/>
+          </a:effectRef>
+          <a:fontRef idx="minor">
+            <a:schemeClr val="lt1"/>
+          </a:fontRef>
+        </p:style>
+        <p:txBody>
+          <a:bodyPr rtlCol="0" anchor="ctr"/>
+          <a:lstStyle/>
+          <a:p>
+            <a:pPr algn="ctr"/>
+          </a:p>
+        </p:txBody>
+      </p:sp>
+      <p:sp>
+        <p:nvSpPr>
+          <p:cNvPr id="7" name="TextBox 6"/>
+          <p:cNvSpPr txBox="1"/>
+          <p:nvPr/>
+        </p:nvSpPr>
+        <p:spPr>
+          <a:xfrm>
+            <a:off x="502920" y="6473952"/>
+            <a:ext cx="8229600" cy="292608"/>
+          </a:xfrm>
+          <a:prstGeom prst="rect">
+            <a:avLst/>
+          </a:prstGeom>
+          <a:noFill/>
+        </p:spPr>
+        <p:txBody>
+          <a:bodyPr wrap="square" anchor="t" lIns="25400" rIns="25400" tIns="25400" bIns="25400">
+            <a:spAutoFit/>
+          </a:bodyPr>
+          <a:lstStyle/>
+          <a:p>
+            <a:pPr algn="l">
+              <a:lnSpc>
+                <a:spcPct val="100000"/>
+              </a:lnSpc>
+              <a:spcAft>
+                <a:spcPts val="400"/>
+              </a:spcAft>
+            </a:pPr>
+            <a:r>
+              <a:rPr sz="900" b="0" i="0">
+                <a:solidFill>
+                  <a:srgbClr val="90A4AE"/>
+                </a:solidFill>
+                <a:latin typeface="Calibri"/>
+              </a:rPr>
+              <a:t>Renovation energetique - Saint-Jean-de-Chevelu (73) - Bloc 1</a:t>
+            </a:r>
+          </a:p>
+        </p:txBody>
+      </p:sp>
+      <p:sp>
+        <p:nvSpPr>
+          <p:cNvPr id="8" name="TextBox 7"/>
+          <p:cNvSpPr txBox="1"/>
+          <p:nvPr/>
+        </p:nvSpPr>
+        <p:spPr>
+          <a:xfrm>
+            <a:off x="9418320" y="6473952"/>
+            <a:ext cx="2286000" cy="292608"/>
+          </a:xfrm>
+          <a:prstGeom prst="rect">
+            <a:avLst/>
+          </a:prstGeom>
+          <a:noFill/>
+        </p:spPr>
+        <p:txBody>
+          <a:bodyPr wrap="square" anchor="t" lIns="25400" rIns="25400" tIns="25400" bIns="25400">
+            <a:spAutoFit/>
+          </a:bodyPr>
+          <a:lstStyle/>
+          <a:p>
+            <a:pPr algn="r">
+              <a:lnSpc>
+                <a:spcPct val="100000"/>
+              </a:lnSpc>
+              <a:spcAft>
+                <a:spcPts val="400"/>
+              </a:spcAft>
+            </a:pPr>
+            <a:r>
+              <a:rPr sz="900" b="0" i="0">
+                <a:solidFill>
+                  <a:srgbClr val="90A4AE"/>
+                </a:solidFill>
+                <a:latin typeface="Calibri"/>
+              </a:rPr>
+              <a:t>Guillaume Tardy</a:t>
+            </a:r>
+          </a:p>
+        </p:txBody>
+      </p:sp>
+      <p:sp>
+        <p:nvSpPr>
+          <p:cNvPr id="9" name="Rounded Rectangle 8"/>
+          <p:cNvSpPr/>
+          <p:nvPr/>
+        </p:nvSpPr>
+        <p:spPr>
+          <a:xfrm>
+            <a:off x="548640" y="1508760"/>
+            <a:ext cx="3611880" cy="4709160"/>
+          </a:xfrm>
+          <a:prstGeom prst="roundRect">
+            <a:avLst/>
+          </a:prstGeom>
+          <a:solidFill>
+            <a:srgbClr val="FFFFFF"/>
+          </a:solidFill>
+          <a:ln w="12700">
+            <a:solidFill>
+              <a:srgbClr val="90A4AE"/>
+            </a:solidFill>
+          </a:ln>
+          <a:effectLst/>
+        </p:spPr>
+        <p:style>
+          <a:lnRef idx="1">
+            <a:schemeClr val="accent1"/>
+          </a:lnRef>
+          <a:fillRef idx="3">
+            <a:schemeClr val="accent1"/>
+          </a:fillRef>
+          <a:effectRef idx="2">
+            <a:schemeClr val="accent1"/>
+          </a:effectRef>
+          <a:fontRef idx="minor">
+            <a:schemeClr val="lt1"/>
+          </a:fontRef>
+        </p:style>
+        <p:txBody>
+          <a:bodyPr rtlCol="0" anchor="ctr"/>
+          <a:lstStyle/>
+          <a:p>
+            <a:pPr algn="ctr"/>
+          </a:p>
+        </p:txBody>
+      </p:sp>
+      <p:sp>
+        <p:nvSpPr>
+          <p:cNvPr id="10" name="Rounded Rectangle 9"/>
+          <p:cNvSpPr/>
+          <p:nvPr/>
+        </p:nvSpPr>
+        <p:spPr>
+          <a:xfrm>
+            <a:off x="548640" y="1508760"/>
+            <a:ext cx="3611880" cy="502920"/>
+          </a:xfrm>
+          <a:prstGeom prst="roundRect">
+            <a:avLst/>
+          </a:prstGeom>
+          <a:solidFill>
+            <a:srgbClr val="1B5E20"/>
+          </a:solidFill>
+          <a:ln>
+            <a:noFill/>
+          </a:ln>
+          <a:effectLst/>
+        </p:spPr>
+        <p:style>
+          <a:lnRef idx="1">
+            <a:schemeClr val="accent1"/>
+          </a:lnRef>
+          <a:fillRef idx="3">
+            <a:schemeClr val="accent1"/>
+          </a:fillRef>
+          <a:effectRef idx="2">
+            <a:schemeClr val="accent1"/>
+          </a:effectRef>
+          <a:fontRef idx="minor">
+            <a:schemeClr val="lt1"/>
+          </a:fontRef>
+        </p:style>
+        <p:txBody>
+          <a:bodyPr rtlCol="0" anchor="ctr"/>
+          <a:lstStyle/>
+          <a:p>
+            <a:pPr algn="ctr"/>
+          </a:p>
+        </p:txBody>
+      </p:sp>
+      <p:sp>
+        <p:nvSpPr>
+          <p:cNvPr id="11" name="TextBox 10"/>
+          <p:cNvSpPr txBox="1"/>
+          <p:nvPr/>
+        </p:nvSpPr>
+        <p:spPr>
+          <a:xfrm>
+            <a:off x="548640" y="1508760"/>
+            <a:ext cx="3611880" cy="502920"/>
+          </a:xfrm>
+          <a:prstGeom prst="rect">
+            <a:avLst/>
+          </a:prstGeom>
+          <a:noFill/>
+        </p:spPr>
+        <p:txBody>
+          <a:bodyPr wrap="square" anchor="ctr" lIns="25400" rIns="25400" tIns="25400" bIns="25400">
+            <a:spAutoFit/>
+          </a:bodyPr>
+          <a:lstStyle/>
+          <a:p>
+            <a:pPr algn="ctr">
+              <a:lnSpc>
+                <a:spcPct val="100000"/>
+              </a:lnSpc>
+              <a:spcAft>
+                <a:spcPts val="400"/>
+              </a:spcAft>
+            </a:pPr>
+            <a:r>
+              <a:rPr sz="1400" b="1" i="0">
+                <a:solidFill>
+                  <a:srgbClr val="FFFFFF"/>
+                </a:solidFill>
+                <a:latin typeface="Calibri"/>
+              </a:rPr>
+              <a:t>Aides &amp; financement</a:t>
+            </a:r>
+          </a:p>
+        </p:txBody>
+      </p:sp>
+      <p:sp>
+        <p:nvSpPr>
+          <p:cNvPr id="12" name="TextBox 11"/>
+          <p:cNvSpPr txBox="1"/>
+          <p:nvPr/>
+        </p:nvSpPr>
+        <p:spPr>
+          <a:xfrm>
+            <a:off x="713232" y="2148840"/>
+            <a:ext cx="3300984" cy="3931920"/>
+          </a:xfrm>
+          <a:prstGeom prst="rect">
+            <a:avLst/>
+          </a:prstGeom>
+          <a:noFill/>
+        </p:spPr>
+        <p:txBody>
+          <a:bodyPr wrap="square">
+            <a:spAutoFit/>
+          </a:bodyPr>
+          <a:lstStyle/>
+          <a:p>
+            <a:pPr>
+              <a:lnSpc>
+                <a:spcPct val="100000"/>
+              </a:lnSpc>
+              <a:spcAft>
+                <a:spcPts val="600"/>
+              </a:spcAft>
+            </a:pPr>
+            <a:r>
+              <a:rPr sz="1100" b="1">
+                <a:solidFill>
+                  <a:srgbClr val="37474F"/>
+                </a:solidFill>
+                <a:latin typeface="Calibri"/>
+              </a:rPr>
+              <a:t>France Renov' (service public) </a:t>
+            </a:r>
+          </a:p>
+          <a:p>
+            <a:pPr>
+              <a:lnSpc>
+                <a:spcPct val="100000"/>
+              </a:lnSpc>
+              <a:spcAft>
+                <a:spcPts val="600"/>
+              </a:spcAft>
+            </a:pPr>
+            <a:r>
+              <a:rPr sz="1050">
+                <a:solidFill>
+                  <a:srgbClr val="1565C0"/>
+                </a:solidFill>
+                <a:latin typeface="Calibri"/>
+                <a:hlinkClick r:id="rId2"/>
+              </a:rPr>
+              <a:t>france-renov.gouv.fr</a:t>
+            </a:r>
+          </a:p>
+          <a:p>
+            <a:pPr>
+              <a:lnSpc>
+                <a:spcPct val="100000"/>
+              </a:lnSpc>
+              <a:spcAft>
+                <a:spcPts val="600"/>
+              </a:spcAft>
+            </a:pPr>
+            <a:r>
+              <a:rPr sz="1100" b="1">
+                <a:solidFill>
+                  <a:srgbClr val="37474F"/>
+                </a:solidFill>
+                <a:latin typeface="Calibri"/>
+              </a:rPr>
+              <a:t>MaPrimeRenov' </a:t>
+            </a:r>
+          </a:p>
+          <a:p>
+            <a:pPr>
+              <a:lnSpc>
+                <a:spcPct val="100000"/>
+              </a:lnSpc>
+              <a:spcAft>
+                <a:spcPts val="600"/>
+              </a:spcAft>
+            </a:pPr>
+            <a:r>
+              <a:rPr sz="1050">
+                <a:solidFill>
+                  <a:srgbClr val="1565C0"/>
+                </a:solidFill>
+                <a:latin typeface="Calibri"/>
+                <a:hlinkClick r:id="rId3"/>
+              </a:rPr>
+              <a:t>maprimerenov.gouv.fr</a:t>
+            </a:r>
+          </a:p>
+          <a:p>
+            <a:pPr>
+              <a:lnSpc>
+                <a:spcPct val="100000"/>
+              </a:lnSpc>
+              <a:spcAft>
+                <a:spcPts val="600"/>
+              </a:spcAft>
+            </a:pPr>
+            <a:r>
+              <a:rPr sz="1100" b="1">
+                <a:solidFill>
+                  <a:srgbClr val="37474F"/>
+                </a:solidFill>
+                <a:latin typeface="Calibri"/>
+              </a:rPr>
+              <a:t>Simulateur d'aides </a:t>
+            </a:r>
+          </a:p>
+          <a:p>
+            <a:pPr>
+              <a:lnSpc>
+                <a:spcPct val="100000"/>
+              </a:lnSpc>
+              <a:spcAft>
+                <a:spcPts val="600"/>
+              </a:spcAft>
+            </a:pPr>
+            <a:r>
+              <a:rPr sz="1050">
+                <a:solidFill>
+                  <a:srgbClr val="1565C0"/>
+                </a:solidFill>
+                <a:latin typeface="Calibri"/>
+                <a:hlinkClick r:id="rId4"/>
+              </a:rPr>
+              <a:t>mesaidesreno.gouv.fr</a:t>
+            </a:r>
+          </a:p>
+          <a:p>
+            <a:pPr>
+              <a:lnSpc>
+                <a:spcPct val="100000"/>
+              </a:lnSpc>
+              <a:spcAft>
+                <a:spcPts val="600"/>
+              </a:spcAft>
+            </a:pPr>
+            <a:r>
+              <a:rPr sz="1100" b="1">
+                <a:solidFill>
+                  <a:srgbClr val="37474F"/>
+                </a:solidFill>
+                <a:latin typeface="Calibri"/>
+              </a:rPr>
+              <a:t>Anah </a:t>
+            </a:r>
+          </a:p>
+          <a:p>
+            <a:pPr>
+              <a:lnSpc>
+                <a:spcPct val="100000"/>
+              </a:lnSpc>
+              <a:spcAft>
+                <a:spcPts val="600"/>
+              </a:spcAft>
+            </a:pPr>
+            <a:r>
+              <a:rPr sz="1050">
+                <a:solidFill>
+                  <a:srgbClr val="1565C0"/>
+                </a:solidFill>
+                <a:latin typeface="Calibri"/>
+                <a:hlinkClick r:id="rId5"/>
+              </a:rPr>
+              <a:t>anah.gouv.fr</a:t>
+            </a:r>
+          </a:p>
+          <a:p>
+            <a:pPr>
+              <a:lnSpc>
+                <a:spcPct val="100000"/>
+              </a:lnSpc>
+              <a:spcAft>
+                <a:spcPts val="600"/>
+              </a:spcAft>
+            </a:pPr>
+            <a:r>
+              <a:rPr sz="1100" b="1">
+                <a:solidFill>
+                  <a:srgbClr val="37474F"/>
+                </a:solidFill>
+                <a:latin typeface="Calibri"/>
+              </a:rPr>
+              <a:t>Eco-PTZ &amp; CEE </a:t>
+            </a:r>
+          </a:p>
+          <a:p>
+            <a:pPr>
+              <a:lnSpc>
+                <a:spcPct val="100000"/>
+              </a:lnSpc>
+              <a:spcAft>
+                <a:spcPts val="600"/>
+              </a:spcAft>
+            </a:pPr>
+            <a:r>
+              <a:rPr sz="1050">
+                <a:solidFill>
+                  <a:srgbClr val="1565C0"/>
+                </a:solidFill>
+                <a:latin typeface="Calibri"/>
+                <a:hlinkClick r:id="rId6"/>
+              </a:rPr>
+              <a:t>service-public.fr</a:t>
+            </a:r>
+          </a:p>
+          <a:p>
+            <a:pPr>
+              <a:lnSpc>
+                <a:spcPct val="100000"/>
+              </a:lnSpc>
+              <a:spcAft>
+                <a:spcPts val="600"/>
+              </a:spcAft>
+            </a:pPr>
+            <a:r>
+              <a:rPr sz="1100" b="1">
+                <a:solidFill>
+                  <a:srgbClr val="37474F"/>
+                </a:solidFill>
+                <a:latin typeface="Calibri"/>
+              </a:rPr>
+              <a:t>ASDER - espace conseil (Savoie) </a:t>
+            </a:r>
+          </a:p>
+          <a:p>
+            <a:pPr>
+              <a:lnSpc>
+                <a:spcPct val="100000"/>
+              </a:lnSpc>
+              <a:spcAft>
+                <a:spcPts val="600"/>
+              </a:spcAft>
+            </a:pPr>
+            <a:r>
+              <a:rPr sz="1050">
+                <a:solidFill>
+                  <a:srgbClr val="1565C0"/>
+                </a:solidFill>
+                <a:latin typeface="Calibri"/>
+                <a:hlinkClick r:id="rId7"/>
+              </a:rPr>
+              <a:t>asder.asso.fr</a:t>
+            </a:r>
+          </a:p>
+        </p:txBody>
+      </p:sp>
+      <p:sp>
+        <p:nvSpPr>
+          <p:cNvPr id="13" name="Rounded Rectangle 12"/>
+          <p:cNvSpPr/>
+          <p:nvPr/>
+        </p:nvSpPr>
+        <p:spPr>
+          <a:xfrm>
+            <a:off x="4297680" y="1508760"/>
+            <a:ext cx="3611880" cy="4709160"/>
+          </a:xfrm>
+          <a:prstGeom prst="roundRect">
+            <a:avLst/>
+          </a:prstGeom>
+          <a:solidFill>
+            <a:srgbClr val="FFFFFF"/>
+          </a:solidFill>
+          <a:ln w="12700">
+            <a:solidFill>
+              <a:srgbClr val="90A4AE"/>
+            </a:solidFill>
+          </a:ln>
+          <a:effectLst/>
+        </p:spPr>
+        <p:style>
+          <a:lnRef idx="1">
+            <a:schemeClr val="accent1"/>
+          </a:lnRef>
+          <a:fillRef idx="3">
+            <a:schemeClr val="accent1"/>
+          </a:fillRef>
+          <a:effectRef idx="2">
+            <a:schemeClr val="accent1"/>
+          </a:effectRef>
+          <a:fontRef idx="minor">
+            <a:schemeClr val="lt1"/>
+          </a:fontRef>
+        </p:style>
+        <p:txBody>
+          <a:bodyPr rtlCol="0" anchor="ctr"/>
+          <a:lstStyle/>
+          <a:p>
+            <a:pPr algn="ctr"/>
+          </a:p>
+        </p:txBody>
+      </p:sp>
+      <p:sp>
+        <p:nvSpPr>
+          <p:cNvPr id="14" name="Rounded Rectangle 13"/>
+          <p:cNvSpPr/>
+          <p:nvPr/>
+        </p:nvSpPr>
+        <p:spPr>
+          <a:xfrm>
+            <a:off x="4297680" y="1508760"/>
+            <a:ext cx="3611880" cy="502920"/>
+          </a:xfrm>
+          <a:prstGeom prst="roundRect">
+            <a:avLst/>
+          </a:prstGeom>
+          <a:solidFill>
+            <a:srgbClr val="1565C0"/>
+          </a:solidFill>
+          <a:ln>
+            <a:noFill/>
+          </a:ln>
+          <a:effectLst/>
+        </p:spPr>
+        <p:style>
+          <a:lnRef idx="1">
+            <a:schemeClr val="accent1"/>
+          </a:lnRef>
+          <a:fillRef idx="3">
+            <a:schemeClr val="accent1"/>
+          </a:fillRef>
+          <a:effectRef idx="2">
+            <a:schemeClr val="accent1"/>
+          </a:effectRef>
+          <a:fontRef idx="minor">
+            <a:schemeClr val="lt1"/>
+          </a:fontRef>
+        </p:style>
+        <p:txBody>
+          <a:bodyPr rtlCol="0" anchor="ctr"/>
+          <a:lstStyle/>
+          <a:p>
+            <a:pPr algn="ctr"/>
+          </a:p>
+        </p:txBody>
+      </p:sp>
+      <p:sp>
+        <p:nvSpPr>
+          <p:cNvPr id="15" name="TextBox 14"/>
+          <p:cNvSpPr txBox="1"/>
+          <p:nvPr/>
+        </p:nvSpPr>
+        <p:spPr>
+          <a:xfrm>
+            <a:off x="4297680" y="1508760"/>
+            <a:ext cx="3611880" cy="502920"/>
+          </a:xfrm>
+          <a:prstGeom prst="rect">
+            <a:avLst/>
+          </a:prstGeom>
+          <a:noFill/>
+        </p:spPr>
+        <p:txBody>
+          <a:bodyPr wrap="square" anchor="ctr" lIns="25400" rIns="25400" tIns="25400" bIns="25400">
+            <a:spAutoFit/>
+          </a:bodyPr>
+          <a:lstStyle/>
+          <a:p>
+            <a:pPr algn="ctr">
+              <a:lnSpc>
+                <a:spcPct val="100000"/>
+              </a:lnSpc>
+              <a:spcAft>
+                <a:spcPts val="400"/>
+              </a:spcAft>
+            </a:pPr>
+            <a:r>
+              <a:rPr sz="1400" b="1" i="0">
+                <a:solidFill>
+                  <a:srgbClr val="FFFFFF"/>
+                </a:solidFill>
+                <a:latin typeface="Calibri"/>
+              </a:rPr>
+              <a:t>Materiaux &amp; equipements</a:t>
+            </a:r>
+          </a:p>
+        </p:txBody>
+      </p:sp>
+      <p:sp>
+        <p:nvSpPr>
+          <p:cNvPr id="16" name="TextBox 15"/>
+          <p:cNvSpPr txBox="1"/>
+          <p:nvPr/>
+        </p:nvSpPr>
+        <p:spPr>
+          <a:xfrm>
+            <a:off x="4462272" y="2148840"/>
+            <a:ext cx="3300984" cy="3931920"/>
+          </a:xfrm>
+          <a:prstGeom prst="rect">
+            <a:avLst/>
+          </a:prstGeom>
+          <a:noFill/>
+        </p:spPr>
+        <p:txBody>
+          <a:bodyPr wrap="square">
+            <a:spAutoFit/>
+          </a:bodyPr>
+          <a:lstStyle/>
+          <a:p>
+            <a:pPr>
+              <a:lnSpc>
+                <a:spcPct val="100000"/>
+              </a:lnSpc>
+              <a:spcAft>
+                <a:spcPts val="600"/>
+              </a:spcAft>
+            </a:pPr>
+            <a:r>
+              <a:rPr sz="1100" b="1">
+                <a:solidFill>
+                  <a:srgbClr val="37474F"/>
+                </a:solidFill>
+                <a:latin typeface="Calibri"/>
+              </a:rPr>
+              <a:t>Laine de bois (ITE) </a:t>
+            </a:r>
+          </a:p>
+          <a:p>
+            <a:pPr>
+              <a:lnSpc>
+                <a:spcPct val="100000"/>
+              </a:lnSpc>
+              <a:spcAft>
+                <a:spcPts val="600"/>
+              </a:spcAft>
+            </a:pPr>
+            <a:r>
+              <a:rPr sz="1050">
+                <a:solidFill>
+                  <a:srgbClr val="1565C0"/>
+                </a:solidFill>
+                <a:latin typeface="Calibri"/>
+                <a:hlinkClick r:id="rId8"/>
+              </a:rPr>
+              <a:t>steico.com  -  soprema.fr</a:t>
+            </a:r>
+          </a:p>
+          <a:p>
+            <a:pPr>
+              <a:lnSpc>
+                <a:spcPct val="100000"/>
+              </a:lnSpc>
+              <a:spcAft>
+                <a:spcPts val="600"/>
+              </a:spcAft>
+            </a:pPr>
+            <a:r>
+              <a:rPr sz="1100" b="1">
+                <a:solidFill>
+                  <a:srgbClr val="37474F"/>
+                </a:solidFill>
+                <a:latin typeface="Calibri"/>
+              </a:rPr>
+              <a:t>Ouate de cellulose </a:t>
+            </a:r>
+          </a:p>
+          <a:p>
+            <a:pPr>
+              <a:lnSpc>
+                <a:spcPct val="100000"/>
+              </a:lnSpc>
+              <a:spcAft>
+                <a:spcPts val="600"/>
+              </a:spcAft>
+            </a:pPr>
+            <a:r>
+              <a:rPr sz="1050">
+                <a:solidFill>
+                  <a:srgbClr val="1565C0"/>
+                </a:solidFill>
+                <a:latin typeface="Calibri"/>
+                <a:hlinkClick r:id="rId9"/>
+              </a:rPr>
+              <a:t>ouateco.com  -  isocell.com</a:t>
+            </a:r>
+          </a:p>
+          <a:p>
+            <a:pPr>
+              <a:lnSpc>
+                <a:spcPct val="100000"/>
+              </a:lnSpc>
+              <a:spcAft>
+                <a:spcPts val="600"/>
+              </a:spcAft>
+            </a:pPr>
+            <a:r>
+              <a:rPr sz="1100" b="1">
+                <a:solidFill>
+                  <a:srgbClr val="37474F"/>
+                </a:solidFill>
+                <a:latin typeface="Calibri"/>
+              </a:rPr>
+              <a:t>VMC hygro B </a:t>
+            </a:r>
+          </a:p>
+          <a:p>
+            <a:pPr>
+              <a:lnSpc>
+                <a:spcPct val="100000"/>
+              </a:lnSpc>
+              <a:spcAft>
+                <a:spcPts val="600"/>
+              </a:spcAft>
+            </a:pPr>
+            <a:r>
+              <a:rPr sz="1050">
+                <a:solidFill>
+                  <a:srgbClr val="1565C0"/>
+                </a:solidFill>
+                <a:latin typeface="Calibri"/>
+                <a:hlinkClick r:id="rId10"/>
+              </a:rPr>
+              <a:t>aldes.fr  -  atlantic.fr</a:t>
+            </a:r>
+          </a:p>
+          <a:p>
+            <a:pPr>
+              <a:lnSpc>
+                <a:spcPct val="100000"/>
+              </a:lnSpc>
+              <a:spcAft>
+                <a:spcPts val="600"/>
+              </a:spcAft>
+            </a:pPr>
+            <a:r>
+              <a:rPr sz="1100" b="1">
+                <a:solidFill>
+                  <a:srgbClr val="37474F"/>
+                </a:solidFill>
+                <a:latin typeface="Calibri"/>
+              </a:rPr>
+              <a:t>Chauffe-eau thermodynamique </a:t>
+            </a:r>
+          </a:p>
+          <a:p>
+            <a:pPr>
+              <a:lnSpc>
+                <a:spcPct val="100000"/>
+              </a:lnSpc>
+              <a:spcAft>
+                <a:spcPts val="600"/>
+              </a:spcAft>
+            </a:pPr>
+            <a:r>
+              <a:rPr sz="1050">
+                <a:solidFill>
+                  <a:srgbClr val="1565C0"/>
+                </a:solidFill>
+                <a:latin typeface="Calibri"/>
+                <a:hlinkClick r:id="rId11"/>
+              </a:rPr>
+              <a:t>atlantic.fr  -  thermor.fr</a:t>
+            </a:r>
+          </a:p>
+          <a:p>
+            <a:pPr>
+              <a:lnSpc>
+                <a:spcPct val="100000"/>
+              </a:lnSpc>
+              <a:spcAft>
+                <a:spcPts val="600"/>
+              </a:spcAft>
+            </a:pPr>
+            <a:r>
+              <a:rPr sz="1100" b="1">
+                <a:solidFill>
+                  <a:srgbClr val="37474F"/>
+                </a:solidFill>
+                <a:latin typeface="Calibri"/>
+              </a:rPr>
+              <a:t>Chaudiere a granules </a:t>
+            </a:r>
+          </a:p>
+          <a:p>
+            <a:pPr>
+              <a:lnSpc>
+                <a:spcPct val="100000"/>
+              </a:lnSpc>
+              <a:spcAft>
+                <a:spcPts val="600"/>
+              </a:spcAft>
+            </a:pPr>
+            <a:r>
+              <a:rPr sz="1050">
+                <a:solidFill>
+                  <a:srgbClr val="1565C0"/>
+                </a:solidFill>
+                <a:latin typeface="Calibri"/>
+                <a:hlinkClick r:id="rId12"/>
+              </a:rPr>
+              <a:t>oekofen.com  -  hargassner.com</a:t>
+            </a:r>
+          </a:p>
+          <a:p>
+            <a:pPr>
+              <a:lnSpc>
+                <a:spcPct val="100000"/>
+              </a:lnSpc>
+              <a:spcAft>
+                <a:spcPts val="600"/>
+              </a:spcAft>
+            </a:pPr>
+            <a:r>
+              <a:rPr sz="1100" b="1">
+                <a:solidFill>
+                  <a:srgbClr val="37474F"/>
+                </a:solidFill>
+                <a:latin typeface="Calibri"/>
+              </a:rPr>
+              <a:t>Enduit / finition ITE </a:t>
+            </a:r>
+          </a:p>
+          <a:p>
+            <a:pPr>
+              <a:lnSpc>
+                <a:spcPct val="100000"/>
+              </a:lnSpc>
+              <a:spcAft>
+                <a:spcPts val="600"/>
+              </a:spcAft>
+            </a:pPr>
+            <a:r>
+              <a:rPr sz="1050">
+                <a:solidFill>
+                  <a:srgbClr val="1565C0"/>
+                </a:solidFill>
+                <a:latin typeface="Calibri"/>
+                <a:hlinkClick r:id="rId13"/>
+              </a:rPr>
+              <a:t>fr.weber  -  parexlanko.com</a:t>
+            </a:r>
+          </a:p>
+        </p:txBody>
+      </p:sp>
+      <p:sp>
+        <p:nvSpPr>
+          <p:cNvPr id="17" name="Rounded Rectangle 16"/>
+          <p:cNvSpPr/>
+          <p:nvPr/>
+        </p:nvSpPr>
+        <p:spPr>
+          <a:xfrm>
+            <a:off x="8046720" y="1508760"/>
+            <a:ext cx="3611880" cy="4709160"/>
+          </a:xfrm>
+          <a:prstGeom prst="roundRect">
+            <a:avLst/>
+          </a:prstGeom>
+          <a:solidFill>
+            <a:srgbClr val="FFFFFF"/>
+          </a:solidFill>
+          <a:ln w="12700">
+            <a:solidFill>
+              <a:srgbClr val="90A4AE"/>
+            </a:solidFill>
+          </a:ln>
+          <a:effectLst/>
+        </p:spPr>
+        <p:style>
+          <a:lnRef idx="1">
+            <a:schemeClr val="accent1"/>
+          </a:lnRef>
+          <a:fillRef idx="3">
+            <a:schemeClr val="accent1"/>
+          </a:fillRef>
+          <a:effectRef idx="2">
+            <a:schemeClr val="accent1"/>
+          </a:effectRef>
+          <a:fontRef idx="minor">
+            <a:schemeClr val="lt1"/>
+          </a:fontRef>
+        </p:style>
+        <p:txBody>
+          <a:bodyPr rtlCol="0" anchor="ctr"/>
+          <a:lstStyle/>
+          <a:p>
+            <a:pPr algn="ctr"/>
+          </a:p>
+        </p:txBody>
+      </p:sp>
+      <p:sp>
+        <p:nvSpPr>
+          <p:cNvPr id="18" name="Rounded Rectangle 17"/>
+          <p:cNvSpPr/>
+          <p:nvPr/>
+        </p:nvSpPr>
+        <p:spPr>
+          <a:xfrm>
+            <a:off x="8046720" y="1508760"/>
+            <a:ext cx="3611880" cy="502920"/>
+          </a:xfrm>
+          <a:prstGeom prst="roundRect">
+            <a:avLst/>
+          </a:prstGeom>
+          <a:solidFill>
+            <a:srgbClr val="E65100"/>
+          </a:solidFill>
+          <a:ln>
+            <a:noFill/>
+          </a:ln>
+          <a:effectLst/>
+        </p:spPr>
+        <p:style>
+          <a:lnRef idx="1">
+            <a:schemeClr val="accent1"/>
+          </a:lnRef>
+          <a:fillRef idx="3">
+            <a:schemeClr val="accent1"/>
+          </a:fillRef>
+          <a:effectRef idx="2">
+            <a:schemeClr val="accent1"/>
+          </a:effectRef>
+          <a:fontRef idx="minor">
+            <a:schemeClr val="lt1"/>
+          </a:fontRef>
+        </p:style>
+        <p:txBody>
+          <a:bodyPr rtlCol="0" anchor="ctr"/>
+          <a:lstStyle/>
+          <a:p>
+            <a:pPr algn="ctr"/>
+          </a:p>
+        </p:txBody>
+      </p:sp>
+      <p:sp>
+        <p:nvSpPr>
+          <p:cNvPr id="19" name="TextBox 18"/>
+          <p:cNvSpPr txBox="1"/>
+          <p:nvPr/>
+        </p:nvSpPr>
+        <p:spPr>
+          <a:xfrm>
+            <a:off x="8046720" y="1508760"/>
+            <a:ext cx="3611880" cy="502920"/>
+          </a:xfrm>
+          <a:prstGeom prst="rect">
+            <a:avLst/>
+          </a:prstGeom>
+          <a:noFill/>
+        </p:spPr>
+        <p:txBody>
+          <a:bodyPr wrap="square" anchor="ctr" lIns="25400" rIns="25400" tIns="25400" bIns="25400">
+            <a:spAutoFit/>
+          </a:bodyPr>
+          <a:lstStyle/>
+          <a:p>
+            <a:pPr algn="ctr">
+              <a:lnSpc>
+                <a:spcPct val="100000"/>
+              </a:lnSpc>
+              <a:spcAft>
+                <a:spcPts val="400"/>
+              </a:spcAft>
+            </a:pPr>
+            <a:r>
+              <a:rPr sz="1400" b="1" i="0">
+                <a:solidFill>
+                  <a:srgbClr val="FFFFFF"/>
+                </a:solidFill>
+                <a:latin typeface="Calibri"/>
+              </a:rPr>
+              <a:t>Donnees &amp; reglementation</a:t>
+            </a:r>
+          </a:p>
+        </p:txBody>
+      </p:sp>
+      <p:sp>
+        <p:nvSpPr>
+          <p:cNvPr id="20" name="TextBox 19"/>
+          <p:cNvSpPr txBox="1"/>
+          <p:nvPr/>
+        </p:nvSpPr>
+        <p:spPr>
+          <a:xfrm>
+            <a:off x="8211312" y="2148840"/>
+            <a:ext cx="3300984" cy="3931920"/>
+          </a:xfrm>
+          <a:prstGeom prst="rect">
+            <a:avLst/>
+          </a:prstGeom>
+          <a:noFill/>
+        </p:spPr>
+        <p:txBody>
+          <a:bodyPr wrap="square">
+            <a:spAutoFit/>
+          </a:bodyPr>
+          <a:lstStyle/>
+          <a:p>
+            <a:pPr>
+              <a:lnSpc>
+                <a:spcPct val="100000"/>
+              </a:lnSpc>
+              <a:spcAft>
+                <a:spcPts val="600"/>
+              </a:spcAft>
+            </a:pPr>
+            <a:r>
+              <a:rPr sz="1100" b="1">
+                <a:solidFill>
+                  <a:srgbClr val="37474F"/>
+                </a:solidFill>
+                <a:latin typeface="Calibri"/>
+              </a:rPr>
+              <a:t>ADEME (energie / climat) </a:t>
+            </a:r>
+          </a:p>
+          <a:p>
+            <a:pPr>
+              <a:lnSpc>
+                <a:spcPct val="100000"/>
+              </a:lnSpc>
+              <a:spcAft>
+                <a:spcPts val="600"/>
+              </a:spcAft>
+            </a:pPr>
+            <a:r>
+              <a:rPr sz="1050">
+                <a:solidFill>
+                  <a:srgbClr val="1565C0"/>
+                </a:solidFill>
+                <a:latin typeface="Calibri"/>
+                <a:hlinkClick r:id="rId14"/>
+              </a:rPr>
+              <a:t>ademe.fr</a:t>
+            </a:r>
+          </a:p>
+          <a:p>
+            <a:pPr>
+              <a:lnSpc>
+                <a:spcPct val="100000"/>
+              </a:lnSpc>
+              <a:spcAft>
+                <a:spcPts val="600"/>
+              </a:spcAft>
+            </a:pPr>
+            <a:r>
+              <a:rPr sz="1100" b="1">
+                <a:solidFill>
+                  <a:srgbClr val="37474F"/>
+                </a:solidFill>
+                <a:latin typeface="Calibri"/>
+              </a:rPr>
+              <a:t>DPE - methode 3CL &amp; observatoire </a:t>
+            </a:r>
+          </a:p>
+          <a:p>
+            <a:pPr>
+              <a:lnSpc>
+                <a:spcPct val="100000"/>
+              </a:lnSpc>
+              <a:spcAft>
+                <a:spcPts val="600"/>
+              </a:spcAft>
+            </a:pPr>
+            <a:r>
+              <a:rPr sz="1050">
+                <a:solidFill>
+                  <a:srgbClr val="1565C0"/>
+                </a:solidFill>
+                <a:latin typeface="Calibri"/>
+                <a:hlinkClick r:id="rId15"/>
+              </a:rPr>
+              <a:t>observatoire-dpe-audit.ademe.fr</a:t>
+            </a:r>
+          </a:p>
+          <a:p>
+            <a:pPr>
+              <a:lnSpc>
+                <a:spcPct val="100000"/>
+              </a:lnSpc>
+              <a:spcAft>
+                <a:spcPts val="600"/>
+              </a:spcAft>
+            </a:pPr>
+            <a:r>
+              <a:rPr sz="1100" b="1">
+                <a:solidFill>
+                  <a:srgbClr val="37474F"/>
+                </a:solidFill>
+                <a:latin typeface="Calibri"/>
+              </a:rPr>
+              <a:t>Reglementation (CCH, arretes DPE) </a:t>
+            </a:r>
+          </a:p>
+          <a:p>
+            <a:pPr>
+              <a:lnSpc>
+                <a:spcPct val="100000"/>
+              </a:lnSpc>
+              <a:spcAft>
+                <a:spcPts val="600"/>
+              </a:spcAft>
+            </a:pPr>
+            <a:r>
+              <a:rPr sz="1050">
+                <a:solidFill>
+                  <a:srgbClr val="1565C0"/>
+                </a:solidFill>
+                <a:latin typeface="Calibri"/>
+                <a:hlinkClick r:id="rId16"/>
+              </a:rPr>
+              <a:t>legifrance.gouv.fr</a:t>
+            </a:r>
+          </a:p>
+          <a:p>
+            <a:pPr>
+              <a:lnSpc>
+                <a:spcPct val="100000"/>
+              </a:lnSpc>
+              <a:spcAft>
+                <a:spcPts val="600"/>
+              </a:spcAft>
+            </a:pPr>
+            <a:r>
+              <a:rPr sz="1100" b="1">
+                <a:solidFill>
+                  <a:srgbClr val="37474F"/>
+                </a:solidFill>
+                <a:latin typeface="Calibri"/>
+              </a:rPr>
+              <a:t>Urbanisme / PLU (declaration prealable) </a:t>
+            </a:r>
+          </a:p>
+          <a:p>
+            <a:pPr>
+              <a:lnSpc>
+                <a:spcPct val="100000"/>
+              </a:lnSpc>
+              <a:spcAft>
+                <a:spcPts val="600"/>
+              </a:spcAft>
+            </a:pPr>
+            <a:r>
+              <a:rPr sz="1050">
+                <a:solidFill>
+                  <a:srgbClr val="1565C0"/>
+                </a:solidFill>
+                <a:latin typeface="Calibri"/>
+                <a:hlinkClick r:id="rId17"/>
+              </a:rPr>
+              <a:t>geoportail-urbanisme.gouv.fr</a:t>
+            </a:r>
+          </a:p>
+          <a:p>
+            <a:pPr>
+              <a:lnSpc>
+                <a:spcPct val="100000"/>
+              </a:lnSpc>
+              <a:spcAft>
+                <a:spcPts val="600"/>
+              </a:spcAft>
+            </a:pPr>
+            <a:r>
+              <a:rPr sz="1100" b="1">
+                <a:solidFill>
+                  <a:srgbClr val="37474F"/>
+                </a:solidFill>
+                <a:latin typeface="Calibri"/>
+              </a:rPr>
+              <a:t>Prix de l'energie (statistiques) </a:t>
+            </a:r>
+          </a:p>
+          <a:p>
+            <a:pPr>
+              <a:lnSpc>
+                <a:spcPct val="100000"/>
+              </a:lnSpc>
+              <a:spcAft>
+                <a:spcPts val="600"/>
+              </a:spcAft>
+            </a:pPr>
+            <a:r>
+              <a:rPr sz="1050">
+                <a:solidFill>
+                  <a:srgbClr val="1565C0"/>
+                </a:solidFill>
+                <a:latin typeface="Calibri"/>
+                <a:hlinkClick r:id="rId18"/>
+              </a:rPr>
+              <a:t>statistiques.developpement-durable.gouv.fr</a:t>
+            </a:r>
+          </a:p>
+          <a:p>
+            <a:pPr>
+              <a:lnSpc>
+                <a:spcPct val="100000"/>
+              </a:lnSpc>
+              <a:spcAft>
+                <a:spcPts val="600"/>
+              </a:spcAft>
+            </a:pPr>
+            <a:r>
+              <a:rPr sz="1100" b="1">
+                <a:solidFill>
+                  <a:srgbClr val="37474F"/>
+                </a:solidFill>
+                <a:latin typeface="Calibri"/>
+              </a:rPr>
+              <a:t>Donnees climatiques (DJU, zone H1) </a:t>
+            </a:r>
+          </a:p>
+          <a:p>
+            <a:pPr>
+              <a:lnSpc>
+                <a:spcPct val="100000"/>
+              </a:lnSpc>
+              <a:spcAft>
+                <a:spcPts val="600"/>
+              </a:spcAft>
+            </a:pPr>
+            <a:r>
+              <a:rPr sz="1050">
+                <a:solidFill>
+                  <a:srgbClr val="1565C0"/>
+                </a:solidFill>
+                <a:latin typeface="Calibri"/>
+                <a:hlinkClick r:id="rId19"/>
+              </a:rPr>
+              <a:t>meteofrance.com</a:t>
+            </a:r>
+          </a:p>
+        </p:txBody>
+      </p:sp>
+    </p:spTree>
+  </p:cSld>
+  <p:clrMapOvr>
+    <a:masterClrMapping/>
+  </p:clrMapOvr>
+</p:sld>
+</file>
+
 <file path=ppt/slides/slide3.xml><?xml version="1.0" encoding="utf-8"?>
 <p:sld xmlns:a="http://schemas.openxmlformats.org/drawingml/2006/main" xmlns:p="http://schemas.openxmlformats.org/presentationml/2006/main" xmlns:r="http://schemas.openxmlformats.org/officeDocument/2006/relationships">
   <p:cSld>

--- a/Soutenance_Renovation_Saint-Jean-de-Chevelu.pptx
+++ b/Soutenance_Renovation_Saint-Jean-de-Chevelu.pptx
@@ -2150,7 +2150,7 @@
           <a:lstStyle/>
           <a:p>
             <a:r>
-              <a:t>En annexe, j'ai regroupe toutes mes sources : a gauche les aides et le financement - France Renov', MaPrimeRenov', le simulateur officiel, l'Anah, l'eco-PTZ et l'ASDER qui est l'agence locale de l'energie en Savoie. Au centre, les fournisseurs et marques des materiaux et equipements que j'ai retenus. A droite, les sources techniques et reglementaires : l'ADEME, la methode 3CL du DPE, Legifrance pour la reglementation, le geoportail de l'urbanisme, les statistiques de prix de l'energie et Meteo-France pour les donnees climatiques. Je me tiens a votre disposition si vous souhaitez des precisions sur l'une de ces sources.</a:t>
+              <a:t>Pour la transparence : l'essentiel de l'etude - la modelisation, le bilan des deperditions, le calcul du DPE, la simulation des gains et le dimensionnement - a ete realise avec le logiciel Pleiades, d'IZUBA energies, qui fournit aussi les estimations de couts. En complement, je me suis appuye sur France Renov' et son simulateur pour les aides, l'ASDER comme conseil local en Savoie, Legifrance pour la reglementation, les documentations des fabricants pour les produits, et l'ADEME comme reference energie-climat. Je peux detailler n'importe lequel de ces points si vous le souhaitez.</a:t>
             </a:r>
           </a:p>
         </p:txBody>
@@ -27001,7 +27001,7 @@
                 </a:solidFill>
                 <a:latin typeface="Calibri"/>
               </a:rPr>
-              <a:t>References &amp; sources</a:t>
+              <a:t>Outils &amp; sources</a:t>
             </a:r>
           </a:p>
         </p:txBody>
@@ -27043,7 +27043,7 @@
                 </a:solidFill>
                 <a:latin typeface="Calibri"/>
               </a:rPr>
-              <a:t>Annexe - aides, fournisseurs et donnees techniques</a:t>
+              <a:t>Etude realisee principalement avec le logiciel Pleiades</a:t>
             </a:r>
           </a:p>
         </p:txBody>
@@ -27184,8 +27184,8 @@
         </p:nvSpPr>
         <p:spPr>
           <a:xfrm>
-            <a:off x="548640" y="1508760"/>
-            <a:ext cx="3611880" cy="4709160"/>
+            <a:off x="640080" y="1554480"/>
+            <a:ext cx="6035040" cy="4480560"/>
           </a:xfrm>
           <a:prstGeom prst="roundRect">
             <a:avLst/>
@@ -27230,8 +27230,8 @@
         </p:nvSpPr>
         <p:spPr>
           <a:xfrm>
-            <a:off x="548640" y="1508760"/>
-            <a:ext cx="3611880" cy="502920"/>
+            <a:off x="640080" y="1554480"/>
+            <a:ext cx="6035040" cy="868680"/>
           </a:xfrm>
           <a:prstGeom prst="roundRect">
             <a:avLst/>
@@ -27274,8 +27274,8 @@
         </p:nvSpPr>
         <p:spPr>
           <a:xfrm>
-            <a:off x="548640" y="1508760"/>
-            <a:ext cx="3611880" cy="502920"/>
+            <a:off x="868680" y="1627632"/>
+            <a:ext cx="5577840" cy="777240"/>
           </a:xfrm>
           <a:prstGeom prst="rect">
             <a:avLst/>
@@ -27283,12 +27283,73 @@
           <a:noFill/>
         </p:spPr>
         <p:txBody>
-          <a:bodyPr wrap="square" anchor="ctr" lIns="25400" rIns="25400" tIns="25400" bIns="25400">
+          <a:bodyPr wrap="square" anchor="t" lIns="25400" rIns="25400" tIns="25400" bIns="25400">
             <a:spAutoFit/>
           </a:bodyPr>
           <a:lstStyle/>
           <a:p>
-            <a:pPr algn="ctr">
+            <a:pPr algn="l">
+              <a:lnSpc>
+                <a:spcPct val="105000"/>
+              </a:lnSpc>
+              <a:spcAft>
+                <a:spcPts val="400"/>
+              </a:spcAft>
+            </a:pPr>
+            <a:r>
+              <a:rPr sz="2200" b="1" i="0">
+                <a:solidFill>
+                  <a:srgbClr val="FFFFFF"/>
+                </a:solidFill>
+                <a:latin typeface="Calibri"/>
+              </a:rPr>
+              <a:t>Pleiades</a:t>
+            </a:r>
+          </a:p>
+          <a:p>
+            <a:pPr algn="l">
+              <a:lnSpc>
+                <a:spcPct val="105000"/>
+              </a:lnSpc>
+              <a:spcAft>
+                <a:spcPts val="400"/>
+              </a:spcAft>
+            </a:pPr>
+            <a:r>
+              <a:rPr sz="1200" b="0" i="0">
+                <a:solidFill>
+                  <a:srgbClr val="C8E6C9"/>
+                </a:solidFill>
+                <a:latin typeface="Calibri"/>
+              </a:rPr>
+              <a:t>Logiciel de simulation thermique du batiment - IZUBA energies</a:t>
+            </a:r>
+          </a:p>
+        </p:txBody>
+      </p:sp>
+      <p:sp>
+        <p:nvSpPr>
+          <p:cNvPr id="12" name="TextBox 11"/>
+          <p:cNvSpPr txBox="1"/>
+          <p:nvPr/>
+        </p:nvSpPr>
+        <p:spPr>
+          <a:xfrm>
+            <a:off x="914400" y="2606040"/>
+            <a:ext cx="5486400" cy="365760"/>
+          </a:xfrm>
+          <a:prstGeom prst="rect">
+            <a:avLst/>
+          </a:prstGeom>
+          <a:noFill/>
+        </p:spPr>
+        <p:txBody>
+          <a:bodyPr wrap="square" anchor="t" lIns="25400" rIns="25400" tIns="25400" bIns="25400">
+            <a:spAutoFit/>
+          </a:bodyPr>
+          <a:lstStyle/>
+          <a:p>
+            <a:pPr algn="l">
               <a:lnSpc>
                 <a:spcPct val="100000"/>
               </a:lnSpc>
@@ -27297,27 +27358,27 @@
               </a:spcAft>
             </a:pPr>
             <a:r>
-              <a:rPr sz="1400" b="1" i="0">
-                <a:solidFill>
-                  <a:srgbClr val="FFFFFF"/>
-                </a:solidFill>
-                <a:latin typeface="Calibri"/>
-              </a:rPr>
-              <a:t>Aides &amp; financement</a:t>
-            </a:r>
-          </a:p>
-        </p:txBody>
-      </p:sp>
-      <p:sp>
-        <p:nvSpPr>
-          <p:cNvPr id="12" name="TextBox 11"/>
+              <a:rPr sz="1300" b="1" i="0">
+                <a:solidFill>
+                  <a:srgbClr val="37474F"/>
+                </a:solidFill>
+                <a:latin typeface="Calibri"/>
+              </a:rPr>
+              <a:t>Tout le travail technique et chiffre repose sur Pleiades :</a:t>
+            </a:r>
+          </a:p>
+        </p:txBody>
+      </p:sp>
+      <p:sp>
+        <p:nvSpPr>
+          <p:cNvPr id="13" name="TextBox 12"/>
           <p:cNvSpPr txBox="1"/>
           <p:nvPr/>
         </p:nvSpPr>
         <p:spPr>
           <a:xfrm>
-            <a:off x="713232" y="2148840"/>
-            <a:ext cx="3300984" cy="3931920"/>
+            <a:off x="914400" y="3063240"/>
+            <a:ext cx="5577840" cy="2834640"/>
           </a:xfrm>
           <a:prstGeom prst="rect">
             <a:avLst/>
@@ -27332,260 +27393,192 @@
           <a:p>
             <a:pPr>
               <a:lnSpc>
-                <a:spcPct val="100000"/>
+                <a:spcPct val="105000"/>
               </a:lnSpc>
               <a:spcAft>
-                <a:spcPts val="600"/>
+                <a:spcPts val="1000"/>
               </a:spcAft>
             </a:pPr>
             <a:r>
-              <a:rPr sz="1100" b="1">
+              <a:rPr sz="1350" b="1">
+                <a:solidFill>
+                  <a:srgbClr val="2E7D32"/>
+                </a:solidFill>
+                <a:latin typeface="Calibri"/>
+              </a:rPr>
+              <a:t>●  </a:t>
+            </a:r>
+            <a:r>
+              <a:rPr sz="1350">
                 <a:solidFill>
                   <a:srgbClr val="37474F"/>
                 </a:solidFill>
                 <a:latin typeface="Calibri"/>
               </a:rPr>
-              <a:t>France Renov' (service public) </a:t>
+              <a:t>Modelisation du batiment et de son enveloppe</a:t>
             </a:r>
           </a:p>
           <a:p>
             <a:pPr>
               <a:lnSpc>
-                <a:spcPct val="100000"/>
+                <a:spcPct val="105000"/>
               </a:lnSpc>
               <a:spcAft>
-                <a:spcPts val="600"/>
+                <a:spcPts val="1000"/>
               </a:spcAft>
             </a:pPr>
             <a:r>
-              <a:rPr sz="1050">
-                <a:solidFill>
-                  <a:srgbClr val="1565C0"/>
-                </a:solidFill>
-                <a:latin typeface="Calibri"/>
-                <a:hlinkClick r:id="rId2"/>
-              </a:rPr>
-              <a:t>france-renov.gouv.fr</a:t>
+              <a:rPr sz="1350" b="1">
+                <a:solidFill>
+                  <a:srgbClr val="2E7D32"/>
+                </a:solidFill>
+                <a:latin typeface="Calibri"/>
+              </a:rPr>
+              <a:t>●  </a:t>
+            </a:r>
+            <a:r>
+              <a:rPr sz="1350">
+                <a:solidFill>
+                  <a:srgbClr val="37474F"/>
+                </a:solidFill>
+                <a:latin typeface="Calibri"/>
+              </a:rPr>
+              <a:t>Bilan des deperditions &amp; coefficient Ubat</a:t>
             </a:r>
           </a:p>
           <a:p>
             <a:pPr>
               <a:lnSpc>
-                <a:spcPct val="100000"/>
+                <a:spcPct val="105000"/>
               </a:lnSpc>
               <a:spcAft>
-                <a:spcPts val="600"/>
+                <a:spcPts val="1000"/>
               </a:spcAft>
             </a:pPr>
             <a:r>
-              <a:rPr sz="1100" b="1">
+              <a:rPr sz="1350" b="1">
+                <a:solidFill>
+                  <a:srgbClr val="2E7D32"/>
+                </a:solidFill>
+                <a:latin typeface="Calibri"/>
+              </a:rPr>
+              <a:t>●  </a:t>
+            </a:r>
+            <a:r>
+              <a:rPr sz="1350">
                 <a:solidFill>
                   <a:srgbClr val="37474F"/>
                 </a:solidFill>
                 <a:latin typeface="Calibri"/>
               </a:rPr>
-              <a:t>MaPrimeRenov' </a:t>
+              <a:t>Calcul du DPE (energie primaire, CO2, etiquettes)</a:t>
             </a:r>
           </a:p>
           <a:p>
             <a:pPr>
               <a:lnSpc>
-                <a:spcPct val="100000"/>
+                <a:spcPct val="105000"/>
               </a:lnSpc>
               <a:spcAft>
-                <a:spcPts val="600"/>
+                <a:spcPts val="1000"/>
               </a:spcAft>
             </a:pPr>
             <a:r>
-              <a:rPr sz="1050">
-                <a:solidFill>
-                  <a:srgbClr val="1565C0"/>
-                </a:solidFill>
-                <a:latin typeface="Calibri"/>
-                <a:hlinkClick r:id="rId3"/>
-              </a:rPr>
-              <a:t>maprimerenov.gouv.fr</a:t>
+              <a:rPr sz="1350" b="1">
+                <a:solidFill>
+                  <a:srgbClr val="2E7D32"/>
+                </a:solidFill>
+                <a:latin typeface="Calibri"/>
+              </a:rPr>
+              <a:t>●  </a:t>
+            </a:r>
+            <a:r>
+              <a:rPr sz="1350">
+                <a:solidFill>
+                  <a:srgbClr val="37474F"/>
+                </a:solidFill>
+                <a:latin typeface="Calibri"/>
+              </a:rPr>
+              <a:t>Simulation des gains energetiques apres travaux</a:t>
             </a:r>
           </a:p>
           <a:p>
             <a:pPr>
               <a:lnSpc>
-                <a:spcPct val="100000"/>
+                <a:spcPct val="105000"/>
               </a:lnSpc>
               <a:spcAft>
-                <a:spcPts val="600"/>
+                <a:spcPts val="1000"/>
               </a:spcAft>
             </a:pPr>
             <a:r>
-              <a:rPr sz="1100" b="1">
+              <a:rPr sz="1350" b="1">
+                <a:solidFill>
+                  <a:srgbClr val="2E7D32"/>
+                </a:solidFill>
+                <a:latin typeface="Calibri"/>
+              </a:rPr>
+              <a:t>●  </a:t>
+            </a:r>
+            <a:r>
+              <a:rPr sz="1350">
                 <a:solidFill>
                   <a:srgbClr val="37474F"/>
                 </a:solidFill>
                 <a:latin typeface="Calibri"/>
               </a:rPr>
-              <a:t>Simulateur d'aides </a:t>
+              <a:t>Dimensionnement des equipements (chauffage, VMC)</a:t>
             </a:r>
           </a:p>
           <a:p>
             <a:pPr>
               <a:lnSpc>
-                <a:spcPct val="100000"/>
+                <a:spcPct val="105000"/>
               </a:lnSpc>
               <a:spcAft>
-                <a:spcPts val="600"/>
+                <a:spcPts val="1000"/>
               </a:spcAft>
             </a:pPr>
             <a:r>
-              <a:rPr sz="1050">
-                <a:solidFill>
-                  <a:srgbClr val="1565C0"/>
-                </a:solidFill>
-                <a:latin typeface="Calibri"/>
-                <a:hlinkClick r:id="rId4"/>
-              </a:rPr>
-              <a:t>mesaidesreno.gouv.fr</a:t>
-            </a:r>
-          </a:p>
-          <a:p>
-            <a:pPr>
-              <a:lnSpc>
-                <a:spcPct val="100000"/>
-              </a:lnSpc>
-              <a:spcAft>
-                <a:spcPts val="600"/>
-              </a:spcAft>
-            </a:pPr>
-            <a:r>
-              <a:rPr sz="1100" b="1">
+              <a:rPr sz="1350" b="1">
+                <a:solidFill>
+                  <a:srgbClr val="2E7D32"/>
+                </a:solidFill>
+                <a:latin typeface="Calibri"/>
+              </a:rPr>
+              <a:t>●  </a:t>
+            </a:r>
+            <a:r>
+              <a:rPr sz="1350">
                 <a:solidFill>
                   <a:srgbClr val="37474F"/>
                 </a:solidFill>
                 <a:latin typeface="Calibri"/>
               </a:rPr>
-              <a:t>Anah </a:t>
-            </a:r>
-          </a:p>
-          <a:p>
-            <a:pPr>
-              <a:lnSpc>
-                <a:spcPct val="100000"/>
-              </a:lnSpc>
-              <a:spcAft>
-                <a:spcPts val="600"/>
-              </a:spcAft>
-            </a:pPr>
-            <a:r>
-              <a:rPr sz="1050">
-                <a:solidFill>
-                  <a:srgbClr val="1565C0"/>
-                </a:solidFill>
-                <a:latin typeface="Calibri"/>
-                <a:hlinkClick r:id="rId5"/>
-              </a:rPr>
-              <a:t>anah.gouv.fr</a:t>
-            </a:r>
-          </a:p>
-          <a:p>
-            <a:pPr>
-              <a:lnSpc>
-                <a:spcPct val="100000"/>
-              </a:lnSpc>
-              <a:spcAft>
-                <a:spcPts val="600"/>
-              </a:spcAft>
-            </a:pPr>
-            <a:r>
-              <a:rPr sz="1100" b="1">
-                <a:solidFill>
-                  <a:srgbClr val="37474F"/>
-                </a:solidFill>
-                <a:latin typeface="Calibri"/>
-              </a:rPr>
-              <a:t>Eco-PTZ &amp; CEE </a:t>
-            </a:r>
-          </a:p>
-          <a:p>
-            <a:pPr>
-              <a:lnSpc>
-                <a:spcPct val="100000"/>
-              </a:lnSpc>
-              <a:spcAft>
-                <a:spcPts val="600"/>
-              </a:spcAft>
-            </a:pPr>
-            <a:r>
-              <a:rPr sz="1050">
-                <a:solidFill>
-                  <a:srgbClr val="1565C0"/>
-                </a:solidFill>
-                <a:latin typeface="Calibri"/>
-                <a:hlinkClick r:id="rId6"/>
-              </a:rPr>
-              <a:t>service-public.fr</a:t>
-            </a:r>
-          </a:p>
-          <a:p>
-            <a:pPr>
-              <a:lnSpc>
-                <a:spcPct val="100000"/>
-              </a:lnSpc>
-              <a:spcAft>
-                <a:spcPts val="600"/>
-              </a:spcAft>
-            </a:pPr>
-            <a:r>
-              <a:rPr sz="1100" b="1">
-                <a:solidFill>
-                  <a:srgbClr val="37474F"/>
-                </a:solidFill>
-                <a:latin typeface="Calibri"/>
-              </a:rPr>
-              <a:t>ASDER - espace conseil (Savoie) </a:t>
-            </a:r>
-          </a:p>
-          <a:p>
-            <a:pPr>
-              <a:lnSpc>
-                <a:spcPct val="100000"/>
-              </a:lnSpc>
-              <a:spcAft>
-                <a:spcPts val="600"/>
-              </a:spcAft>
-            </a:pPr>
-            <a:r>
-              <a:rPr sz="1050">
-                <a:solidFill>
-                  <a:srgbClr val="1565C0"/>
-                </a:solidFill>
-                <a:latin typeface="Calibri"/>
-                <a:hlinkClick r:id="rId7"/>
-              </a:rPr>
-              <a:t>asder.asso.fr</a:t>
-            </a:r>
-          </a:p>
-        </p:txBody>
-      </p:sp>
-      <p:sp>
-        <p:nvSpPr>
-          <p:cNvPr id="13" name="Rounded Rectangle 12"/>
+              <a:t>Estimation des couts de travaux et analyse economique</a:t>
+            </a:r>
+          </a:p>
+        </p:txBody>
+      </p:sp>
+      <p:sp>
+        <p:nvSpPr>
+          <p:cNvPr id="14" name="Rounded Rectangle 13"/>
           <p:cNvSpPr/>
           <p:nvPr/>
         </p:nvSpPr>
         <p:spPr>
           <a:xfrm>
-            <a:off x="4297680" y="1508760"/>
-            <a:ext cx="3611880" cy="4709160"/>
+            <a:off x="6858000" y="1554480"/>
+            <a:ext cx="4663440" cy="4480560"/>
           </a:xfrm>
           <a:prstGeom prst="roundRect">
             <a:avLst/>
           </a:prstGeom>
           <a:solidFill>
-            <a:srgbClr val="FFFFFF"/>
+            <a:srgbClr val="E8F5E9"/>
           </a:solidFill>
-          <a:ln w="12700">
-            <a:solidFill>
-              <a:srgbClr val="90A4AE"/>
-            </a:solidFill>
+          <a:ln>
+            <a:noFill/>
           </a:ln>
           <a:effectLst/>
         </p:spPr>
@@ -27613,58 +27606,14 @@
       </p:sp>
       <p:sp>
         <p:nvSpPr>
-          <p:cNvPr id="14" name="Rounded Rectangle 13"/>
-          <p:cNvSpPr/>
-          <p:nvPr/>
-        </p:nvSpPr>
-        <p:spPr>
-          <a:xfrm>
-            <a:off x="4297680" y="1508760"/>
-            <a:ext cx="3611880" cy="502920"/>
-          </a:xfrm>
-          <a:prstGeom prst="roundRect">
-            <a:avLst/>
-          </a:prstGeom>
-          <a:solidFill>
-            <a:srgbClr val="1565C0"/>
-          </a:solidFill>
-          <a:ln>
-            <a:noFill/>
-          </a:ln>
-          <a:effectLst/>
-        </p:spPr>
-        <p:style>
-          <a:lnRef idx="1">
-            <a:schemeClr val="accent1"/>
-          </a:lnRef>
-          <a:fillRef idx="3">
-            <a:schemeClr val="accent1"/>
-          </a:fillRef>
-          <a:effectRef idx="2">
-            <a:schemeClr val="accent1"/>
-          </a:effectRef>
-          <a:fontRef idx="minor">
-            <a:schemeClr val="lt1"/>
-          </a:fontRef>
-        </p:style>
-        <p:txBody>
-          <a:bodyPr rtlCol="0" anchor="ctr"/>
-          <a:lstStyle/>
-          <a:p>
-            <a:pPr algn="ctr"/>
-          </a:p>
-        </p:txBody>
-      </p:sp>
-      <p:sp>
-        <p:nvSpPr>
           <p:cNvPr id="15" name="TextBox 14"/>
           <p:cNvSpPr txBox="1"/>
           <p:nvPr/>
         </p:nvSpPr>
         <p:spPr>
           <a:xfrm>
-            <a:off x="4297680" y="1508760"/>
-            <a:ext cx="3611880" cy="502920"/>
+            <a:off x="7086600" y="1691640"/>
+            <a:ext cx="4297680" cy="365760"/>
           </a:xfrm>
           <a:prstGeom prst="rect">
             <a:avLst/>
@@ -27672,12 +27621,12 @@
           <a:noFill/>
         </p:spPr>
         <p:txBody>
-          <a:bodyPr wrap="square" anchor="ctr" lIns="25400" rIns="25400" tIns="25400" bIns="25400">
+          <a:bodyPr wrap="square" anchor="t" lIns="25400" rIns="25400" tIns="25400" bIns="25400">
             <a:spAutoFit/>
           </a:bodyPr>
           <a:lstStyle/>
           <a:p>
-            <a:pPr algn="ctr">
+            <a:pPr algn="l">
               <a:lnSpc>
                 <a:spcPct val="100000"/>
               </a:lnSpc>
@@ -27686,13 +27635,13 @@
               </a:spcAft>
             </a:pPr>
             <a:r>
-              <a:rPr sz="1400" b="1" i="0">
-                <a:solidFill>
-                  <a:srgbClr val="FFFFFF"/>
-                </a:solidFill>
-                <a:latin typeface="Calibri"/>
-              </a:rPr>
-              <a:t>Materiaux &amp; equipements</a:t>
+              <a:rPr sz="1500" b="1" i="0">
+                <a:solidFill>
+                  <a:srgbClr val="1B5E20"/>
+                </a:solidFill>
+                <a:latin typeface="Calibri"/>
+              </a:rPr>
+              <a:t>Sources complementaires</a:t>
             </a:r>
           </a:p>
         </p:txBody>
@@ -27705,8 +27654,8 @@
         </p:nvSpPr>
         <p:spPr>
           <a:xfrm>
-            <a:off x="4462272" y="2148840"/>
-            <a:ext cx="3300984" cy="3931920"/>
+            <a:off x="7086600" y="2240280"/>
+            <a:ext cx="4297680" cy="292608"/>
           </a:xfrm>
           <a:prstGeom prst="rect">
             <a:avLst/>
@@ -27714,359 +27663,12 @@
           <a:noFill/>
         </p:spPr>
         <p:txBody>
-          <a:bodyPr wrap="square">
+          <a:bodyPr wrap="square" anchor="t" lIns="25400" rIns="25400" tIns="25400" bIns="25400">
             <a:spAutoFit/>
           </a:bodyPr>
           <a:lstStyle/>
           <a:p>
-            <a:pPr>
-              <a:lnSpc>
-                <a:spcPct val="100000"/>
-              </a:lnSpc>
-              <a:spcAft>
-                <a:spcPts val="600"/>
-              </a:spcAft>
-            </a:pPr>
-            <a:r>
-              <a:rPr sz="1100" b="1">
-                <a:solidFill>
-                  <a:srgbClr val="37474F"/>
-                </a:solidFill>
-                <a:latin typeface="Calibri"/>
-              </a:rPr>
-              <a:t>Laine de bois (ITE) </a:t>
-            </a:r>
-          </a:p>
-          <a:p>
-            <a:pPr>
-              <a:lnSpc>
-                <a:spcPct val="100000"/>
-              </a:lnSpc>
-              <a:spcAft>
-                <a:spcPts val="600"/>
-              </a:spcAft>
-            </a:pPr>
-            <a:r>
-              <a:rPr sz="1050">
-                <a:solidFill>
-                  <a:srgbClr val="1565C0"/>
-                </a:solidFill>
-                <a:latin typeface="Calibri"/>
-                <a:hlinkClick r:id="rId8"/>
-              </a:rPr>
-              <a:t>steico.com  -  soprema.fr</a:t>
-            </a:r>
-          </a:p>
-          <a:p>
-            <a:pPr>
-              <a:lnSpc>
-                <a:spcPct val="100000"/>
-              </a:lnSpc>
-              <a:spcAft>
-                <a:spcPts val="600"/>
-              </a:spcAft>
-            </a:pPr>
-            <a:r>
-              <a:rPr sz="1100" b="1">
-                <a:solidFill>
-                  <a:srgbClr val="37474F"/>
-                </a:solidFill>
-                <a:latin typeface="Calibri"/>
-              </a:rPr>
-              <a:t>Ouate de cellulose </a:t>
-            </a:r>
-          </a:p>
-          <a:p>
-            <a:pPr>
-              <a:lnSpc>
-                <a:spcPct val="100000"/>
-              </a:lnSpc>
-              <a:spcAft>
-                <a:spcPts val="600"/>
-              </a:spcAft>
-            </a:pPr>
-            <a:r>
-              <a:rPr sz="1050">
-                <a:solidFill>
-                  <a:srgbClr val="1565C0"/>
-                </a:solidFill>
-                <a:latin typeface="Calibri"/>
-                <a:hlinkClick r:id="rId9"/>
-              </a:rPr>
-              <a:t>ouateco.com  -  isocell.com</a:t>
-            </a:r>
-          </a:p>
-          <a:p>
-            <a:pPr>
-              <a:lnSpc>
-                <a:spcPct val="100000"/>
-              </a:lnSpc>
-              <a:spcAft>
-                <a:spcPts val="600"/>
-              </a:spcAft>
-            </a:pPr>
-            <a:r>
-              <a:rPr sz="1100" b="1">
-                <a:solidFill>
-                  <a:srgbClr val="37474F"/>
-                </a:solidFill>
-                <a:latin typeface="Calibri"/>
-              </a:rPr>
-              <a:t>VMC hygro B </a:t>
-            </a:r>
-          </a:p>
-          <a:p>
-            <a:pPr>
-              <a:lnSpc>
-                <a:spcPct val="100000"/>
-              </a:lnSpc>
-              <a:spcAft>
-                <a:spcPts val="600"/>
-              </a:spcAft>
-            </a:pPr>
-            <a:r>
-              <a:rPr sz="1050">
-                <a:solidFill>
-                  <a:srgbClr val="1565C0"/>
-                </a:solidFill>
-                <a:latin typeface="Calibri"/>
-                <a:hlinkClick r:id="rId10"/>
-              </a:rPr>
-              <a:t>aldes.fr  -  atlantic.fr</a:t>
-            </a:r>
-          </a:p>
-          <a:p>
-            <a:pPr>
-              <a:lnSpc>
-                <a:spcPct val="100000"/>
-              </a:lnSpc>
-              <a:spcAft>
-                <a:spcPts val="600"/>
-              </a:spcAft>
-            </a:pPr>
-            <a:r>
-              <a:rPr sz="1100" b="1">
-                <a:solidFill>
-                  <a:srgbClr val="37474F"/>
-                </a:solidFill>
-                <a:latin typeface="Calibri"/>
-              </a:rPr>
-              <a:t>Chauffe-eau thermodynamique </a:t>
-            </a:r>
-          </a:p>
-          <a:p>
-            <a:pPr>
-              <a:lnSpc>
-                <a:spcPct val="100000"/>
-              </a:lnSpc>
-              <a:spcAft>
-                <a:spcPts val="600"/>
-              </a:spcAft>
-            </a:pPr>
-            <a:r>
-              <a:rPr sz="1050">
-                <a:solidFill>
-                  <a:srgbClr val="1565C0"/>
-                </a:solidFill>
-                <a:latin typeface="Calibri"/>
-                <a:hlinkClick r:id="rId11"/>
-              </a:rPr>
-              <a:t>atlantic.fr  -  thermor.fr</a:t>
-            </a:r>
-          </a:p>
-          <a:p>
-            <a:pPr>
-              <a:lnSpc>
-                <a:spcPct val="100000"/>
-              </a:lnSpc>
-              <a:spcAft>
-                <a:spcPts val="600"/>
-              </a:spcAft>
-            </a:pPr>
-            <a:r>
-              <a:rPr sz="1100" b="1">
-                <a:solidFill>
-                  <a:srgbClr val="37474F"/>
-                </a:solidFill>
-                <a:latin typeface="Calibri"/>
-              </a:rPr>
-              <a:t>Chaudiere a granules </a:t>
-            </a:r>
-          </a:p>
-          <a:p>
-            <a:pPr>
-              <a:lnSpc>
-                <a:spcPct val="100000"/>
-              </a:lnSpc>
-              <a:spcAft>
-                <a:spcPts val="600"/>
-              </a:spcAft>
-            </a:pPr>
-            <a:r>
-              <a:rPr sz="1050">
-                <a:solidFill>
-                  <a:srgbClr val="1565C0"/>
-                </a:solidFill>
-                <a:latin typeface="Calibri"/>
-                <a:hlinkClick r:id="rId12"/>
-              </a:rPr>
-              <a:t>oekofen.com  -  hargassner.com</a:t>
-            </a:r>
-          </a:p>
-          <a:p>
-            <a:pPr>
-              <a:lnSpc>
-                <a:spcPct val="100000"/>
-              </a:lnSpc>
-              <a:spcAft>
-                <a:spcPts val="600"/>
-              </a:spcAft>
-            </a:pPr>
-            <a:r>
-              <a:rPr sz="1100" b="1">
-                <a:solidFill>
-                  <a:srgbClr val="37474F"/>
-                </a:solidFill>
-                <a:latin typeface="Calibri"/>
-              </a:rPr>
-              <a:t>Enduit / finition ITE </a:t>
-            </a:r>
-          </a:p>
-          <a:p>
-            <a:pPr>
-              <a:lnSpc>
-                <a:spcPct val="100000"/>
-              </a:lnSpc>
-              <a:spcAft>
-                <a:spcPts val="600"/>
-              </a:spcAft>
-            </a:pPr>
-            <a:r>
-              <a:rPr sz="1050">
-                <a:solidFill>
-                  <a:srgbClr val="1565C0"/>
-                </a:solidFill>
-                <a:latin typeface="Calibri"/>
-                <a:hlinkClick r:id="rId13"/>
-              </a:rPr>
-              <a:t>fr.weber  -  parexlanko.com</a:t>
-            </a:r>
-          </a:p>
-        </p:txBody>
-      </p:sp>
-      <p:sp>
-        <p:nvSpPr>
-          <p:cNvPr id="17" name="Rounded Rectangle 16"/>
-          <p:cNvSpPr/>
-          <p:nvPr/>
-        </p:nvSpPr>
-        <p:spPr>
-          <a:xfrm>
-            <a:off x="8046720" y="1508760"/>
-            <a:ext cx="3611880" cy="4709160"/>
-          </a:xfrm>
-          <a:prstGeom prst="roundRect">
-            <a:avLst/>
-          </a:prstGeom>
-          <a:solidFill>
-            <a:srgbClr val="FFFFFF"/>
-          </a:solidFill>
-          <a:ln w="12700">
-            <a:solidFill>
-              <a:srgbClr val="90A4AE"/>
-            </a:solidFill>
-          </a:ln>
-          <a:effectLst/>
-        </p:spPr>
-        <p:style>
-          <a:lnRef idx="1">
-            <a:schemeClr val="accent1"/>
-          </a:lnRef>
-          <a:fillRef idx="3">
-            <a:schemeClr val="accent1"/>
-          </a:fillRef>
-          <a:effectRef idx="2">
-            <a:schemeClr val="accent1"/>
-          </a:effectRef>
-          <a:fontRef idx="minor">
-            <a:schemeClr val="lt1"/>
-          </a:fontRef>
-        </p:style>
-        <p:txBody>
-          <a:bodyPr rtlCol="0" anchor="ctr"/>
-          <a:lstStyle/>
-          <a:p>
-            <a:pPr algn="ctr"/>
-          </a:p>
-        </p:txBody>
-      </p:sp>
-      <p:sp>
-        <p:nvSpPr>
-          <p:cNvPr id="18" name="Rounded Rectangle 17"/>
-          <p:cNvSpPr/>
-          <p:nvPr/>
-        </p:nvSpPr>
-        <p:spPr>
-          <a:xfrm>
-            <a:off x="8046720" y="1508760"/>
-            <a:ext cx="3611880" cy="502920"/>
-          </a:xfrm>
-          <a:prstGeom prst="roundRect">
-            <a:avLst/>
-          </a:prstGeom>
-          <a:solidFill>
-            <a:srgbClr val="E65100"/>
-          </a:solidFill>
-          <a:ln>
-            <a:noFill/>
-          </a:ln>
-          <a:effectLst/>
-        </p:spPr>
-        <p:style>
-          <a:lnRef idx="1">
-            <a:schemeClr val="accent1"/>
-          </a:lnRef>
-          <a:fillRef idx="3">
-            <a:schemeClr val="accent1"/>
-          </a:fillRef>
-          <a:effectRef idx="2">
-            <a:schemeClr val="accent1"/>
-          </a:effectRef>
-          <a:fontRef idx="minor">
-            <a:schemeClr val="lt1"/>
-          </a:fontRef>
-        </p:style>
-        <p:txBody>
-          <a:bodyPr rtlCol="0" anchor="ctr"/>
-          <a:lstStyle/>
-          <a:p>
-            <a:pPr algn="ctr"/>
-          </a:p>
-        </p:txBody>
-      </p:sp>
-      <p:sp>
-        <p:nvSpPr>
-          <p:cNvPr id="19" name="TextBox 18"/>
-          <p:cNvSpPr txBox="1"/>
-          <p:nvPr/>
-        </p:nvSpPr>
-        <p:spPr>
-          <a:xfrm>
-            <a:off x="8046720" y="1508760"/>
-            <a:ext cx="3611880" cy="502920"/>
-          </a:xfrm>
-          <a:prstGeom prst="rect">
-            <a:avLst/>
-          </a:prstGeom>
-          <a:noFill/>
-        </p:spPr>
-        <p:txBody>
-          <a:bodyPr wrap="square" anchor="ctr" lIns="25400" rIns="25400" tIns="25400" bIns="25400">
-            <a:spAutoFit/>
-          </a:bodyPr>
-          <a:lstStyle/>
-          <a:p>
-            <a:pPr algn="ctr">
+            <a:pPr algn="l">
               <a:lnSpc>
                 <a:spcPct val="100000"/>
               </a:lnSpc>
@@ -28075,27 +27677,27 @@
               </a:spcAft>
             </a:pPr>
             <a:r>
-              <a:rPr sz="1400" b="1" i="0">
-                <a:solidFill>
-                  <a:srgbClr val="FFFFFF"/>
-                </a:solidFill>
-                <a:latin typeface="Calibri"/>
-              </a:rPr>
-              <a:t>Donnees &amp; reglementation</a:t>
-            </a:r>
-          </a:p>
-        </p:txBody>
-      </p:sp>
-      <p:sp>
-        <p:nvSpPr>
-          <p:cNvPr id="20" name="TextBox 19"/>
+              <a:rPr sz="1250" b="1" i="0">
+                <a:solidFill>
+                  <a:srgbClr val="37474F"/>
+                </a:solidFill>
+                <a:latin typeface="Calibri"/>
+              </a:rPr>
+              <a:t>Aides &amp; simulateur (France Renov')</a:t>
+            </a:r>
+          </a:p>
+        </p:txBody>
+      </p:sp>
+      <p:sp>
+        <p:nvSpPr>
+          <p:cNvPr id="17" name="TextBox 16"/>
           <p:cNvSpPr txBox="1"/>
           <p:nvPr/>
         </p:nvSpPr>
         <p:spPr>
           <a:xfrm>
-            <a:off x="8211312" y="2148840"/>
-            <a:ext cx="3300984" cy="3931920"/>
+            <a:off x="7086600" y="2496312"/>
+            <a:ext cx="4297680" cy="274320"/>
           </a:xfrm>
           <a:prstGeom prst="rect">
             <a:avLst/>
@@ -28103,242 +27705,328 @@
           <a:noFill/>
         </p:spPr>
         <p:txBody>
-          <a:bodyPr wrap="square">
+          <a:bodyPr wrap="none">
             <a:spAutoFit/>
           </a:bodyPr>
           <a:lstStyle/>
           <a:p>
-            <a:pPr>
+            <a:r>
+              <a:rPr sz="1150">
+                <a:solidFill>
+                  <a:srgbClr val="1565C0"/>
+                </a:solidFill>
+                <a:latin typeface="Calibri"/>
+                <a:hlinkClick r:id="rId2"/>
+              </a:rPr>
+              <a:t>france-renov.gouv.fr</a:t>
+            </a:r>
+          </a:p>
+        </p:txBody>
+      </p:sp>
+      <p:sp>
+        <p:nvSpPr>
+          <p:cNvPr id="18" name="TextBox 17"/>
+          <p:cNvSpPr txBox="1"/>
+          <p:nvPr/>
+        </p:nvSpPr>
+        <p:spPr>
+          <a:xfrm>
+            <a:off x="7086600" y="2926080"/>
+            <a:ext cx="4297680" cy="292608"/>
+          </a:xfrm>
+          <a:prstGeom prst="rect">
+            <a:avLst/>
+          </a:prstGeom>
+          <a:noFill/>
+        </p:spPr>
+        <p:txBody>
+          <a:bodyPr wrap="square" anchor="t" lIns="25400" rIns="25400" tIns="25400" bIns="25400">
+            <a:spAutoFit/>
+          </a:bodyPr>
+          <a:lstStyle/>
+          <a:p>
+            <a:pPr algn="l">
               <a:lnSpc>
                 <a:spcPct val="100000"/>
               </a:lnSpc>
               <a:spcAft>
-                <a:spcPts val="600"/>
+                <a:spcPts val="400"/>
               </a:spcAft>
             </a:pPr>
             <a:r>
-              <a:rPr sz="1100" b="1">
+              <a:rPr sz="1250" b="1" i="0">
                 <a:solidFill>
                   <a:srgbClr val="37474F"/>
                 </a:solidFill>
                 <a:latin typeface="Calibri"/>
               </a:rPr>
-              <a:t>ADEME (energie / climat) </a:t>
-            </a:r>
-          </a:p>
-          <a:p>
-            <a:pPr>
+              <a:t>Conseil local energie (Savoie)</a:t>
+            </a:r>
+          </a:p>
+        </p:txBody>
+      </p:sp>
+      <p:sp>
+        <p:nvSpPr>
+          <p:cNvPr id="19" name="TextBox 18"/>
+          <p:cNvSpPr txBox="1"/>
+          <p:nvPr/>
+        </p:nvSpPr>
+        <p:spPr>
+          <a:xfrm>
+            <a:off x="7086600" y="3182112"/>
+            <a:ext cx="4297680" cy="274320"/>
+          </a:xfrm>
+          <a:prstGeom prst="rect">
+            <a:avLst/>
+          </a:prstGeom>
+          <a:noFill/>
+        </p:spPr>
+        <p:txBody>
+          <a:bodyPr wrap="none">
+            <a:spAutoFit/>
+          </a:bodyPr>
+          <a:lstStyle/>
+          <a:p>
+            <a:r>
+              <a:rPr sz="1150">
+                <a:solidFill>
+                  <a:srgbClr val="1565C0"/>
+                </a:solidFill>
+                <a:latin typeface="Calibri"/>
+                <a:hlinkClick r:id="rId3"/>
+              </a:rPr>
+              <a:t>asder.asso.fr</a:t>
+            </a:r>
+          </a:p>
+        </p:txBody>
+      </p:sp>
+      <p:sp>
+        <p:nvSpPr>
+          <p:cNvPr id="20" name="TextBox 19"/>
+          <p:cNvSpPr txBox="1"/>
+          <p:nvPr/>
+        </p:nvSpPr>
+        <p:spPr>
+          <a:xfrm>
+            <a:off x="7086600" y="3611880"/>
+            <a:ext cx="4297680" cy="292608"/>
+          </a:xfrm>
+          <a:prstGeom prst="rect">
+            <a:avLst/>
+          </a:prstGeom>
+          <a:noFill/>
+        </p:spPr>
+        <p:txBody>
+          <a:bodyPr wrap="square" anchor="t" lIns="25400" rIns="25400" tIns="25400" bIns="25400">
+            <a:spAutoFit/>
+          </a:bodyPr>
+          <a:lstStyle/>
+          <a:p>
+            <a:pPr algn="l">
               <a:lnSpc>
                 <a:spcPct val="100000"/>
               </a:lnSpc>
               <a:spcAft>
-                <a:spcPts val="600"/>
+                <a:spcPts val="400"/>
               </a:spcAft>
             </a:pPr>
             <a:r>
-              <a:rPr sz="1050">
+              <a:rPr sz="1250" b="1" i="0">
+                <a:solidFill>
+                  <a:srgbClr val="37474F"/>
+                </a:solidFill>
+                <a:latin typeface="Calibri"/>
+              </a:rPr>
+              <a:t>Reglementation (CCH, arretes DPE)</a:t>
+            </a:r>
+          </a:p>
+        </p:txBody>
+      </p:sp>
+      <p:sp>
+        <p:nvSpPr>
+          <p:cNvPr id="21" name="TextBox 20"/>
+          <p:cNvSpPr txBox="1"/>
+          <p:nvPr/>
+        </p:nvSpPr>
+        <p:spPr>
+          <a:xfrm>
+            <a:off x="7086600" y="3867912"/>
+            <a:ext cx="4297680" cy="274320"/>
+          </a:xfrm>
+          <a:prstGeom prst="rect">
+            <a:avLst/>
+          </a:prstGeom>
+          <a:noFill/>
+        </p:spPr>
+        <p:txBody>
+          <a:bodyPr wrap="none">
+            <a:spAutoFit/>
+          </a:bodyPr>
+          <a:lstStyle/>
+          <a:p>
+            <a:r>
+              <a:rPr sz="1150">
                 <a:solidFill>
                   <a:srgbClr val="1565C0"/>
                 </a:solidFill>
                 <a:latin typeface="Calibri"/>
-                <a:hlinkClick r:id="rId14"/>
-              </a:rPr>
-              <a:t>ademe.fr</a:t>
-            </a:r>
-          </a:p>
-          <a:p>
-            <a:pPr>
+                <a:hlinkClick r:id="rId4"/>
+              </a:rPr>
+              <a:t>legifrance.gouv.fr</a:t>
+            </a:r>
+          </a:p>
+        </p:txBody>
+      </p:sp>
+      <p:sp>
+        <p:nvSpPr>
+          <p:cNvPr id="22" name="TextBox 21"/>
+          <p:cNvSpPr txBox="1"/>
+          <p:nvPr/>
+        </p:nvSpPr>
+        <p:spPr>
+          <a:xfrm>
+            <a:off x="7086600" y="4297680"/>
+            <a:ext cx="4297680" cy="292608"/>
+          </a:xfrm>
+          <a:prstGeom prst="rect">
+            <a:avLst/>
+          </a:prstGeom>
+          <a:noFill/>
+        </p:spPr>
+        <p:txBody>
+          <a:bodyPr wrap="square" anchor="t" lIns="25400" rIns="25400" tIns="25400" bIns="25400">
+            <a:spAutoFit/>
+          </a:bodyPr>
+          <a:lstStyle/>
+          <a:p>
+            <a:pPr algn="l">
               <a:lnSpc>
                 <a:spcPct val="100000"/>
               </a:lnSpc>
               <a:spcAft>
-                <a:spcPts val="600"/>
+                <a:spcPts val="400"/>
               </a:spcAft>
             </a:pPr>
             <a:r>
-              <a:rPr sz="1100" b="1">
+              <a:rPr sz="1250" b="1" i="0">
                 <a:solidFill>
                   <a:srgbClr val="37474F"/>
                 </a:solidFill>
                 <a:latin typeface="Calibri"/>
               </a:rPr>
-              <a:t>DPE - methode 3CL &amp; observatoire </a:t>
-            </a:r>
-          </a:p>
-          <a:p>
-            <a:pPr>
+              <a:t>Donnees produits</a:t>
+            </a:r>
+          </a:p>
+        </p:txBody>
+      </p:sp>
+      <p:sp>
+        <p:nvSpPr>
+          <p:cNvPr id="23" name="TextBox 22"/>
+          <p:cNvSpPr txBox="1"/>
+          <p:nvPr/>
+        </p:nvSpPr>
+        <p:spPr>
+          <a:xfrm>
+            <a:off x="7086600" y="4553712"/>
+            <a:ext cx="4297680" cy="274320"/>
+          </a:xfrm>
+          <a:prstGeom prst="rect">
+            <a:avLst/>
+          </a:prstGeom>
+          <a:noFill/>
+        </p:spPr>
+        <p:txBody>
+          <a:bodyPr wrap="none">
+            <a:spAutoFit/>
+          </a:bodyPr>
+          <a:lstStyle/>
+          <a:p>
+            <a:r>
+              <a:rPr sz="1150">
+                <a:solidFill>
+                  <a:srgbClr val="1565C0"/>
+                </a:solidFill>
+                <a:latin typeface="Calibri"/>
+                <a:hlinkClick r:id="rId5"/>
+              </a:rPr>
+              <a:t>documentations techniques fabricants</a:t>
+            </a:r>
+          </a:p>
+        </p:txBody>
+      </p:sp>
+      <p:sp>
+        <p:nvSpPr>
+          <p:cNvPr id="24" name="TextBox 23"/>
+          <p:cNvSpPr txBox="1"/>
+          <p:nvPr/>
+        </p:nvSpPr>
+        <p:spPr>
+          <a:xfrm>
+            <a:off x="7086600" y="4983480"/>
+            <a:ext cx="4297680" cy="292608"/>
+          </a:xfrm>
+          <a:prstGeom prst="rect">
+            <a:avLst/>
+          </a:prstGeom>
+          <a:noFill/>
+        </p:spPr>
+        <p:txBody>
+          <a:bodyPr wrap="square" anchor="t" lIns="25400" rIns="25400" tIns="25400" bIns="25400">
+            <a:spAutoFit/>
+          </a:bodyPr>
+          <a:lstStyle/>
+          <a:p>
+            <a:pPr algn="l">
               <a:lnSpc>
                 <a:spcPct val="100000"/>
               </a:lnSpc>
               <a:spcAft>
-                <a:spcPts val="600"/>
+                <a:spcPts val="400"/>
               </a:spcAft>
             </a:pPr>
             <a:r>
-              <a:rPr sz="1050">
+              <a:rPr sz="1250" b="1" i="0">
+                <a:solidFill>
+                  <a:srgbClr val="37474F"/>
+                </a:solidFill>
+                <a:latin typeface="Calibri"/>
+              </a:rPr>
+              <a:t>Reference energie / climat</a:t>
+            </a:r>
+          </a:p>
+        </p:txBody>
+      </p:sp>
+      <p:sp>
+        <p:nvSpPr>
+          <p:cNvPr id="25" name="TextBox 24"/>
+          <p:cNvSpPr txBox="1"/>
+          <p:nvPr/>
+        </p:nvSpPr>
+        <p:spPr>
+          <a:xfrm>
+            <a:off x="7086600" y="5239512"/>
+            <a:ext cx="4297680" cy="274320"/>
+          </a:xfrm>
+          <a:prstGeom prst="rect">
+            <a:avLst/>
+          </a:prstGeom>
+          <a:noFill/>
+        </p:spPr>
+        <p:txBody>
+          <a:bodyPr wrap="none">
+            <a:spAutoFit/>
+          </a:bodyPr>
+          <a:lstStyle/>
+          <a:p>
+            <a:r>
+              <a:rPr sz="1150">
                 <a:solidFill>
                   <a:srgbClr val="1565C0"/>
                 </a:solidFill>
                 <a:latin typeface="Calibri"/>
-                <a:hlinkClick r:id="rId15"/>
-              </a:rPr>
-              <a:t>observatoire-dpe-audit.ademe.fr</a:t>
-            </a:r>
-          </a:p>
-          <a:p>
-            <a:pPr>
-              <a:lnSpc>
-                <a:spcPct val="100000"/>
-              </a:lnSpc>
-              <a:spcAft>
-                <a:spcPts val="600"/>
-              </a:spcAft>
-            </a:pPr>
-            <a:r>
-              <a:rPr sz="1100" b="1">
-                <a:solidFill>
-                  <a:srgbClr val="37474F"/>
-                </a:solidFill>
-                <a:latin typeface="Calibri"/>
-              </a:rPr>
-              <a:t>Reglementation (CCH, arretes DPE) </a:t>
-            </a:r>
-          </a:p>
-          <a:p>
-            <a:pPr>
-              <a:lnSpc>
-                <a:spcPct val="100000"/>
-              </a:lnSpc>
-              <a:spcAft>
-                <a:spcPts val="600"/>
-              </a:spcAft>
-            </a:pPr>
-            <a:r>
-              <a:rPr sz="1050">
-                <a:solidFill>
-                  <a:srgbClr val="1565C0"/>
-                </a:solidFill>
-                <a:latin typeface="Calibri"/>
-                <a:hlinkClick r:id="rId16"/>
-              </a:rPr>
-              <a:t>legifrance.gouv.fr</a:t>
-            </a:r>
-          </a:p>
-          <a:p>
-            <a:pPr>
-              <a:lnSpc>
-                <a:spcPct val="100000"/>
-              </a:lnSpc>
-              <a:spcAft>
-                <a:spcPts val="600"/>
-              </a:spcAft>
-            </a:pPr>
-            <a:r>
-              <a:rPr sz="1100" b="1">
-                <a:solidFill>
-                  <a:srgbClr val="37474F"/>
-                </a:solidFill>
-                <a:latin typeface="Calibri"/>
-              </a:rPr>
-              <a:t>Urbanisme / PLU (declaration prealable) </a:t>
-            </a:r>
-          </a:p>
-          <a:p>
-            <a:pPr>
-              <a:lnSpc>
-                <a:spcPct val="100000"/>
-              </a:lnSpc>
-              <a:spcAft>
-                <a:spcPts val="600"/>
-              </a:spcAft>
-            </a:pPr>
-            <a:r>
-              <a:rPr sz="1050">
-                <a:solidFill>
-                  <a:srgbClr val="1565C0"/>
-                </a:solidFill>
-                <a:latin typeface="Calibri"/>
-                <a:hlinkClick r:id="rId17"/>
-              </a:rPr>
-              <a:t>geoportail-urbanisme.gouv.fr</a:t>
-            </a:r>
-          </a:p>
-          <a:p>
-            <a:pPr>
-              <a:lnSpc>
-                <a:spcPct val="100000"/>
-              </a:lnSpc>
-              <a:spcAft>
-                <a:spcPts val="600"/>
-              </a:spcAft>
-            </a:pPr>
-            <a:r>
-              <a:rPr sz="1100" b="1">
-                <a:solidFill>
-                  <a:srgbClr val="37474F"/>
-                </a:solidFill>
-                <a:latin typeface="Calibri"/>
-              </a:rPr>
-              <a:t>Prix de l'energie (statistiques) </a:t>
-            </a:r>
-          </a:p>
-          <a:p>
-            <a:pPr>
-              <a:lnSpc>
-                <a:spcPct val="100000"/>
-              </a:lnSpc>
-              <a:spcAft>
-                <a:spcPts val="600"/>
-              </a:spcAft>
-            </a:pPr>
-            <a:r>
-              <a:rPr sz="1050">
-                <a:solidFill>
-                  <a:srgbClr val="1565C0"/>
-                </a:solidFill>
-                <a:latin typeface="Calibri"/>
-                <a:hlinkClick r:id="rId18"/>
-              </a:rPr>
-              <a:t>statistiques.developpement-durable.gouv.fr</a:t>
-            </a:r>
-          </a:p>
-          <a:p>
-            <a:pPr>
-              <a:lnSpc>
-                <a:spcPct val="100000"/>
-              </a:lnSpc>
-              <a:spcAft>
-                <a:spcPts val="600"/>
-              </a:spcAft>
-            </a:pPr>
-            <a:r>
-              <a:rPr sz="1100" b="1">
-                <a:solidFill>
-                  <a:srgbClr val="37474F"/>
-                </a:solidFill>
-                <a:latin typeface="Calibri"/>
-              </a:rPr>
-              <a:t>Donnees climatiques (DJU, zone H1) </a:t>
-            </a:r>
-          </a:p>
-          <a:p>
-            <a:pPr>
-              <a:lnSpc>
-                <a:spcPct val="100000"/>
-              </a:lnSpc>
-              <a:spcAft>
-                <a:spcPts val="600"/>
-              </a:spcAft>
-            </a:pPr>
-            <a:r>
-              <a:rPr sz="1050">
-                <a:solidFill>
-                  <a:srgbClr val="1565C0"/>
-                </a:solidFill>
-                <a:latin typeface="Calibri"/>
-                <a:hlinkClick r:id="rId19"/>
-              </a:rPr>
-              <a:t>meteofrance.com</a:t>
+                <a:hlinkClick r:id="rId6"/>
+              </a:rPr>
+              <a:t>ademe.fr</a:t>
             </a:r>
           </a:p>
         </p:txBody>

--- a/Soutenance_Renovation_Saint-Jean-de-Chevelu.pptx
+++ b/Soutenance_Renovation_Saint-Jean-de-Chevelu.pptx
@@ -6290,8 +6290,8 @@
         </p:nvSpPr>
         <p:spPr>
           <a:xfrm>
-            <a:off x="1325880" y="365760"/>
-            <a:ext cx="10332720" cy="731520"/>
+            <a:off x="1325880" y="310896"/>
+            <a:ext cx="10332720" cy="566928"/>
           </a:xfrm>
           <a:prstGeom prst="rect">
             <a:avLst/>
@@ -6332,8 +6332,8 @@
         </p:nvSpPr>
         <p:spPr>
           <a:xfrm>
-            <a:off x="1325880" y="1042415"/>
-            <a:ext cx="10332720" cy="365760"/>
+            <a:off x="1325880" y="905256"/>
+            <a:ext cx="10332720" cy="292608"/>
           </a:xfrm>
           <a:prstGeom prst="rect">
             <a:avLst/>
@@ -6355,9 +6355,9 @@
               </a:spcAft>
             </a:pPr>
             <a:r>
-              <a:rPr sz="1400" b="0" i="1">
-                <a:solidFill>
-                  <a:srgbClr val="90A4AE"/>
+              <a:rPr sz="1350" b="0" i="1">
+                <a:solidFill>
+                  <a:srgbClr val="37474F"/>
                 </a:solidFill>
                 <a:latin typeface="Calibri"/>
               </a:rPr>
@@ -6374,7 +6374,7 @@
         </p:nvSpPr>
         <p:spPr>
           <a:xfrm>
-            <a:off x="1325880" y="1152144"/>
+            <a:off x="1325880" y="1225296"/>
             <a:ext cx="10058400" cy="27940"/>
           </a:xfrm>
           <a:prstGeom prst="rect">
@@ -7466,8 +7466,8 @@
         </p:nvSpPr>
         <p:spPr>
           <a:xfrm>
-            <a:off x="1325880" y="365760"/>
-            <a:ext cx="10332720" cy="731520"/>
+            <a:off x="1325880" y="310896"/>
+            <a:ext cx="10332720" cy="566928"/>
           </a:xfrm>
           <a:prstGeom prst="rect">
             <a:avLst/>
@@ -7508,7 +7508,7 @@
         </p:nvSpPr>
         <p:spPr>
           <a:xfrm>
-            <a:off x="1325880" y="1152144"/>
+            <a:off x="1325880" y="1225296"/>
             <a:ext cx="10058400" cy="27940"/>
           </a:xfrm>
           <a:prstGeom prst="rect">
@@ -8626,8 +8626,8 @@
         </p:nvSpPr>
         <p:spPr>
           <a:xfrm>
-            <a:off x="1325880" y="365760"/>
-            <a:ext cx="10332720" cy="731520"/>
+            <a:off x="1325880" y="310896"/>
+            <a:ext cx="10332720" cy="566928"/>
           </a:xfrm>
           <a:prstGeom prst="rect">
             <a:avLst/>
@@ -8668,8 +8668,8 @@
         </p:nvSpPr>
         <p:spPr>
           <a:xfrm>
-            <a:off x="1325880" y="1042415"/>
-            <a:ext cx="10332720" cy="365760"/>
+            <a:off x="1325880" y="905256"/>
+            <a:ext cx="10332720" cy="292608"/>
           </a:xfrm>
           <a:prstGeom prst="rect">
             <a:avLst/>
@@ -8691,9 +8691,9 @@
               </a:spcAft>
             </a:pPr>
             <a:r>
-              <a:rPr sz="1400" b="0" i="1">
-                <a:solidFill>
-                  <a:srgbClr val="90A4AE"/>
+              <a:rPr sz="1350" b="0" i="1">
+                <a:solidFill>
+                  <a:srgbClr val="37474F"/>
                 </a:solidFill>
                 <a:latin typeface="Calibri"/>
               </a:rPr>
@@ -8710,7 +8710,7 @@
         </p:nvSpPr>
         <p:spPr>
           <a:xfrm>
-            <a:off x="1325880" y="1152144"/>
+            <a:off x="1325880" y="1225296"/>
             <a:ext cx="10058400" cy="27940"/>
           </a:xfrm>
           <a:prstGeom prst="rect">
@@ -10885,8 +10885,8 @@
         </p:nvSpPr>
         <p:spPr>
           <a:xfrm>
-            <a:off x="1325880" y="365760"/>
-            <a:ext cx="10332720" cy="731520"/>
+            <a:off x="1325880" y="310896"/>
+            <a:ext cx="10332720" cy="566928"/>
           </a:xfrm>
           <a:prstGeom prst="rect">
             <a:avLst/>
@@ -10927,8 +10927,8 @@
         </p:nvSpPr>
         <p:spPr>
           <a:xfrm>
-            <a:off x="1325880" y="1042415"/>
-            <a:ext cx="10332720" cy="365760"/>
+            <a:off x="1325880" y="905256"/>
+            <a:ext cx="10332720" cy="292608"/>
           </a:xfrm>
           <a:prstGeom prst="rect">
             <a:avLst/>
@@ -10950,9 +10950,9 @@
               </a:spcAft>
             </a:pPr>
             <a:r>
-              <a:rPr sz="1400" b="0" i="1">
-                <a:solidFill>
-                  <a:srgbClr val="90A4AE"/>
+              <a:rPr sz="1350" b="0" i="1">
+                <a:solidFill>
+                  <a:srgbClr val="37474F"/>
                 </a:solidFill>
                 <a:latin typeface="Calibri"/>
               </a:rPr>
@@ -10969,7 +10969,7 @@
         </p:nvSpPr>
         <p:spPr>
           <a:xfrm>
-            <a:off x="1325880" y="1152144"/>
+            <a:off x="1325880" y="1225296"/>
             <a:ext cx="10058400" cy="27940"/>
           </a:xfrm>
           <a:prstGeom prst="rect">
@@ -13453,8 +13453,8 @@
         </p:nvSpPr>
         <p:spPr>
           <a:xfrm>
-            <a:off x="1325880" y="365760"/>
-            <a:ext cx="10332720" cy="731520"/>
+            <a:off x="1325880" y="310896"/>
+            <a:ext cx="10332720" cy="566928"/>
           </a:xfrm>
           <a:prstGeom prst="rect">
             <a:avLst/>
@@ -13495,8 +13495,8 @@
         </p:nvSpPr>
         <p:spPr>
           <a:xfrm>
-            <a:off x="1325880" y="1042415"/>
-            <a:ext cx="10332720" cy="365760"/>
+            <a:off x="1325880" y="905256"/>
+            <a:ext cx="10332720" cy="292608"/>
           </a:xfrm>
           <a:prstGeom prst="rect">
             <a:avLst/>
@@ -13518,9 +13518,9 @@
               </a:spcAft>
             </a:pPr>
             <a:r>
-              <a:rPr sz="1400" b="0" i="1">
-                <a:solidFill>
-                  <a:srgbClr val="90A4AE"/>
+              <a:rPr sz="1350" b="0" i="1">
+                <a:solidFill>
+                  <a:srgbClr val="37474F"/>
                 </a:solidFill>
                 <a:latin typeface="Calibri"/>
               </a:rPr>
@@ -13537,7 +13537,7 @@
         </p:nvSpPr>
         <p:spPr>
           <a:xfrm>
-            <a:off x="1325880" y="1152144"/>
+            <a:off x="1325880" y="1225296"/>
             <a:ext cx="10058400" cy="27940"/>
           </a:xfrm>
           <a:prstGeom prst="rect">
@@ -15936,8 +15936,8 @@
         </p:nvSpPr>
         <p:spPr>
           <a:xfrm>
-            <a:off x="1325880" y="365760"/>
-            <a:ext cx="10332720" cy="731520"/>
+            <a:off x="1325880" y="310896"/>
+            <a:ext cx="10332720" cy="566928"/>
           </a:xfrm>
           <a:prstGeom prst="rect">
             <a:avLst/>
@@ -15978,8 +15978,8 @@
         </p:nvSpPr>
         <p:spPr>
           <a:xfrm>
-            <a:off x="1325880" y="1042415"/>
-            <a:ext cx="10332720" cy="365760"/>
+            <a:off x="1325880" y="905256"/>
+            <a:ext cx="10332720" cy="292608"/>
           </a:xfrm>
           <a:prstGeom prst="rect">
             <a:avLst/>
@@ -16001,9 +16001,9 @@
               </a:spcAft>
             </a:pPr>
             <a:r>
-              <a:rPr sz="1400" b="0" i="1">
-                <a:solidFill>
-                  <a:srgbClr val="90A4AE"/>
+              <a:rPr sz="1350" b="0" i="1">
+                <a:solidFill>
+                  <a:srgbClr val="37474F"/>
                 </a:solidFill>
                 <a:latin typeface="Calibri"/>
               </a:rPr>
@@ -16020,7 +16020,7 @@
         </p:nvSpPr>
         <p:spPr>
           <a:xfrm>
-            <a:off x="1325880" y="1152144"/>
+            <a:off x="1325880" y="1225296"/>
             <a:ext cx="10058400" cy="27940"/>
           </a:xfrm>
           <a:prstGeom prst="rect">
@@ -16946,8 +16946,8 @@
         </p:nvSpPr>
         <p:spPr>
           <a:xfrm>
-            <a:off x="1325880" y="365760"/>
-            <a:ext cx="10332720" cy="731520"/>
+            <a:off x="1325880" y="310896"/>
+            <a:ext cx="10332720" cy="566928"/>
           </a:xfrm>
           <a:prstGeom prst="rect">
             <a:avLst/>
@@ -16988,8 +16988,8 @@
         </p:nvSpPr>
         <p:spPr>
           <a:xfrm>
-            <a:off x="1325880" y="1042415"/>
-            <a:ext cx="10332720" cy="365760"/>
+            <a:off x="1325880" y="905256"/>
+            <a:ext cx="10332720" cy="292608"/>
           </a:xfrm>
           <a:prstGeom prst="rect">
             <a:avLst/>
@@ -17011,9 +17011,9 @@
               </a:spcAft>
             </a:pPr>
             <a:r>
-              <a:rPr sz="1400" b="0" i="1">
-                <a:solidFill>
-                  <a:srgbClr val="90A4AE"/>
+              <a:rPr sz="1350" b="0" i="1">
+                <a:solidFill>
+                  <a:srgbClr val="37474F"/>
                 </a:solidFill>
                 <a:latin typeface="Calibri"/>
               </a:rPr>
@@ -17030,7 +17030,7 @@
         </p:nvSpPr>
         <p:spPr>
           <a:xfrm>
-            <a:off x="1325880" y="1152144"/>
+            <a:off x="1325880" y="1225296"/>
             <a:ext cx="10058400" cy="27940"/>
           </a:xfrm>
           <a:prstGeom prst="rect">
@@ -18890,8 +18890,8 @@
         </p:nvSpPr>
         <p:spPr>
           <a:xfrm>
-            <a:off x="1325880" y="365760"/>
-            <a:ext cx="10332720" cy="731520"/>
+            <a:off x="1325880" y="310896"/>
+            <a:ext cx="10332720" cy="566928"/>
           </a:xfrm>
           <a:prstGeom prst="rect">
             <a:avLst/>
@@ -18932,8 +18932,8 @@
         </p:nvSpPr>
         <p:spPr>
           <a:xfrm>
-            <a:off x="1325880" y="1042415"/>
-            <a:ext cx="10332720" cy="365760"/>
+            <a:off x="1325880" y="905256"/>
+            <a:ext cx="10332720" cy="292608"/>
           </a:xfrm>
           <a:prstGeom prst="rect">
             <a:avLst/>
@@ -18955,9 +18955,9 @@
               </a:spcAft>
             </a:pPr>
             <a:r>
-              <a:rPr sz="1400" b="0" i="1">
-                <a:solidFill>
-                  <a:srgbClr val="90A4AE"/>
+              <a:rPr sz="1350" b="0" i="1">
+                <a:solidFill>
+                  <a:srgbClr val="37474F"/>
                 </a:solidFill>
                 <a:latin typeface="Calibri"/>
               </a:rPr>
@@ -18974,7 +18974,7 @@
         </p:nvSpPr>
         <p:spPr>
           <a:xfrm>
-            <a:off x="1325880" y="1152144"/>
+            <a:off x="1325880" y="1225296"/>
             <a:ext cx="10058400" cy="27940"/>
           </a:xfrm>
           <a:prstGeom prst="rect">
@@ -20136,8 +20136,8 @@
         </p:nvSpPr>
         <p:spPr>
           <a:xfrm>
-            <a:off x="1325880" y="365760"/>
-            <a:ext cx="10332720" cy="731520"/>
+            <a:off x="1325880" y="310896"/>
+            <a:ext cx="10332720" cy="566928"/>
           </a:xfrm>
           <a:prstGeom prst="rect">
             <a:avLst/>
@@ -20178,8 +20178,8 @@
         </p:nvSpPr>
         <p:spPr>
           <a:xfrm>
-            <a:off x="1325880" y="1042415"/>
-            <a:ext cx="10332720" cy="365760"/>
+            <a:off x="1325880" y="905256"/>
+            <a:ext cx="10332720" cy="292608"/>
           </a:xfrm>
           <a:prstGeom prst="rect">
             <a:avLst/>
@@ -20201,9 +20201,9 @@
               </a:spcAft>
             </a:pPr>
             <a:r>
-              <a:rPr sz="1400" b="0" i="1">
-                <a:solidFill>
-                  <a:srgbClr val="90A4AE"/>
+              <a:rPr sz="1350" b="0" i="1">
+                <a:solidFill>
+                  <a:srgbClr val="37474F"/>
                 </a:solidFill>
                 <a:latin typeface="Calibri"/>
               </a:rPr>
@@ -20220,7 +20220,7 @@
         </p:nvSpPr>
         <p:spPr>
           <a:xfrm>
-            <a:off x="1325880" y="1152144"/>
+            <a:off x="1325880" y="1225296"/>
             <a:ext cx="10058400" cy="27940"/>
           </a:xfrm>
           <a:prstGeom prst="rect">
@@ -21386,8 +21386,8 @@
         </p:nvSpPr>
         <p:spPr>
           <a:xfrm>
-            <a:off x="1325880" y="365760"/>
-            <a:ext cx="10332720" cy="731520"/>
+            <a:off x="1325880" y="310896"/>
+            <a:ext cx="10332720" cy="566928"/>
           </a:xfrm>
           <a:prstGeom prst="rect">
             <a:avLst/>
@@ -21428,8 +21428,8 @@
         </p:nvSpPr>
         <p:spPr>
           <a:xfrm>
-            <a:off x="1325880" y="1042415"/>
-            <a:ext cx="10332720" cy="365760"/>
+            <a:off x="1325880" y="905256"/>
+            <a:ext cx="10332720" cy="292608"/>
           </a:xfrm>
           <a:prstGeom prst="rect">
             <a:avLst/>
@@ -21451,9 +21451,9 @@
               </a:spcAft>
             </a:pPr>
             <a:r>
-              <a:rPr sz="1400" b="0" i="1">
-                <a:solidFill>
-                  <a:srgbClr val="90A4AE"/>
+              <a:rPr sz="1350" b="0" i="1">
+                <a:solidFill>
+                  <a:srgbClr val="37474F"/>
                 </a:solidFill>
                 <a:latin typeface="Calibri"/>
               </a:rPr>
@@ -21470,7 +21470,7 @@
         </p:nvSpPr>
         <p:spPr>
           <a:xfrm>
-            <a:off x="1325880" y="1152144"/>
+            <a:off x="1325880" y="1225296"/>
             <a:ext cx="10058400" cy="27940"/>
           </a:xfrm>
           <a:prstGeom prst="rect">
@@ -22385,8 +22385,8 @@
         </p:nvSpPr>
         <p:spPr>
           <a:xfrm>
-            <a:off x="548640" y="365760"/>
-            <a:ext cx="10332720" cy="731520"/>
+            <a:off x="548640" y="310896"/>
+            <a:ext cx="10332720" cy="566928"/>
           </a:xfrm>
           <a:prstGeom prst="rect">
             <a:avLst/>
@@ -22427,7 +22427,7 @@
         </p:nvSpPr>
         <p:spPr>
           <a:xfrm>
-            <a:off x="548640" y="1152144"/>
+            <a:off x="548640" y="1225296"/>
             <a:ext cx="10058400" cy="27940"/>
           </a:xfrm>
           <a:prstGeom prst="rect">
@@ -23937,8 +23937,8 @@
         </p:nvSpPr>
         <p:spPr>
           <a:xfrm>
-            <a:off x="1325880" y="365760"/>
-            <a:ext cx="10332720" cy="731520"/>
+            <a:off x="1325880" y="310896"/>
+            <a:ext cx="10332720" cy="566928"/>
           </a:xfrm>
           <a:prstGeom prst="rect">
             <a:avLst/>
@@ -23979,7 +23979,7 @@
         </p:nvSpPr>
         <p:spPr>
           <a:xfrm>
-            <a:off x="1325880" y="1152144"/>
+            <a:off x="1325880" y="1225296"/>
             <a:ext cx="10058400" cy="27940"/>
           </a:xfrm>
           <a:prstGeom prst="rect">
@@ -24981,8 +24981,8 @@
         </p:nvSpPr>
         <p:spPr>
           <a:xfrm>
-            <a:off x="1325880" y="365760"/>
-            <a:ext cx="10332720" cy="731520"/>
+            <a:off x="1325880" y="310896"/>
+            <a:ext cx="10332720" cy="566928"/>
           </a:xfrm>
           <a:prstGeom prst="rect">
             <a:avLst/>
@@ -25023,7 +25023,7 @@
         </p:nvSpPr>
         <p:spPr>
           <a:xfrm>
-            <a:off x="1325880" y="1152144"/>
+            <a:off x="1325880" y="1225296"/>
             <a:ext cx="10058400" cy="27940"/>
           </a:xfrm>
           <a:prstGeom prst="rect">
@@ -26972,8 +26972,8 @@
         </p:nvSpPr>
         <p:spPr>
           <a:xfrm>
-            <a:off x="548640" y="365760"/>
-            <a:ext cx="10332720" cy="731520"/>
+            <a:off x="548640" y="310896"/>
+            <a:ext cx="10332720" cy="566928"/>
           </a:xfrm>
           <a:prstGeom prst="rect">
             <a:avLst/>
@@ -27014,8 +27014,8 @@
         </p:nvSpPr>
         <p:spPr>
           <a:xfrm>
-            <a:off x="548640" y="1042415"/>
-            <a:ext cx="10332720" cy="365760"/>
+            <a:off x="548640" y="905256"/>
+            <a:ext cx="10332720" cy="292608"/>
           </a:xfrm>
           <a:prstGeom prst="rect">
             <a:avLst/>
@@ -27037,9 +27037,9 @@
               </a:spcAft>
             </a:pPr>
             <a:r>
-              <a:rPr sz="1400" b="0" i="1">
-                <a:solidFill>
-                  <a:srgbClr val="90A4AE"/>
+              <a:rPr sz="1350" b="0" i="1">
+                <a:solidFill>
+                  <a:srgbClr val="37474F"/>
                 </a:solidFill>
                 <a:latin typeface="Calibri"/>
               </a:rPr>
@@ -27056,7 +27056,7 @@
         </p:nvSpPr>
         <p:spPr>
           <a:xfrm>
-            <a:off x="548640" y="1152144"/>
+            <a:off x="548640" y="1225296"/>
             <a:ext cx="10058400" cy="27940"/>
           </a:xfrm>
           <a:prstGeom prst="rect">
@@ -28231,8 +28231,8 @@
         </p:nvSpPr>
         <p:spPr>
           <a:xfrm>
-            <a:off x="1325880" y="365760"/>
-            <a:ext cx="10332720" cy="731520"/>
+            <a:off x="1325880" y="310896"/>
+            <a:ext cx="10332720" cy="566928"/>
           </a:xfrm>
           <a:prstGeom prst="rect">
             <a:avLst/>
@@ -28273,8 +28273,8 @@
         </p:nvSpPr>
         <p:spPr>
           <a:xfrm>
-            <a:off x="1325880" y="1042415"/>
-            <a:ext cx="10332720" cy="365760"/>
+            <a:off x="1325880" y="905256"/>
+            <a:ext cx="10332720" cy="292608"/>
           </a:xfrm>
           <a:prstGeom prst="rect">
             <a:avLst/>
@@ -28296,9 +28296,9 @@
               </a:spcAft>
             </a:pPr>
             <a:r>
-              <a:rPr sz="1400" b="0" i="1">
-                <a:solidFill>
-                  <a:srgbClr val="90A4AE"/>
+              <a:rPr sz="1350" b="0" i="1">
+                <a:solidFill>
+                  <a:srgbClr val="37474F"/>
                 </a:solidFill>
                 <a:latin typeface="Calibri"/>
               </a:rPr>
@@ -28315,7 +28315,7 @@
         </p:nvSpPr>
         <p:spPr>
           <a:xfrm>
-            <a:off x="1325880" y="1152144"/>
+            <a:off x="1325880" y="1225296"/>
             <a:ext cx="10058400" cy="27940"/>
           </a:xfrm>
           <a:prstGeom prst="rect">
@@ -29102,8 +29102,8 @@
         </p:nvSpPr>
         <p:spPr>
           <a:xfrm>
-            <a:off x="1325880" y="365760"/>
-            <a:ext cx="10332720" cy="731520"/>
+            <a:off x="1325880" y="310896"/>
+            <a:ext cx="10332720" cy="566928"/>
           </a:xfrm>
           <a:prstGeom prst="rect">
             <a:avLst/>
@@ -29144,8 +29144,8 @@
         </p:nvSpPr>
         <p:spPr>
           <a:xfrm>
-            <a:off x="1325880" y="1042415"/>
-            <a:ext cx="10332720" cy="365760"/>
+            <a:off x="1325880" y="905256"/>
+            <a:ext cx="10332720" cy="292608"/>
           </a:xfrm>
           <a:prstGeom prst="rect">
             <a:avLst/>
@@ -29167,9 +29167,9 @@
               </a:spcAft>
             </a:pPr>
             <a:r>
-              <a:rPr sz="1400" b="0" i="1">
-                <a:solidFill>
-                  <a:srgbClr val="90A4AE"/>
+              <a:rPr sz="1350" b="0" i="1">
+                <a:solidFill>
+                  <a:srgbClr val="37474F"/>
                 </a:solidFill>
                 <a:latin typeface="Calibri"/>
               </a:rPr>
@@ -29186,7 +29186,7 @@
         </p:nvSpPr>
         <p:spPr>
           <a:xfrm>
-            <a:off x="1325880" y="1152144"/>
+            <a:off x="1325880" y="1225296"/>
             <a:ext cx="10058400" cy="27940"/>
           </a:xfrm>
           <a:prstGeom prst="rect">
@@ -29937,8 +29937,8 @@
         </p:nvSpPr>
         <p:spPr>
           <a:xfrm>
-            <a:off x="1325880" y="365760"/>
-            <a:ext cx="10332720" cy="731520"/>
+            <a:off x="1325880" y="310896"/>
+            <a:ext cx="10332720" cy="566928"/>
           </a:xfrm>
           <a:prstGeom prst="rect">
             <a:avLst/>
@@ -29979,7 +29979,7 @@
         </p:nvSpPr>
         <p:spPr>
           <a:xfrm>
-            <a:off x="1325880" y="1152144"/>
+            <a:off x="1325880" y="1225296"/>
             <a:ext cx="10058400" cy="27940"/>
           </a:xfrm>
           <a:prstGeom prst="rect">
@@ -30809,8 +30809,8 @@
         </p:nvSpPr>
         <p:spPr>
           <a:xfrm>
-            <a:off x="1325880" y="365760"/>
-            <a:ext cx="10332720" cy="731520"/>
+            <a:off x="1325880" y="310896"/>
+            <a:ext cx="10332720" cy="566928"/>
           </a:xfrm>
           <a:prstGeom prst="rect">
             <a:avLst/>
@@ -30851,7 +30851,7 @@
         </p:nvSpPr>
         <p:spPr>
           <a:xfrm>
-            <a:off x="1325880" y="1152144"/>
+            <a:off x="1325880" y="1225296"/>
             <a:ext cx="10058400" cy="27940"/>
           </a:xfrm>
           <a:prstGeom prst="rect">
@@ -31679,8 +31679,8 @@
         </p:nvSpPr>
         <p:spPr>
           <a:xfrm>
-            <a:off x="1325880" y="365760"/>
-            <a:ext cx="10332720" cy="731520"/>
+            <a:off x="1325880" y="310896"/>
+            <a:ext cx="10332720" cy="566928"/>
           </a:xfrm>
           <a:prstGeom prst="rect">
             <a:avLst/>
@@ -31721,7 +31721,7 @@
         </p:nvSpPr>
         <p:spPr>
           <a:xfrm>
-            <a:off x="1325880" y="1152144"/>
+            <a:off x="1325880" y="1225296"/>
             <a:ext cx="10058400" cy="27940"/>
           </a:xfrm>
           <a:prstGeom prst="rect">
@@ -32607,8 +32607,8 @@
         </p:nvSpPr>
         <p:spPr>
           <a:xfrm>
-            <a:off x="1325880" y="365760"/>
-            <a:ext cx="10332720" cy="731520"/>
+            <a:off x="1325880" y="310896"/>
+            <a:ext cx="10332720" cy="566928"/>
           </a:xfrm>
           <a:prstGeom prst="rect">
             <a:avLst/>
@@ -32649,8 +32649,8 @@
         </p:nvSpPr>
         <p:spPr>
           <a:xfrm>
-            <a:off x="1325880" y="1042415"/>
-            <a:ext cx="10332720" cy="365760"/>
+            <a:off x="1325880" y="905256"/>
+            <a:ext cx="10332720" cy="292608"/>
           </a:xfrm>
           <a:prstGeom prst="rect">
             <a:avLst/>
@@ -32672,9 +32672,9 @@
               </a:spcAft>
             </a:pPr>
             <a:r>
-              <a:rPr sz="1400" b="0" i="1">
-                <a:solidFill>
-                  <a:srgbClr val="90A4AE"/>
+              <a:rPr sz="1350" b="0" i="1">
+                <a:solidFill>
+                  <a:srgbClr val="37474F"/>
                 </a:solidFill>
                 <a:latin typeface="Calibri"/>
               </a:rPr>
@@ -32691,7 +32691,7 @@
         </p:nvSpPr>
         <p:spPr>
           <a:xfrm>
-            <a:off x="1325880" y="1152144"/>
+            <a:off x="1325880" y="1225296"/>
             <a:ext cx="10058400" cy="27940"/>
           </a:xfrm>
           <a:prstGeom prst="rect">
@@ -33839,8 +33839,8 @@
         </p:nvSpPr>
         <p:spPr>
           <a:xfrm>
-            <a:off x="1325880" y="365760"/>
-            <a:ext cx="10332720" cy="731520"/>
+            <a:off x="1325880" y="310896"/>
+            <a:ext cx="10332720" cy="566928"/>
           </a:xfrm>
           <a:prstGeom prst="rect">
             <a:avLst/>
@@ -33881,7 +33881,7 @@
         </p:nvSpPr>
         <p:spPr>
           <a:xfrm>
-            <a:off x="1325880" y="1152144"/>
+            <a:off x="1325880" y="1225296"/>
             <a:ext cx="10058400" cy="27940"/>
           </a:xfrm>
           <a:prstGeom prst="rect">

--- a/Soutenance_Renovation_Saint-Jean-de-Chevelu.pptx
+++ b/Soutenance_Renovation_Saint-Jean-de-Chevelu.pptx
@@ -28,6 +28,7 @@
     <p:sldId id="276" r:id="rId28"/>
     <p:sldId id="277" r:id="rId29"/>
     <p:sldId id="278" r:id="rId30"/>
+    <p:sldId id="279" r:id="rId31"/>
   </p:sldIdLst>
   <p:sldSz cx="12191695" cy="6858000" type="screen4x3"/>
   <p:notesSz cx="6858000" cy="9144000"/>
@@ -357,6 +358,162 @@
 <file path=ppt/charts/chart2.xml><?xml version="1.0" encoding="utf-8"?>
 <c:chartSpace xmlns:c="http://schemas.openxmlformats.org/drawingml/2006/chart" xmlns:a="http://schemas.openxmlformats.org/drawingml/2006/main" xmlns:r="http://schemas.openxmlformats.org/officeDocument/2006/relationships">
   <c:chart>
+    <c:title>
+      <c:tx>
+        <c:rich>
+          <a:bodyPr/>
+          <a:lstStyle/>
+          <a:p>
+            <a:pPr>
+              <a:defRPr sz="1200"/>
+            </a:pPr>
+            <a:r>
+              <a:t>Repartition des depenses energetiques</a:t>
+            </a:r>
+          </a:p>
+        </c:rich>
+      </c:tx>
+      <c:layout/>
+      <c:overlay val="0"/>
+    </c:title>
+    <c:autoTitleDeleted val="0"/>
+    <c:plotArea>
+      <c:pieChart>
+        <c:varyColors val="1"/>
+        <c:ser>
+          <c:idx val="0"/>
+          <c:order val="0"/>
+          <c:tx>
+            <c:strRef>
+              <c:f>Sheet1!$B$1</c:f>
+              <c:strCache>
+                <c:ptCount val="1"/>
+                <c:pt idx="0">
+                  <c:v>Postes</c:v>
+                </c:pt>
+              </c:strCache>
+            </c:strRef>
+          </c:tx>
+          <c:dPt>
+            <c:idx val="0"/>
+            <c:spPr>
+              <a:solidFill>
+                <a:srgbClr val="E65100"/>
+              </a:solidFill>
+            </c:spPr>
+          </c:dPt>
+          <c:dPt>
+            <c:idx val="1"/>
+            <c:spPr>
+              <a:solidFill>
+                <a:srgbClr val="1565C0"/>
+              </a:solidFill>
+            </c:spPr>
+          </c:dPt>
+          <c:dPt>
+            <c:idx val="2"/>
+            <c:spPr>
+              <a:solidFill>
+                <a:srgbClr val="90A4AE"/>
+              </a:solidFill>
+            </c:spPr>
+          </c:dPt>
+          <c:cat>
+            <c:strRef>
+              <c:f>Sheet1!$A$2:$A$4</c:f>
+              <c:strCache>
+                <c:ptCount val="3"/>
+                <c:pt idx="0">
+                  <c:v>Chauffage (fioul + bois)</c:v>
+                </c:pt>
+                <c:pt idx="1">
+                  <c:v>ECS (ballon elec.)</c:v>
+                </c:pt>
+                <c:pt idx="2">
+                  <c:v>Electricite specifique</c:v>
+                </c:pt>
+              </c:strCache>
+            </c:strRef>
+          </c:cat>
+          <c:val>
+            <c:numRef>
+              <c:f>Sheet1!$B$2:$B$4</c:f>
+              <c:numCache>
+                <c:formatCode>General</c:formatCode>
+                <c:ptCount val="3"/>
+                <c:pt idx="0">
+                  <c:v>78</c:v>
+                </c:pt>
+                <c:pt idx="1">
+                  <c:v>9</c:v>
+                </c:pt>
+                <c:pt idx="2">
+                  <c:v>13</c:v>
+                </c:pt>
+              </c:numCache>
+            </c:numRef>
+          </c:val>
+        </c:ser>
+        <c:dLbls>
+          <c:numFmt formatCode="0&quot;%&quot;" sourceLinked="0"/>
+          <c:txPr>
+            <a:bodyPr/>
+            <a:lstStyle/>
+            <a:p>
+              <a:pPr>
+                <a:defRPr sz="1200" b="1">
+                  <a:solidFill>
+                    <a:srgbClr val="FFFFFF"/>
+                  </a:solidFill>
+                </a:defRPr>
+              </a:pPr>
+            </a:p>
+          </c:txPr>
+          <c:dLblPos val="inEnd"/>
+          <c:showLegendKey val="0"/>
+          <c:showVal val="1"/>
+          <c:showCatName val="0"/>
+          <c:showSerName val="0"/>
+          <c:showPercent val="0"/>
+          <c:showBubbleSize val="0"/>
+          <c:showLeaderLines val="1"/>
+        </c:dLbls>
+      </c:pieChart>
+    </c:plotArea>
+    <c:legend>
+      <c:legendPos val="b"/>
+      <c:overlay val="0"/>
+      <c:txPr>
+        <a:bodyPr/>
+        <a:lstStyle/>
+        <a:p>
+          <a:pPr>
+            <a:defRPr sz="1000"/>
+          </a:pPr>
+        </a:p>
+      </c:txPr>
+    </c:legend>
+    <c:dispBlanksAs val="gap"/>
+  </c:chart>
+  <c:txPr>
+    <a:bodyPr/>
+    <a:lstStyle/>
+    <a:p>
+      <a:pPr>
+        <a:defRPr sz="1800"/>
+      </a:pPr>
+      <a:endParaRPr lang="en-US"/>
+    </a:p>
+  </c:txPr>
+  <c:externalData r:id="rId1">
+    <c:autoUpdate val="0"/>
+  </c:externalData>
+</c:chartSpace>
+</file>
+
+<file path=ppt/charts/chart3.xml><?xml version="1.0" encoding="utf-8"?>
+<c:chartSpace xmlns:c="http://schemas.openxmlformats.org/drawingml/2006/chart" xmlns:a="http://schemas.openxmlformats.org/drawingml/2006/main" xmlns:r="http://schemas.openxmlformats.org/officeDocument/2006/relationships">
+  <c:chart>
     <c:autoTitleDeleted val="1"/>
     <c:plotArea>
       <c:pieChart>
@@ -534,7 +691,7 @@
 </c:chartSpace>
 </file>
 
-<file path=ppt/charts/chart3.xml><?xml version="1.0" encoding="utf-8"?>
+<file path=ppt/charts/chart4.xml><?xml version="1.0" encoding="utf-8"?>
 <c:chartSpace xmlns:c="http://schemas.openxmlformats.org/drawingml/2006/chart" xmlns:a="http://schemas.openxmlformats.org/drawingml/2006/main" xmlns:r="http://schemas.openxmlformats.org/officeDocument/2006/relationships">
   <c:date1904 val="0"/>
   <c:chart>
@@ -1170,7 +1327,7 @@
           <a:lstStyle/>
           <a:p>
             <a:r>
-              <a:t>Les systemes : chaudiere fioul de 1991 sans sonde exterieure, alimentant des radiateurs fonte haute temperature sans robinets thermostatiques - donc pas de reglage piece par piece. Poele bois 6 kW non labellise. ECS par vieux ballon electrique hors volume chauffe, source de pertes. Aucune VMC. Ces trois points - chauffage, regulation, ventilation - sont mes principaux leviers.</a:t>
+              <a:t>L'enveloppe poste par poste. Murs pierre 50 cm : inertie mais pas d'isolation. Combles : seulement 8 cm de laine ancienne. Menuiseries : double vitrage bois argon de 2019, performantes. Plancher sur terre-plein non isole. Etancheite a l'air non maitrisee. Conclusion : comme les fenetres sont deja bonnes, je concentre l'isolation sur les murs et la toiture.</a:t>
             </a:r>
           </a:p>
         </p:txBody>
@@ -1240,7 +1397,7 @@
           <a:lstStyle/>
           <a:p>
             <a:r>
-              <a:t>Trois conforts souvent oublies mais notes. Eclairage : 25 % d'halogenes energivores, 75 % de LED, 200 W ; je preconise le tout LED et la lumiere naturelle. QAI : la ventilation naturelle ne maitrise pas les debits et favorise l'humidite ; je propose une VMC hygro B. Acoustique : les bruits exterieurs sont mal filtres, or l'isolation par l'exterieur ameliore aussi l'affaiblissement acoustique.</a:t>
+              <a:t>Les systemes : chaudiere fioul de 1991 sans sonde exterieure, alimentant des radiateurs fonte haute temperature sans robinets thermostatiques - donc pas de reglage piece par piece. Poele bois 6 kW non labellise. ECS par vieux ballon electrique hors volume chauffe, source de pertes. Aucune VMC. Ces trois points - chauffage, regulation, ventilation - sont mes principaux leviers.</a:t>
             </a:r>
           </a:p>
         </p:txBody>
@@ -1310,7 +1467,7 @@
           <a:lstStyle/>
           <a:p>
             <a:r>
-              <a:t>Le coeur du diagnostic. A gauche, le calcul des deperditions : 42 % par les murs, 20 % toiture, 20 % ventilation, 10 % ponts thermiques, 4 % fenetres et plancher. A droite, le DPE : classe G sur les deux axes - 535 kWh primaire au m2, 156 kg de CO2, facture de 7 100 a 9 610 euros par an. Le Ubat de 2,03 vaut environ quatre fois la reference. Murs, toiture et ventilation cumulent plus de 80 % des pertes : c'est ce qui guide mes priorites de travaux.</a:t>
+              <a:t>Trois conforts souvent oublies mais notes. Eclairage : 25 % d'halogenes energivores, 75 % de LED, 200 W ; je preconise le tout LED et la lumiere naturelle. QAI : la ventilation naturelle ne maitrise pas les debits et favorise l'humidite ; je propose une VMC hygro B. Acoustique : les bruits exterieurs sont mal filtres, or l'isolation par l'exterieur ameliore aussi l'affaiblissement acoustique.</a:t>
             </a:r>
           </a:p>
         </p:txBody>
@@ -1380,7 +1537,7 @@
           <a:lstStyle/>
           <a:p>
             <a:r>
-              <a:t>Mon premier scenario est une renovation performante PAR ETAPES. L'etape 1 cible l'enveloppe : ITE laine de bois 200 mm, combles ouate 400 mm, VMC hygro B, et je remplace le vieux ballon par un chauffe-eau thermodynamique. La chaudiere fioul est conservee a ce stade. C'est coherent avec l'attendu : cette etape traite les DEUX premiers postes d'isolation - murs et toiture - et fait gagner 3 classes, de G a D. En reduisant d'abord les besoins, on prepare le changement de chauffage a l'etape suivante, qu'on pourra dimensionner plus petit. Sa limite, et c'est important : meme bien isole, le fioul plafonne le DPE a D a cause de ses emissions de CO2. Reglementation : l'ITE necessite une declaration prealable en mairie. Investissement : environ 42 500 euros.</a:t>
+              <a:t>Le coeur du diagnostic. A gauche, le calcul des deperditions : 42 % par les murs, 20 % toiture, 20 % ventilation, 10 % ponts thermiques, 4 % fenetres et plancher. A droite, le DPE : classe G sur les deux axes - 535 kWh primaire au m2, 156 kg de CO2, facture de 7 100 a 9 610 euros par an. Le Ubat de 2,03 vaut environ quatre fois la reference. Murs, toiture et ventilation cumulent plus de 80 % des pertes : c'est ce qui guide mes priorites de travaux.</a:t>
             </a:r>
           </a:p>
         </p:txBody>
@@ -1450,7 +1607,7 @@
           <a:lstStyle/>
           <a:p>
             <a:r>
-              <a:t>Mon second scenario est une renovation GLOBALE : toute l'isolation du scenario 1 en une fois, plus le remplacement du chauffage. J'ai compare deux solutions bas carbone. La PAC air/eau donne la meilleure energie primaire, mais elle est moins efficace sur les radiateurs fonte HAUTE temperature deja en place. La chaudiere a granules, elle, est tres adaptee a ces radiateurs et au bati ancien, avec une energie renouvelable locale. Je la retiens, AVEC tremie integree pour eviter le silo. Resultat DPE : energie B, climat A - le granule fait basculer l'etiquette en B. C'est tout l'interet de sortir du fioul. Investissement : environ 63 000 euros.</a:t>
+              <a:t>Mon premier scenario est une renovation performante PAR ETAPES. L'etape 1 cible l'enveloppe : ITE laine de bois 200 mm, combles ouate 400 mm, VMC hygro B, et je remplace le vieux ballon par un chauffe-eau thermodynamique. La chaudiere fioul est conservee a ce stade. C'est coherent avec l'attendu : cette etape traite les DEUX premiers postes d'isolation - murs et toiture - et fait gagner 3 classes, de G a D. En reduisant d'abord les besoins, on prepare le changement de chauffage a l'etape suivante, qu'on pourra dimensionner plus petit. Sa limite, et c'est important : meme bien isole, le fioul plafonne le DPE a D a cause de ses emissions de CO2. Reglementation : l'ITE necessite une declaration prealable en mairie. Investissement : environ 42 500 euros.</a:t>
             </a:r>
           </a:p>
         </p:txBody>
@@ -1520,7 +1677,7 @@
           <a:lstStyle/>
           <a:p>
             <a:r>
-              <a:t>Cette diapo repond a un attendu fortement coefficiente : adapter et optimiser les equipements. Cote regulation, le diagnostic a montre l'absence de sonde exterieure et de robinets thermostatiques. Je preconise : une sonde exterieure pour piloter par loi d'eau, des robinets thermostatiques sur les radiateurs fonte, et un thermostat programmable - on ameliore le rendement global. Cote eau chaude : le vieux ballon electrique hors volume chauffe est un gouffre ; je propose un chauffe-eau thermodynamique, COP environ 3, qui divise la conso par trois, et je le replace dans le volume chauffe. Ce poste ECS optimise est integre dans les deux scenarios.</a:t>
+              <a:t>Mon second scenario est une renovation GLOBALE : toute l'isolation du scenario 1 en une fois, plus le remplacement du chauffage. J'ai compare deux solutions bas carbone. La PAC air/eau donne la meilleure energie primaire, mais elle est moins efficace sur les radiateurs fonte HAUTE temperature deja en place. La chaudiere a granules, elle, est tres adaptee a ces radiateurs et au bati ancien, avec une energie renouvelable locale. Je la retiens, AVEC tremie integree pour eviter le silo. Resultat DPE : energie B, climat A - le granule fait basculer l'etiquette en B. C'est tout l'interet de sortir du fioul. Investissement : environ 63 000 euros.</a:t>
             </a:r>
           </a:p>
         </p:txBody>
@@ -1590,7 +1747,7 @@
           <a:lstStyle/>
           <a:p>
             <a:r>
-              <a:t>C'est la diapo sur laquelle j'insiste. Je calcule le DPE selon la logique 3CL : energie primaire d'un cote, emissions de CO2 de l'autre, et la classe finale est la MOINS bonne des deux. J'ancre tout sur mon etude thermique : un besoin de chauffage ramene a 7 020 kWh par an apres isolation. En energie primaire, les deux scenarios sont proches : le scenario 1 atteint C (128), le scenario 2 B (109) grace au meilleur rendement de la chaudiere granules. Mais c'est le CO2 qui fait la difference : avec le fioul conserve, le scenario 1 reste a 33 kg, soit classe D - le fioul plafonne. Avec le granule, le scenario 2 tombe a 3 kg, classe A. Resultat : on passe de G a D avec le scenario par etapes, et a B avec le scenario global. Le message cle : a isolation egale, c'est le choix de l'energie de chauffage qui determine l'etiquette finale.</a:t>
+              <a:t>Cette diapo repond a un attendu fortement coefficiente : adapter et optimiser les equipements. Cote regulation, le diagnostic a montre l'absence de sonde exterieure et de robinets thermostatiques. Je preconise : une sonde exterieure pour piloter par loi d'eau, des robinets thermostatiques sur les radiateurs fonte, et un thermostat programmable - on ameliore le rendement global. Cote eau chaude : le vieux ballon electrique hors volume chauffe est un gouffre ; je propose un chauffe-eau thermodynamique, COP environ 3, qui divise la conso par trois, et je le replace dans le volume chauffe. Ce poste ECS optimise est integre dans les deux scenarios.</a:t>
             </a:r>
           </a:p>
         </p:txBody>
@@ -1660,7 +1817,7 @@
           <a:lstStyle/>
           <a:p>
             <a:r>
-              <a:t>Le dimensionnement. Pour l'isolation : R = epaisseur / lambda donne R = 5,26 pour les murs et 10,26 pour les combles, conformes a une renovation performante. Pour le chauffage : 21,3 kW initiaux, reduits de 55 % par l'isolation et la VMC -&gt; environ 10 kW, donc une chaudiere de 12 kW avec marge. La conso est d'environ 1,5 tonne de granules par an ; j'ai SUPPRIME le silo au profit d'une tremie integree. La VMC hygro B est dimensionnee a 180 m3/h. Cote materiaux, j'ai choisi des biosources - laine de bois et ouate - pour le faible carbone, le dephasage qui apporte le confort d'ete, et la perspirance indispensable sur des murs en pierre.</a:t>
+              <a:t>C'est la diapo sur laquelle j'insiste. Je calcule le DPE selon la logique 3CL : energie primaire d'un cote, emissions de CO2 de l'autre, et la classe finale est la MOINS bonne des deux. J'ancre tout sur mon etude thermique : un besoin de chauffage ramene a 7 020 kWh par an apres isolation. En energie primaire, les deux scenarios sont proches : le scenario 1 atteint C (128), le scenario 2 B (109) grace au meilleur rendement de la chaudiere granules. Mais c'est le CO2 qui fait la difference : avec le fioul conserve, le scenario 1 reste a 33 kg, soit classe D - le fioul plafonne. Avec le granule, le scenario 2 tombe a 3 kg, classe A. Resultat : on passe de G a D avec le scenario par etapes, et a B avec le scenario global. Le message cle : a isolation egale, c'est le choix de l'energie de chauffage qui determine l'etiquette finale.</a:t>
             </a:r>
           </a:p>
         </p:txBody>
@@ -1730,7 +1887,7 @@
           <a:lstStyle/>
           <a:p>
             <a:r>
-              <a:t>Le chiffrage, sur la base de prix de marche par type de travaux et de marques reelles, en fourni-pose TTC main d'oeuvre comprise. Scenario 1, 42 500 euros : le gros poste est l'ITE laine de bois - type Steico avec enduit - a 30 000 euros, dont environ 40 % de main d'oeuvre et l'echafaudage ; puis les combles en ouate Ouateco, l'etancheite a l'air, la VMC Aldes ou Atlantic, et le chauffe-eau thermodynamique Atlantic Calypso. Scenario 2 : on ajoute la chaudiere granules ÖkoFEN ou Hargassner a 15 000 euros, le ballon tampon et le tubage, et la depose de la cuve fioul - soit 63 000 euros au total. Plus de silo. L'ecart de 20 500 euros correspond au changement de chauffage.</a:t>
+              <a:t>Le dimensionnement. Pour l'isolation : R = epaisseur / lambda donne R = 5,26 pour les murs et 10,26 pour les combles, conformes a une renovation performante. Pour le chauffage : 21,3 kW initiaux, reduits de 55 % par l'isolation et la VMC -&gt; environ 10 kW, donc une chaudiere de 12 kW avec marge. La conso est d'environ 1,5 tonne de granules par an ; j'ai SUPPRIME le silo au profit d'une tremie integree. La VMC hygro B est dimensionnee a 180 m3/h. Cote materiaux, j'ai choisi des biosources - laine de bois et ouate - pour le faible carbone, le dephasage qui apporte le confort d'ete, et la perspirance indispensable sur des murs en pierre.</a:t>
             </a:r>
           </a:p>
         </p:txBody>
@@ -1800,7 +1957,7 @@
           <a:lstStyle/>
           <a:p>
             <a:r>
-              <a:t>Le financement, avec une estimation PRUDENTE des aides - plus realiste que les taux maximaux. Pour ce foyer de 4 personnes, MaPrimeRenov' et les CEE couvrent environ 20 000 euros au scenario 1 et 30 000 euros au scenario 2. Le reste a charge s'eleve donc a 22 500 euros pour le scenario 1 et 33 000 euros pour le scenario 2 - des montants coherents avec ce qu'observent des projets comparables. On deduit l'apport de 10 000 euros, et le solde - 12 500 a 23 000 euros - est finance par un eco-PTZ a taux zero. Le projet reste dans le budget : la mensualite de l'eco-PTZ est largement couverte par les economies d'energie.</a:t>
+              <a:t>Le chiffrage, sur la base de prix de marche par type de travaux et de marques reelles, en fourni-pose TTC main d'oeuvre comprise. Scenario 1, 42 500 euros : le gros poste est l'ITE laine de bois - type Steico avec enduit - a 30 000 euros, dont environ 40 % de main d'oeuvre et l'echafaudage ; puis les combles en ouate Ouateco, l'etancheite a l'air, la VMC Aldes ou Atlantic, et le chauffe-eau thermodynamique Atlantic Calypso. Scenario 2 : on ajoute la chaudiere granules ÖkoFEN ou Hargassner a 15 000 euros, le ballon tampon et le tubage, et la depose de la cuve fioul - soit 63 000 euros au total. Plus de silo. L'ecart de 20 500 euros correspond au changement de chauffage.</a:t>
             </a:r>
           </a:p>
         </p:txBody>
@@ -1940,7 +2097,7 @@
           <a:lstStyle/>
           <a:p>
             <a:r>
-              <a:t>L'analyse economique se base sur la facture REELLE du foyer - environ 3 800 euros par an - et non sur le cout conventionnel du DPE, qui le surestime. Apres travaux, la facture tombe a 2 200 euros au scenario 1 et 1 600 euros au scenario 2, soit des economies de 1 600 a 2 200 euros par an. Sur le reste a charge, le retour sur investissement est d'environ 14 ans pour le scenario 1 et 15 ans pour le scenario 2 - coherent avec des projets comparables. Pour le cout global, j'integre une hausse du prix de l'energie de 5 % par an, comme attendu : sur 30 ans, ne rien faire coute 252 000 euros, le scenario 1 188 500, et le scenario 2 169 000. Malgre un investissement plus eleve, le scenario 2 reste le plus avantageux sur la duree.</a:t>
+              <a:t>Le financement, avec une estimation PRUDENTE des aides - plus realiste que les taux maximaux. Pour ce foyer de 4 personnes, MaPrimeRenov' et les CEE couvrent environ 20 000 euros au scenario 1 et 30 000 euros au scenario 2. Le reste a charge s'eleve donc a 22 500 euros pour le scenario 1 et 33 000 euros pour le scenario 2 - des montants coherents avec ce qu'observent des projets comparables. On deduit l'apport de 10 000 euros, et le solde - 12 500 a 23 000 euros - est finance par un eco-PTZ a taux zero. Le projet reste dans le budget : la mensualite de l'eco-PTZ est largement couverte par les economies d'energie.</a:t>
             </a:r>
           </a:p>
         </p:txBody>
@@ -2010,7 +2167,7 @@
           <a:lstStyle/>
           <a:p>
             <a:r>
-              <a:t>Cette synthese recapitule tout. On lit la progression du DPE : de G a D avec le scenario par etapes, jusqu'a B avec le scenario global. Le scenario 2 coute plus cher a l'achat mais affiche le cout annuel le plus bas, le cout global le plus faible et l'amortissement le plus court. C'est la base de ma recommandation.</a:t>
+              <a:t>L'analyse economique se base sur la facture REELLE du foyer - environ 3 800 euros par an - et non sur le cout conventionnel du DPE, qui le surestime. Apres travaux, la facture tombe a 2 200 euros au scenario 1 et 1 600 euros au scenario 2, soit des economies de 1 600 a 2 200 euros par an. Sur le reste a charge, le retour sur investissement est d'environ 14 ans pour le scenario 1 et 15 ans pour le scenario 2 - coherent avec des projets comparables. Pour le cout global, j'integre une hausse du prix de l'energie de 5 % par an, comme attendu : sur 30 ans, ne rien faire coute 252 000 euros, le scenario 1 188 500, et le scenario 2 169 000. Malgre un investissement plus eleve, le scenario 2 reste le plus avantageux sur la duree.</a:t>
             </a:r>
           </a:p>
         </p:txBody>
@@ -2080,7 +2237,7 @@
           <a:lstStyle/>
           <a:p>
             <a:r>
-              <a:t>Pour conclure : au regard de la performance, de la sortie du fioul, de la rentabilite et du respect du bati, je recommande le scenario 2, qui fait passer le logement de G a B et reste le moins cher sur 30 ans (avec hausse de l'energie), tout en restant dans le budget grace aux aides et a l'apport. Si le budget initial est un frein, le scenario 1 par etapes est une excellente premiere etape, completee plus tard par le chauffage. J'ai aussi remis au maitre d'ouvrage des conseils de sobriete simples qui amplifient les economies. Je vous remercie et je suis pret pour vos questions.</a:t>
+              <a:t>Cette synthese recapitule tout. On lit la progression du DPE : de G a D avec le scenario par etapes, jusqu'a B avec le scenario global. Le scenario 2 coute plus cher a l'achat mais affiche le cout annuel le plus bas, le cout global le plus faible et l'amortissement le plus court. C'est la base de ma recommandation.</a:t>
             </a:r>
           </a:p>
         </p:txBody>
@@ -2150,6 +2307,76 @@
           <a:lstStyle/>
           <a:p>
             <a:r>
+              <a:t>Pour conclure : au regard de la performance, de la sortie du fioul, de la rentabilite et du respect du bati, je recommande le scenario 2, qui fait passer le logement de G a B et reste le moins cher sur 30 ans (avec hausse de l'energie), tout en restant dans le budget grace aux aides et a l'apport. Si le budget initial est un frein, le scenario 1 par etapes est une excellente premiere etape, completee plus tard par le chauffage. J'ai aussi remis au maitre d'ouvrage des conseils de sobriete simples qui amplifient les economies. Je vous remercie et je suis pret pour vos questions.</a:t>
+            </a:r>
+          </a:p>
+        </p:txBody>
+      </p:sp>
+      <p:sp>
+        <p:nvSpPr>
+          <p:cNvPr id="4" name="Slide Number Placeholder 3"/>
+          <p:cNvSpPr>
+            <a:spLocks noGrp="1"/>
+          </p:cNvSpPr>
+          <p:nvPr>
+            <p:ph type="sldNum" idx="5" sz="quarter"/>
+          </p:nvPr>
+        </p:nvSpPr>
+        <p:spPr/>
+      </p:sp>
+    </p:spTree>
+  </p:cSld>
+  <p:clrMapOvr>
+    <a:masterClrMapping/>
+  </p:clrMapOvr>
+</p:notes>
+</file>
+
+<file path=ppt/notesSlides/notesSlide24.xml><?xml version="1.0" encoding="utf-8"?>
+<p:notes xmlns:a="http://schemas.openxmlformats.org/drawingml/2006/main" xmlns:p="http://schemas.openxmlformats.org/presentationml/2006/main" xmlns:r="http://schemas.openxmlformats.org/officeDocument/2006/relationships">
+  <p:cSld>
+    <p:spTree>
+      <p:nvGrpSpPr>
+        <p:cNvPr id="1" name=""/>
+        <p:cNvGrpSpPr/>
+        <p:nvPr/>
+      </p:nvGrpSpPr>
+      <p:grpSpPr>
+        <a:xfrm>
+          <a:off x="0" y="0"/>
+          <a:ext cx="0" cy="0"/>
+          <a:chOff x="0" y="0"/>
+          <a:chExt cx="0" cy="0"/>
+        </a:xfrm>
+      </p:grpSpPr>
+      <p:sp>
+        <p:nvSpPr>
+          <p:cNvPr id="2" name="Slide Image Placeholder 1"/>
+          <p:cNvSpPr>
+            <a:spLocks noGrp="1"/>
+          </p:cNvSpPr>
+          <p:nvPr>
+            <p:ph type="sldImg" idx="2"/>
+          </p:nvPr>
+        </p:nvSpPr>
+        <p:spPr/>
+      </p:sp>
+      <p:sp>
+        <p:nvSpPr>
+          <p:cNvPr id="3" name="Notes Placeholder 2"/>
+          <p:cNvSpPr>
+            <a:spLocks noGrp="1"/>
+          </p:cNvSpPr>
+          <p:nvPr>
+            <p:ph type="body" idx="3" sz="quarter"/>
+          </p:nvPr>
+        </p:nvSpPr>
+        <p:spPr/>
+        <p:txBody>
+          <a:bodyPr/>
+          <a:lstStyle/>
+          <a:p>
+            <a:r>
               <a:t>Pour la transparence : l'essentiel de l'etude - la modelisation, le bilan des deperditions, le calcul du DPE, la simulation des gains et le dimensionnement - a ete realise avec le logiciel Pleiades, d'IZUBA energies, qui fournit aussi les estimations de couts. En complement, je me suis appuye sur France Renov' et son simulateur pour les aides, l'ASDER comme conseil local en Savoie, Legifrance pour la reglementation, les documentations des fabricants pour les produits, et l'ADEME comme reference energie-climat. Je peux detailler n'importe lequel de ces points si vous le souhaitez.</a:t>
             </a:r>
           </a:p>
@@ -2640,7 +2867,7 @@
           <a:lstStyle/>
           <a:p>
             <a:r>
-              <a:t>L'enveloppe poste par poste. Murs pierre 50 cm : inertie mais pas d'isolation. Combles : seulement 8 cm de laine ancienne. Menuiseries : double vitrage bois argon de 2019, performantes. Plancher sur terre-plein non isole. Etancheite a l'air non maitrisee. Conclusion : comme les fenetres sont deja bonnes, je concentre l'isolation sur les murs et la toiture.</a:t>
+              <a:t>Je detaille la repartition des depenses par poste, comme l'attend la grille : le chauffage represente pres de 80 % de la depense, l'ECS electrique environ 10 %, et l'electricite specifique le reste. J'ai integre la rigueur climatique - zone H1, 498 m - et verifie la coherence entre les factures et l'estimation du DPE. Point important que je tiens a souligner : compare a la moyenne nationale, ce logement consomme 535 kWh primaire au metre carre contre environ 250 en moyenne, soit plus du double. Cela confirme objectivement le caractere energivore du batiment.</a:t>
             </a:r>
           </a:p>
         </p:txBody>
@@ -6099,6 +6326,1128 @@
 </file>
 
 <file path=ppt/slides/slide10.xml><?xml version="1.0" encoding="utf-8"?>
+<p:sld xmlns:a="http://schemas.openxmlformats.org/drawingml/2006/main" xmlns:p="http://schemas.openxmlformats.org/presentationml/2006/main" xmlns:r="http://schemas.openxmlformats.org/officeDocument/2006/relationships">
+  <p:cSld>
+    <p:spTree>
+      <p:nvGrpSpPr>
+        <p:cNvPr id="1" name=""/>
+        <p:cNvGrpSpPr/>
+        <p:nvPr/>
+      </p:nvGrpSpPr>
+      <p:grpSpPr/>
+      <p:sp>
+        <p:nvSpPr>
+          <p:cNvPr id="2" name="Rectangle 1"/>
+          <p:cNvSpPr/>
+          <p:nvPr/>
+        </p:nvSpPr>
+        <p:spPr>
+          <a:xfrm>
+            <a:off x="0" y="0"/>
+            <a:ext cx="12191695" cy="6858000"/>
+          </a:xfrm>
+          <a:prstGeom prst="rect">
+            <a:avLst/>
+          </a:prstGeom>
+          <a:solidFill>
+            <a:srgbClr val="FFFFFF"/>
+          </a:solidFill>
+          <a:ln>
+            <a:noFill/>
+          </a:ln>
+          <a:effectLst/>
+        </p:spPr>
+        <p:style>
+          <a:lnRef idx="1">
+            <a:schemeClr val="accent1"/>
+          </a:lnRef>
+          <a:fillRef idx="3">
+            <a:schemeClr val="accent1"/>
+          </a:fillRef>
+          <a:effectRef idx="2">
+            <a:schemeClr val="accent1"/>
+          </a:effectRef>
+          <a:fontRef idx="minor">
+            <a:schemeClr val="lt1"/>
+          </a:fontRef>
+        </p:style>
+        <p:txBody>
+          <a:bodyPr rtlCol="0" anchor="ctr"/>
+          <a:lstStyle/>
+          <a:p>
+            <a:pPr algn="ctr"/>
+          </a:p>
+        </p:txBody>
+      </p:sp>
+      <p:sp>
+        <p:nvSpPr>
+          <p:cNvPr id="3" name="Rectangle 2"/>
+          <p:cNvSpPr/>
+          <p:nvPr/>
+        </p:nvSpPr>
+        <p:spPr>
+          <a:xfrm>
+            <a:off x="0" y="0"/>
+            <a:ext cx="201168" cy="6858000"/>
+          </a:xfrm>
+          <a:prstGeom prst="rect">
+            <a:avLst/>
+          </a:prstGeom>
+          <a:solidFill>
+            <a:srgbClr val="1B5E20"/>
+          </a:solidFill>
+          <a:ln>
+            <a:noFill/>
+          </a:ln>
+          <a:effectLst/>
+        </p:spPr>
+        <p:style>
+          <a:lnRef idx="1">
+            <a:schemeClr val="accent1"/>
+          </a:lnRef>
+          <a:fillRef idx="3">
+            <a:schemeClr val="accent1"/>
+          </a:fillRef>
+          <a:effectRef idx="2">
+            <a:schemeClr val="accent1"/>
+          </a:effectRef>
+          <a:fontRef idx="minor">
+            <a:schemeClr val="lt1"/>
+          </a:fontRef>
+        </p:style>
+        <p:txBody>
+          <a:bodyPr rtlCol="0" anchor="ctr"/>
+          <a:lstStyle/>
+          <a:p>
+            <a:pPr algn="ctr"/>
+          </a:p>
+        </p:txBody>
+      </p:sp>
+      <p:sp>
+        <p:nvSpPr>
+          <p:cNvPr id="4" name="Oval 3"/>
+          <p:cNvSpPr/>
+          <p:nvPr/>
+        </p:nvSpPr>
+        <p:spPr>
+          <a:xfrm>
+            <a:off x="502920" y="384048"/>
+            <a:ext cx="658368" cy="658368"/>
+          </a:xfrm>
+          <a:prstGeom prst="ellipse">
+            <a:avLst/>
+          </a:prstGeom>
+          <a:solidFill>
+            <a:srgbClr val="1B5E20"/>
+          </a:solidFill>
+          <a:ln>
+            <a:noFill/>
+          </a:ln>
+          <a:effectLst/>
+        </p:spPr>
+        <p:style>
+          <a:lnRef idx="1">
+            <a:schemeClr val="accent1"/>
+          </a:lnRef>
+          <a:fillRef idx="3">
+            <a:schemeClr val="accent1"/>
+          </a:fillRef>
+          <a:effectRef idx="2">
+            <a:schemeClr val="accent1"/>
+          </a:effectRef>
+          <a:fontRef idx="minor">
+            <a:schemeClr val="lt1"/>
+          </a:fontRef>
+        </p:style>
+        <p:txBody>
+          <a:bodyPr rtlCol="0" anchor="ctr"/>
+          <a:lstStyle/>
+          <a:p>
+            <a:pPr algn="ctr"/>
+          </a:p>
+        </p:txBody>
+      </p:sp>
+      <p:sp>
+        <p:nvSpPr>
+          <p:cNvPr id="5" name="TextBox 4"/>
+          <p:cNvSpPr txBox="1"/>
+          <p:nvPr/>
+        </p:nvSpPr>
+        <p:spPr>
+          <a:xfrm>
+            <a:off x="502920" y="384048"/>
+            <a:ext cx="658368" cy="658368"/>
+          </a:xfrm>
+          <a:prstGeom prst="rect">
+            <a:avLst/>
+          </a:prstGeom>
+          <a:noFill/>
+        </p:spPr>
+        <p:txBody>
+          <a:bodyPr wrap="square" anchor="ctr" lIns="25400" rIns="25400" tIns="25400" bIns="25400">
+            <a:spAutoFit/>
+          </a:bodyPr>
+          <a:lstStyle/>
+          <a:p>
+            <a:pPr algn="ctr">
+              <a:lnSpc>
+                <a:spcPct val="100000"/>
+              </a:lnSpc>
+              <a:spcAft>
+                <a:spcPts val="400"/>
+              </a:spcAft>
+            </a:pPr>
+            <a:r>
+              <a:rPr sz="2600" b="1" i="0">
+                <a:solidFill>
+                  <a:srgbClr val="FFFFFF"/>
+                </a:solidFill>
+                <a:latin typeface="Calibri"/>
+              </a:rPr>
+              <a:t>2</a:t>
+            </a:r>
+          </a:p>
+        </p:txBody>
+      </p:sp>
+      <p:sp>
+        <p:nvSpPr>
+          <p:cNvPr id="6" name="TextBox 5"/>
+          <p:cNvSpPr txBox="1"/>
+          <p:nvPr/>
+        </p:nvSpPr>
+        <p:spPr>
+          <a:xfrm>
+            <a:off x="1325880" y="310896"/>
+            <a:ext cx="10332720" cy="566928"/>
+          </a:xfrm>
+          <a:prstGeom prst="rect">
+            <a:avLst/>
+          </a:prstGeom>
+          <a:noFill/>
+        </p:spPr>
+        <p:txBody>
+          <a:bodyPr wrap="square" anchor="ctr" lIns="25400" rIns="25400" tIns="25400" bIns="25400">
+            <a:spAutoFit/>
+          </a:bodyPr>
+          <a:lstStyle/>
+          <a:p>
+            <a:pPr algn="l">
+              <a:lnSpc>
+                <a:spcPct val="100000"/>
+              </a:lnSpc>
+              <a:spcAft>
+                <a:spcPts val="400"/>
+              </a:spcAft>
+            </a:pPr>
+            <a:r>
+              <a:rPr sz="2800" b="1" i="0">
+                <a:solidFill>
+                  <a:srgbClr val="1B5E20"/>
+                </a:solidFill>
+                <a:latin typeface="Calibri"/>
+              </a:rPr>
+              <a:t>Diagnostic de l'enveloppe thermique</a:t>
+            </a:r>
+          </a:p>
+        </p:txBody>
+      </p:sp>
+      <p:sp>
+        <p:nvSpPr>
+          <p:cNvPr id="7" name="Rectangle 6"/>
+          <p:cNvSpPr/>
+          <p:nvPr/>
+        </p:nvSpPr>
+        <p:spPr>
+          <a:xfrm>
+            <a:off x="1325880" y="1225296"/>
+            <a:ext cx="10058400" cy="27940"/>
+          </a:xfrm>
+          <a:prstGeom prst="rect">
+            <a:avLst/>
+          </a:prstGeom>
+          <a:solidFill>
+            <a:srgbClr val="2E7D32"/>
+          </a:solidFill>
+          <a:ln>
+            <a:noFill/>
+          </a:ln>
+          <a:effectLst/>
+        </p:spPr>
+        <p:style>
+          <a:lnRef idx="1">
+            <a:schemeClr val="accent1"/>
+          </a:lnRef>
+          <a:fillRef idx="3">
+            <a:schemeClr val="accent1"/>
+          </a:fillRef>
+          <a:effectRef idx="2">
+            <a:schemeClr val="accent1"/>
+          </a:effectRef>
+          <a:fontRef idx="minor">
+            <a:schemeClr val="lt1"/>
+          </a:fontRef>
+        </p:style>
+        <p:txBody>
+          <a:bodyPr rtlCol="0" anchor="ctr"/>
+          <a:lstStyle/>
+          <a:p>
+            <a:pPr algn="ctr"/>
+          </a:p>
+        </p:txBody>
+      </p:sp>
+      <p:sp>
+        <p:nvSpPr>
+          <p:cNvPr id="8" name="TextBox 7"/>
+          <p:cNvSpPr txBox="1"/>
+          <p:nvPr/>
+        </p:nvSpPr>
+        <p:spPr>
+          <a:xfrm>
+            <a:off x="502920" y="6473952"/>
+            <a:ext cx="8229600" cy="292608"/>
+          </a:xfrm>
+          <a:prstGeom prst="rect">
+            <a:avLst/>
+          </a:prstGeom>
+          <a:noFill/>
+        </p:spPr>
+        <p:txBody>
+          <a:bodyPr wrap="square" anchor="t" lIns="25400" rIns="25400" tIns="25400" bIns="25400">
+            <a:spAutoFit/>
+          </a:bodyPr>
+          <a:lstStyle/>
+          <a:p>
+            <a:pPr algn="l">
+              <a:lnSpc>
+                <a:spcPct val="100000"/>
+              </a:lnSpc>
+              <a:spcAft>
+                <a:spcPts val="400"/>
+              </a:spcAft>
+            </a:pPr>
+            <a:r>
+              <a:rPr sz="900" b="0" i="0">
+                <a:solidFill>
+                  <a:srgbClr val="90A4AE"/>
+                </a:solidFill>
+                <a:latin typeface="Calibri"/>
+              </a:rPr>
+              <a:t>Renovation energetique - Saint-Jean-de-Chevelu (73) - Bloc 1</a:t>
+            </a:r>
+          </a:p>
+        </p:txBody>
+      </p:sp>
+      <p:sp>
+        <p:nvSpPr>
+          <p:cNvPr id="9" name="TextBox 8"/>
+          <p:cNvSpPr txBox="1"/>
+          <p:nvPr/>
+        </p:nvSpPr>
+        <p:spPr>
+          <a:xfrm>
+            <a:off x="9418320" y="6473952"/>
+            <a:ext cx="2286000" cy="292608"/>
+          </a:xfrm>
+          <a:prstGeom prst="rect">
+            <a:avLst/>
+          </a:prstGeom>
+          <a:noFill/>
+        </p:spPr>
+        <p:txBody>
+          <a:bodyPr wrap="square" anchor="t" lIns="25400" rIns="25400" tIns="25400" bIns="25400">
+            <a:spAutoFit/>
+          </a:bodyPr>
+          <a:lstStyle/>
+          <a:p>
+            <a:pPr algn="r">
+              <a:lnSpc>
+                <a:spcPct val="100000"/>
+              </a:lnSpc>
+              <a:spcAft>
+                <a:spcPts val="400"/>
+              </a:spcAft>
+            </a:pPr>
+            <a:r>
+              <a:rPr sz="900" b="0" i="0">
+                <a:solidFill>
+                  <a:srgbClr val="90A4AE"/>
+                </a:solidFill>
+                <a:latin typeface="Calibri"/>
+              </a:rPr>
+              <a:t>Guillaume Tardy</a:t>
+            </a:r>
+          </a:p>
+        </p:txBody>
+      </p:sp>
+      <p:graphicFrame>
+        <p:nvGraphicFramePr>
+          <p:cNvPr id="10" name="Table 9"/>
+          <p:cNvGraphicFramePr>
+            <a:graphicFrameLocks noGrp="1"/>
+          </p:cNvGraphicFramePr>
+          <p:nvPr/>
+        </p:nvGraphicFramePr>
+        <p:xfrm>
+          <a:off x="822960" y="1554480"/>
+          <a:ext cx="7315200" cy="3520440"/>
+        </p:xfrm>
+        <a:graphic>
+          <a:graphicData uri="http://schemas.openxmlformats.org/drawingml/2006/table">
+            <a:tbl>
+              <a:tblPr>
+                <a:tableStyleId>{5C22544A-7EE6-4342-B048-85BDC9FD1C3A}</a:tableStyleId>
+              </a:tblPr>
+              <a:tblGrid>
+                <a:gridCol w="2011680"/>
+                <a:gridCol w="3108960"/>
+                <a:gridCol w="2194560"/>
+              </a:tblGrid>
+              <a:tr h="502920">
+                <a:tc>
+                  <a:txBody>
+                    <a:bodyPr wrap="square"/>
+                    <a:lstStyle/>
+                    <a:p>
+                      <a:pPr algn="l"/>
+                      <a:r>
+                        <a:rPr sz="1200" b="1">
+                          <a:solidFill>
+                            <a:srgbClr val="FFFFFF"/>
+                          </a:solidFill>
+                          <a:latin typeface="Calibri"/>
+                        </a:rPr>
+                        <a:t>Element</a:t>
+                      </a:r>
+                    </a:p>
+                  </a:txBody>
+                  <a:tcPr marL="76200" marR="76200" marT="12700" marB="12700" anchor="ctr">
+                    <a:solidFill>
+                      <a:srgbClr val="1B5E20"/>
+                    </a:solidFill>
+                  </a:tcPr>
+                </a:tc>
+                <a:tc>
+                  <a:txBody>
+                    <a:bodyPr wrap="square"/>
+                    <a:lstStyle/>
+                    <a:p>
+                      <a:pPr algn="ctr"/>
+                      <a:r>
+                        <a:rPr sz="1200" b="1">
+                          <a:solidFill>
+                            <a:srgbClr val="FFFFFF"/>
+                          </a:solidFill>
+                          <a:latin typeface="Calibri"/>
+                        </a:rPr>
+                        <a:t>Composition</a:t>
+                      </a:r>
+                    </a:p>
+                  </a:txBody>
+                  <a:tcPr marL="76200" marR="76200" marT="12700" marB="12700" anchor="ctr">
+                    <a:solidFill>
+                      <a:srgbClr val="1B5E20"/>
+                    </a:solidFill>
+                  </a:tcPr>
+                </a:tc>
+                <a:tc>
+                  <a:txBody>
+                    <a:bodyPr wrap="square"/>
+                    <a:lstStyle/>
+                    <a:p>
+                      <a:pPr algn="ctr"/>
+                      <a:r>
+                        <a:rPr sz="1200" b="1">
+                          <a:solidFill>
+                            <a:srgbClr val="FFFFFF"/>
+                          </a:solidFill>
+                          <a:latin typeface="Calibri"/>
+                        </a:rPr>
+                        <a:t>Observation</a:t>
+                      </a:r>
+                    </a:p>
+                  </a:txBody>
+                  <a:tcPr marL="76200" marR="76200" marT="12700" marB="12700" anchor="ctr">
+                    <a:solidFill>
+                      <a:srgbClr val="1B5E20"/>
+                    </a:solidFill>
+                  </a:tcPr>
+                </a:tc>
+              </a:tr>
+              <a:tr h="502920">
+                <a:tc>
+                  <a:txBody>
+                    <a:bodyPr wrap="square"/>
+                    <a:lstStyle/>
+                    <a:p>
+                      <a:pPr algn="l"/>
+                      <a:r>
+                        <a:rPr sz="1150" b="1">
+                          <a:solidFill>
+                            <a:srgbClr val="37474F"/>
+                          </a:solidFill>
+                          <a:latin typeface="Calibri"/>
+                        </a:rPr>
+                        <a:t>Murs exterieurs</a:t>
+                      </a:r>
+                    </a:p>
+                  </a:txBody>
+                  <a:tcPr marL="76200" marR="76200" marT="12700" marB="12700" anchor="ctr">
+                    <a:solidFill>
+                      <a:srgbClr val="FFFFFF"/>
+                    </a:solidFill>
+                  </a:tcPr>
+                </a:tc>
+                <a:tc>
+                  <a:txBody>
+                    <a:bodyPr wrap="square"/>
+                    <a:lstStyle/>
+                    <a:p>
+                      <a:pPr algn="ctr"/>
+                      <a:r>
+                        <a:rPr sz="1150" b="0">
+                          <a:solidFill>
+                            <a:srgbClr val="37474F"/>
+                          </a:solidFill>
+                          <a:latin typeface="Calibri"/>
+                        </a:rPr>
+                        <a:t>Pierre calcaire 50 cm</a:t>
+                      </a:r>
+                    </a:p>
+                  </a:txBody>
+                  <a:tcPr marL="76200" marR="76200" marT="12700" marB="12700" anchor="ctr">
+                    <a:solidFill>
+                      <a:srgbClr val="FFFFFF"/>
+                    </a:solidFill>
+                  </a:tcPr>
+                </a:tc>
+                <a:tc>
+                  <a:txBody>
+                    <a:bodyPr wrap="square"/>
+                    <a:lstStyle/>
+                    <a:p>
+                      <a:pPr algn="ctr"/>
+                      <a:r>
+                        <a:rPr sz="1150" b="0">
+                          <a:solidFill>
+                            <a:srgbClr val="37474F"/>
+                          </a:solidFill>
+                          <a:latin typeface="Calibri"/>
+                        </a:rPr>
+                        <a:t>Forte inertie, faible isolation</a:t>
+                      </a:r>
+                    </a:p>
+                  </a:txBody>
+                  <a:tcPr marL="76200" marR="76200" marT="12700" marB="12700" anchor="ctr">
+                    <a:solidFill>
+                      <a:srgbClr val="FFFFFF"/>
+                    </a:solidFill>
+                  </a:tcPr>
+                </a:tc>
+              </a:tr>
+              <a:tr h="502920">
+                <a:tc>
+                  <a:txBody>
+                    <a:bodyPr wrap="square"/>
+                    <a:lstStyle/>
+                    <a:p>
+                      <a:pPr algn="l"/>
+                      <a:r>
+                        <a:rPr sz="1150" b="1">
+                          <a:solidFill>
+                            <a:srgbClr val="37474F"/>
+                          </a:solidFill>
+                          <a:latin typeface="Calibri"/>
+                        </a:rPr>
+                        <a:t>Toiture / combles</a:t>
+                      </a:r>
+                    </a:p>
+                  </a:txBody>
+                  <a:tcPr marL="76200" marR="76200" marT="12700" marB="12700" anchor="ctr">
+                    <a:solidFill>
+                      <a:srgbClr val="E8F5E9"/>
+                    </a:solidFill>
+                  </a:tcPr>
+                </a:tc>
+                <a:tc>
+                  <a:txBody>
+                    <a:bodyPr wrap="square"/>
+                    <a:lstStyle/>
+                    <a:p>
+                      <a:pPr algn="ctr"/>
+                      <a:r>
+                        <a:rPr sz="1150" b="0">
+                          <a:solidFill>
+                            <a:srgbClr val="37474F"/>
+                          </a:solidFill>
+                          <a:latin typeface="Calibri"/>
+                        </a:rPr>
+                        <a:t>8 cm laine minerale ancienne</a:t>
+                      </a:r>
+                    </a:p>
+                  </a:txBody>
+                  <a:tcPr marL="76200" marR="76200" marT="12700" marB="12700" anchor="ctr">
+                    <a:solidFill>
+                      <a:srgbClr val="E8F5E9"/>
+                    </a:solidFill>
+                  </a:tcPr>
+                </a:tc>
+                <a:tc>
+                  <a:txBody>
+                    <a:bodyPr wrap="square"/>
+                    <a:lstStyle/>
+                    <a:p>
+                      <a:pPr algn="ctr"/>
+                      <a:r>
+                        <a:rPr sz="1150" b="0">
+                          <a:solidFill>
+                            <a:srgbClr val="37474F"/>
+                          </a:solidFill>
+                          <a:latin typeface="Calibri"/>
+                        </a:rPr>
+                        <a:t>Isolation insuffisante</a:t>
+                      </a:r>
+                    </a:p>
+                  </a:txBody>
+                  <a:tcPr marL="76200" marR="76200" marT="12700" marB="12700" anchor="ctr">
+                    <a:solidFill>
+                      <a:srgbClr val="E8F5E9"/>
+                    </a:solidFill>
+                  </a:tcPr>
+                </a:tc>
+              </a:tr>
+              <a:tr h="502920">
+                <a:tc>
+                  <a:txBody>
+                    <a:bodyPr wrap="square"/>
+                    <a:lstStyle/>
+                    <a:p>
+                      <a:pPr algn="l"/>
+                      <a:r>
+                        <a:rPr sz="1150" b="1">
+                          <a:solidFill>
+                            <a:srgbClr val="37474F"/>
+                          </a:solidFill>
+                          <a:latin typeface="Calibri"/>
+                        </a:rPr>
+                        <a:t>Menuiseries</a:t>
+                      </a:r>
+                    </a:p>
+                  </a:txBody>
+                  <a:tcPr marL="76200" marR="76200" marT="12700" marB="12700" anchor="ctr">
+                    <a:solidFill>
+                      <a:srgbClr val="FFFFFF"/>
+                    </a:solidFill>
+                  </a:tcPr>
+                </a:tc>
+                <a:tc>
+                  <a:txBody>
+                    <a:bodyPr wrap="square"/>
+                    <a:lstStyle/>
+                    <a:p>
+                      <a:pPr algn="ctr"/>
+                      <a:r>
+                        <a:rPr sz="1150" b="0">
+                          <a:solidFill>
+                            <a:srgbClr val="37474F"/>
+                          </a:solidFill>
+                          <a:latin typeface="Calibri"/>
+                        </a:rPr>
+                        <a:t>Double vitrage bois 4/16/4 Argon (2019)</a:t>
+                      </a:r>
+                    </a:p>
+                  </a:txBody>
+                  <a:tcPr marL="76200" marR="76200" marT="12700" marB="12700" anchor="ctr">
+                    <a:solidFill>
+                      <a:srgbClr val="FFFFFF"/>
+                    </a:solidFill>
+                  </a:tcPr>
+                </a:tc>
+                <a:tc>
+                  <a:txBody>
+                    <a:bodyPr wrap="square"/>
+                    <a:lstStyle/>
+                    <a:p>
+                      <a:pPr algn="ctr"/>
+                      <a:r>
+                        <a:rPr sz="1150" b="0">
+                          <a:solidFill>
+                            <a:srgbClr val="37474F"/>
+                          </a:solidFill>
+                          <a:latin typeface="Calibri"/>
+                        </a:rPr>
+                        <a:t>Bon etat, performantes</a:t>
+                      </a:r>
+                    </a:p>
+                  </a:txBody>
+                  <a:tcPr marL="76200" marR="76200" marT="12700" marB="12700" anchor="ctr">
+                    <a:solidFill>
+                      <a:srgbClr val="FFFFFF"/>
+                    </a:solidFill>
+                  </a:tcPr>
+                </a:tc>
+              </a:tr>
+              <a:tr h="502920">
+                <a:tc>
+                  <a:txBody>
+                    <a:bodyPr wrap="square"/>
+                    <a:lstStyle/>
+                    <a:p>
+                      <a:pPr algn="l"/>
+                      <a:r>
+                        <a:rPr sz="1150" b="1">
+                          <a:solidFill>
+                            <a:srgbClr val="37474F"/>
+                          </a:solidFill>
+                          <a:latin typeface="Calibri"/>
+                        </a:rPr>
+                        <a:t>Plancher bas</a:t>
+                      </a:r>
+                    </a:p>
+                  </a:txBody>
+                  <a:tcPr marL="76200" marR="76200" marT="12700" marB="12700" anchor="ctr">
+                    <a:solidFill>
+                      <a:srgbClr val="E8F5E9"/>
+                    </a:solidFill>
+                  </a:tcPr>
+                </a:tc>
+                <a:tc>
+                  <a:txBody>
+                    <a:bodyPr wrap="square"/>
+                    <a:lstStyle/>
+                    <a:p>
+                      <a:pPr algn="ctr"/>
+                      <a:r>
+                        <a:rPr sz="1150" b="0">
+                          <a:solidFill>
+                            <a:srgbClr val="37474F"/>
+                          </a:solidFill>
+                          <a:latin typeface="Calibri"/>
+                        </a:rPr>
+                        <a:t>Dalle beton sur terre-plein</a:t>
+                      </a:r>
+                    </a:p>
+                  </a:txBody>
+                  <a:tcPr marL="76200" marR="76200" marT="12700" marB="12700" anchor="ctr">
+                    <a:solidFill>
+                      <a:srgbClr val="E8F5E9"/>
+                    </a:solidFill>
+                  </a:tcPr>
+                </a:tc>
+                <a:tc>
+                  <a:txBody>
+                    <a:bodyPr wrap="square"/>
+                    <a:lstStyle/>
+                    <a:p>
+                      <a:pPr algn="ctr"/>
+                      <a:r>
+                        <a:rPr sz="1150" b="0">
+                          <a:solidFill>
+                            <a:srgbClr val="37474F"/>
+                          </a:solidFill>
+                          <a:latin typeface="Calibri"/>
+                        </a:rPr>
+                        <a:t>Non isole -&gt; deperditions</a:t>
+                      </a:r>
+                    </a:p>
+                  </a:txBody>
+                  <a:tcPr marL="76200" marR="76200" marT="12700" marB="12700" anchor="ctr">
+                    <a:solidFill>
+                      <a:srgbClr val="E8F5E9"/>
+                    </a:solidFill>
+                  </a:tcPr>
+                </a:tc>
+              </a:tr>
+              <a:tr h="502920">
+                <a:tc>
+                  <a:txBody>
+                    <a:bodyPr wrap="square"/>
+                    <a:lstStyle/>
+                    <a:p>
+                      <a:pPr algn="l"/>
+                      <a:r>
+                        <a:rPr sz="1150" b="1">
+                          <a:solidFill>
+                            <a:srgbClr val="37474F"/>
+                          </a:solidFill>
+                          <a:latin typeface="Calibri"/>
+                        </a:rPr>
+                        <a:t>Ponts thermiques</a:t>
+                      </a:r>
+                    </a:p>
+                  </a:txBody>
+                  <a:tcPr marL="76200" marR="76200" marT="12700" marB="12700" anchor="ctr">
+                    <a:solidFill>
+                      <a:srgbClr val="FFFFFF"/>
+                    </a:solidFill>
+                  </a:tcPr>
+                </a:tc>
+                <a:tc>
+                  <a:txBody>
+                    <a:bodyPr wrap="square"/>
+                    <a:lstStyle/>
+                    <a:p>
+                      <a:pPr algn="ctr"/>
+                      <a:r>
+                        <a:rPr sz="1150" b="0">
+                          <a:solidFill>
+                            <a:srgbClr val="37474F"/>
+                          </a:solidFill>
+                          <a:latin typeface="Calibri"/>
+                        </a:rPr>
+                        <a:t>Jonctions des parois</a:t>
+                      </a:r>
+                    </a:p>
+                  </a:txBody>
+                  <a:tcPr marL="76200" marR="76200" marT="12700" marB="12700" anchor="ctr">
+                    <a:solidFill>
+                      <a:srgbClr val="FFFFFF"/>
+                    </a:solidFill>
+                  </a:tcPr>
+                </a:tc>
+                <a:tc>
+                  <a:txBody>
+                    <a:bodyPr wrap="square"/>
+                    <a:lstStyle/>
+                    <a:p>
+                      <a:pPr algn="ctr"/>
+                      <a:r>
+                        <a:rPr sz="1150" b="0">
+                          <a:solidFill>
+                            <a:srgbClr val="37474F"/>
+                          </a:solidFill>
+                          <a:latin typeface="Calibri"/>
+                        </a:rPr>
+                        <a:t>Pertes importantes</a:t>
+                      </a:r>
+                    </a:p>
+                  </a:txBody>
+                  <a:tcPr marL="76200" marR="76200" marT="12700" marB="12700" anchor="ctr">
+                    <a:solidFill>
+                      <a:srgbClr val="FFFFFF"/>
+                    </a:solidFill>
+                  </a:tcPr>
+                </a:tc>
+              </a:tr>
+              <a:tr h="502920">
+                <a:tc>
+                  <a:txBody>
+                    <a:bodyPr wrap="square"/>
+                    <a:lstStyle/>
+                    <a:p>
+                      <a:pPr algn="l"/>
+                      <a:r>
+                        <a:rPr sz="1150" b="1">
+                          <a:solidFill>
+                            <a:srgbClr val="37474F"/>
+                          </a:solidFill>
+                          <a:latin typeface="Calibri"/>
+                        </a:rPr>
+                        <a:t>Etancheite a l'air</a:t>
+                      </a:r>
+                    </a:p>
+                  </a:txBody>
+                  <a:tcPr marL="76200" marR="76200" marT="12700" marB="12700" anchor="ctr">
+                    <a:solidFill>
+                      <a:srgbClr val="E8F5E9"/>
+                    </a:solidFill>
+                  </a:tcPr>
+                </a:tc>
+                <a:tc>
+                  <a:txBody>
+                    <a:bodyPr wrap="square"/>
+                    <a:lstStyle/>
+                    <a:p>
+                      <a:pPr algn="ctr"/>
+                      <a:r>
+                        <a:rPr sz="1150" b="0">
+                          <a:solidFill>
+                            <a:srgbClr val="37474F"/>
+                          </a:solidFill>
+                          <a:latin typeface="Calibri"/>
+                        </a:rPr>
+                        <a:t>Non maitrisee (entrees d'air)</a:t>
+                      </a:r>
+                    </a:p>
+                  </a:txBody>
+                  <a:tcPr marL="76200" marR="76200" marT="12700" marB="12700" anchor="ctr">
+                    <a:solidFill>
+                      <a:srgbClr val="E8F5E9"/>
+                    </a:solidFill>
+                  </a:tcPr>
+                </a:tc>
+                <a:tc>
+                  <a:txBody>
+                    <a:bodyPr wrap="square"/>
+                    <a:lstStyle/>
+                    <a:p>
+                      <a:pPr algn="ctr"/>
+                      <a:r>
+                        <a:rPr sz="1150" b="0">
+                          <a:solidFill>
+                            <a:srgbClr val="37474F"/>
+                          </a:solidFill>
+                          <a:latin typeface="Calibri"/>
+                        </a:rPr>
+                        <a:t>Infiltrations parasites</a:t>
+                      </a:r>
+                    </a:p>
+                  </a:txBody>
+                  <a:tcPr marL="76200" marR="76200" marT="12700" marB="12700" anchor="ctr">
+                    <a:solidFill>
+                      <a:srgbClr val="E8F5E9"/>
+                    </a:solidFill>
+                  </a:tcPr>
+                </a:tc>
+              </a:tr>
+            </a:tbl>
+          </a:graphicData>
+        </a:graphic>
+      </p:graphicFrame>
+      <p:sp>
+        <p:nvSpPr>
+          <p:cNvPr id="11" name="Rectangle 10"/>
+          <p:cNvSpPr/>
+          <p:nvPr/>
+        </p:nvSpPr>
+        <p:spPr>
+          <a:xfrm>
+            <a:off x="8589356" y="1534480"/>
+            <a:ext cx="2572328" cy="2197984"/>
+          </a:xfrm>
+          <a:prstGeom prst="rect">
+            <a:avLst/>
+          </a:prstGeom>
+          <a:solidFill>
+            <a:srgbClr val="FFFFFF"/>
+          </a:solidFill>
+          <a:ln w="15240">
+            <a:solidFill>
+              <a:srgbClr val="90A4AE"/>
+            </a:solidFill>
+          </a:ln>
+          <a:effectLst/>
+        </p:spPr>
+        <p:style>
+          <a:lnRef idx="1">
+            <a:schemeClr val="accent1"/>
+          </a:lnRef>
+          <a:fillRef idx="3">
+            <a:schemeClr val="accent1"/>
+          </a:fillRef>
+          <a:effectRef idx="2">
+            <a:schemeClr val="accent1"/>
+          </a:effectRef>
+          <a:fontRef idx="minor">
+            <a:schemeClr val="lt1"/>
+          </a:fontRef>
+        </p:style>
+        <p:txBody>
+          <a:bodyPr rtlCol="0" anchor="ctr"/>
+          <a:lstStyle/>
+          <a:p>
+            <a:pPr algn="ctr"/>
+          </a:p>
+        </p:txBody>
+      </p:sp>
+      <p:pic>
+        <p:nvPicPr>
+          <p:cNvPr id="12" name="Picture 11" descr="p06_x62_460x392.png"/>
+          <p:cNvPicPr>
+            <a:picLocks noChangeAspect="1"/>
+          </p:cNvPicPr>
+          <p:nvPr/>
+        </p:nvPicPr>
+        <p:blipFill>
+          <a:blip r:embed="rId2"/>
+          <a:stretch>
+            <a:fillRect/>
+          </a:stretch>
+        </p:blipFill>
+        <p:spPr>
+          <a:xfrm>
+            <a:off x="8609356" y="1554480"/>
+            <a:ext cx="2532328" cy="2157984"/>
+          </a:xfrm>
+          <a:prstGeom prst="rect">
+            <a:avLst/>
+          </a:prstGeom>
+        </p:spPr>
+      </p:pic>
+      <p:sp>
+        <p:nvSpPr>
+          <p:cNvPr id="13" name="TextBox 12"/>
+          <p:cNvSpPr txBox="1"/>
+          <p:nvPr/>
+        </p:nvSpPr>
+        <p:spPr>
+          <a:xfrm>
+            <a:off x="8412480" y="3732464"/>
+            <a:ext cx="2926080" cy="310896"/>
+          </a:xfrm>
+          <a:prstGeom prst="rect">
+            <a:avLst/>
+          </a:prstGeom>
+          <a:noFill/>
+        </p:spPr>
+        <p:txBody>
+          <a:bodyPr wrap="square" anchor="t" lIns="25400" rIns="25400" tIns="25400" bIns="25400">
+            <a:spAutoFit/>
+          </a:bodyPr>
+          <a:lstStyle/>
+          <a:p>
+            <a:pPr algn="ctr">
+              <a:lnSpc>
+                <a:spcPct val="100000"/>
+              </a:lnSpc>
+              <a:spcAft>
+                <a:spcPts val="400"/>
+              </a:spcAft>
+            </a:pPr>
+            <a:r>
+              <a:rPr sz="1100" b="0" i="1">
+                <a:solidFill>
+                  <a:srgbClr val="90A4AE"/>
+                </a:solidFill>
+                <a:latin typeface="Calibri"/>
+              </a:rPr>
+              <a:t>Menuiseries bois posees en 2019</a:t>
+            </a:r>
+          </a:p>
+        </p:txBody>
+      </p:sp>
+      <p:sp>
+        <p:nvSpPr>
+          <p:cNvPr id="14" name="Rounded Rectangle 13"/>
+          <p:cNvSpPr/>
+          <p:nvPr/>
+        </p:nvSpPr>
+        <p:spPr>
+          <a:xfrm>
+            <a:off x="8412480" y="4343400"/>
+            <a:ext cx="2926080" cy="1417320"/>
+          </a:xfrm>
+          <a:prstGeom prst="roundRect">
+            <a:avLst/>
+          </a:prstGeom>
+          <a:solidFill>
+            <a:srgbClr val="E8F5E9"/>
+          </a:solidFill>
+          <a:ln>
+            <a:noFill/>
+          </a:ln>
+          <a:effectLst/>
+        </p:spPr>
+        <p:style>
+          <a:lnRef idx="1">
+            <a:schemeClr val="accent1"/>
+          </a:lnRef>
+          <a:fillRef idx="3">
+            <a:schemeClr val="accent1"/>
+          </a:fillRef>
+          <a:effectRef idx="2">
+            <a:schemeClr val="accent1"/>
+          </a:effectRef>
+          <a:fontRef idx="minor">
+            <a:schemeClr val="lt1"/>
+          </a:fontRef>
+        </p:style>
+        <p:txBody>
+          <a:bodyPr rtlCol="0" anchor="ctr"/>
+          <a:lstStyle/>
+          <a:p>
+            <a:pPr algn="ctr"/>
+          </a:p>
+        </p:txBody>
+      </p:sp>
+      <p:sp>
+        <p:nvSpPr>
+          <p:cNvPr id="15" name="TextBox 14"/>
+          <p:cNvSpPr txBox="1"/>
+          <p:nvPr/>
+        </p:nvSpPr>
+        <p:spPr>
+          <a:xfrm>
+            <a:off x="8595360" y="4434840"/>
+            <a:ext cx="2606040" cy="1280160"/>
+          </a:xfrm>
+          <a:prstGeom prst="rect">
+            <a:avLst/>
+          </a:prstGeom>
+          <a:noFill/>
+        </p:spPr>
+        <p:txBody>
+          <a:bodyPr wrap="square" anchor="t" lIns="25400" rIns="25400" tIns="25400" bIns="25400">
+            <a:spAutoFit/>
+          </a:bodyPr>
+          <a:lstStyle/>
+          <a:p>
+            <a:pPr algn="l">
+              <a:lnSpc>
+                <a:spcPct val="115000"/>
+              </a:lnSpc>
+              <a:spcAft>
+                <a:spcPts val="400"/>
+              </a:spcAft>
+            </a:pPr>
+            <a:r>
+              <a:rPr sz="1300" b="1" i="0">
+                <a:solidFill>
+                  <a:srgbClr val="1B5E20"/>
+                </a:solidFill>
+                <a:latin typeface="Calibri"/>
+              </a:rPr>
+              <a:t>A retenir</a:t>
+            </a:r>
+          </a:p>
+          <a:p>
+            <a:pPr algn="l">
+              <a:lnSpc>
+                <a:spcPct val="115000"/>
+              </a:lnSpc>
+              <a:spcAft>
+                <a:spcPts val="400"/>
+              </a:spcAft>
+            </a:pPr>
+            <a:r>
+              <a:rPr sz="1200" b="0" i="0">
+                <a:solidFill>
+                  <a:srgbClr val="37474F"/>
+                </a:solidFill>
+                <a:latin typeface="Calibri"/>
+              </a:rPr>
+              <a:t>Fenetres deja renovees -&gt;</a:t>
+            </a:r>
+          </a:p>
+          <a:p>
+            <a:pPr algn="l">
+              <a:lnSpc>
+                <a:spcPct val="115000"/>
+              </a:lnSpc>
+              <a:spcAft>
+                <a:spcPts val="400"/>
+              </a:spcAft>
+            </a:pPr>
+            <a:r>
+              <a:rPr sz="1300" b="1" i="0">
+                <a:solidFill>
+                  <a:srgbClr val="1B5E20"/>
+                </a:solidFill>
+                <a:latin typeface="Calibri"/>
+              </a:rPr>
+              <a:t>priorite : murs + toiture</a:t>
+            </a:r>
+          </a:p>
+        </p:txBody>
+      </p:sp>
+    </p:spTree>
+  </p:cSld>
+  <p:clrMapOvr>
+    <a:masterClrMapping/>
+  </p:clrMapOvr>
+</p:sld>
+</file>
+
+<file path=ppt/slides/slide11.xml><?xml version="1.0" encoding="utf-8"?>
 <p:sld xmlns:a="http://schemas.openxmlformats.org/drawingml/2006/main" xmlns:p="http://schemas.openxmlformats.org/presentationml/2006/main" xmlns:r="http://schemas.openxmlformats.org/officeDocument/2006/relationships">
   <p:cSld>
     <p:spTree>
@@ -7274,7 +8623,7 @@
 </p:sld>
 </file>
 
-<file path=ppt/slides/slide11.xml><?xml version="1.0" encoding="utf-8"?>
+<file path=ppt/slides/slide12.xml><?xml version="1.0" encoding="utf-8"?>
 <p:sld xmlns:a="http://schemas.openxmlformats.org/drawingml/2006/main" xmlns:p="http://schemas.openxmlformats.org/presentationml/2006/main" xmlns:r="http://schemas.openxmlformats.org/officeDocument/2006/relationships">
   <p:cSld>
     <p:spTree>
@@ -8434,7 +9783,7 @@
 </p:sld>
 </file>
 
-<file path=ppt/slides/slide12.xml><?xml version="1.0" encoding="utf-8"?>
+<file path=ppt/slides/slide13.xml><?xml version="1.0" encoding="utf-8"?>
 <p:sld xmlns:a="http://schemas.openxmlformats.org/drawingml/2006/main" xmlns:p="http://schemas.openxmlformats.org/presentationml/2006/main" xmlns:r="http://schemas.openxmlformats.org/officeDocument/2006/relationships">
   <p:cSld>
     <p:spTree>
@@ -10693,7 +12042,7 @@
 </p:sld>
 </file>
 
-<file path=ppt/slides/slide13.xml><?xml version="1.0" encoding="utf-8"?>
+<file path=ppt/slides/slide14.xml><?xml version="1.0" encoding="utf-8"?>
 <p:sld xmlns:a="http://schemas.openxmlformats.org/drawingml/2006/main" xmlns:p="http://schemas.openxmlformats.org/presentationml/2006/main" xmlns:r="http://schemas.openxmlformats.org/officeDocument/2006/relationships">
   <p:cSld>
     <p:spTree>
@@ -13261,7 +14610,7 @@
 </p:sld>
 </file>
 
-<file path=ppt/slides/slide14.xml><?xml version="1.0" encoding="utf-8"?>
+<file path=ppt/slides/slide15.xml><?xml version="1.0" encoding="utf-8"?>
 <p:sld xmlns:a="http://schemas.openxmlformats.org/drawingml/2006/main" xmlns:p="http://schemas.openxmlformats.org/presentationml/2006/main" xmlns:r="http://schemas.openxmlformats.org/officeDocument/2006/relationships">
   <p:cSld>
     <p:spTree>
@@ -15744,7 +17093,7 @@
 </p:sld>
 </file>
 
-<file path=ppt/slides/slide15.xml><?xml version="1.0" encoding="utf-8"?>
+<file path=ppt/slides/slide16.xml><?xml version="1.0" encoding="utf-8"?>
 <p:sld xmlns:a="http://schemas.openxmlformats.org/drawingml/2006/main" xmlns:p="http://schemas.openxmlformats.org/presentationml/2006/main" xmlns:r="http://schemas.openxmlformats.org/officeDocument/2006/relationships">
   <p:cSld>
     <p:spTree>
@@ -16754,7 +18103,7 @@
 </p:sld>
 </file>
 
-<file path=ppt/slides/slide16.xml><?xml version="1.0" encoding="utf-8"?>
+<file path=ppt/slides/slide17.xml><?xml version="1.0" encoding="utf-8"?>
 <p:sld xmlns:a="http://schemas.openxmlformats.org/drawingml/2006/main" xmlns:p="http://schemas.openxmlformats.org/presentationml/2006/main" xmlns:r="http://schemas.openxmlformats.org/officeDocument/2006/relationships">
   <p:cSld>
     <p:spTree>
@@ -18698,7 +20047,7 @@
 </p:sld>
 </file>
 
-<file path=ppt/slides/slide17.xml><?xml version="1.0" encoding="utf-8"?>
+<file path=ppt/slides/slide18.xml><?xml version="1.0" encoding="utf-8"?>
 <p:sld xmlns:a="http://schemas.openxmlformats.org/drawingml/2006/main" xmlns:p="http://schemas.openxmlformats.org/presentationml/2006/main" xmlns:r="http://schemas.openxmlformats.org/officeDocument/2006/relationships">
   <p:cSld>
     <p:spTree>
@@ -19944,7 +21293,7 @@
 </p:sld>
 </file>
 
-<file path=ppt/slides/slide18.xml><?xml version="1.0" encoding="utf-8"?>
+<file path=ppt/slides/slide19.xml><?xml version="1.0" encoding="utf-8"?>
 <p:sld xmlns:a="http://schemas.openxmlformats.org/drawingml/2006/main" xmlns:p="http://schemas.openxmlformats.org/presentationml/2006/main" xmlns:r="http://schemas.openxmlformats.org/officeDocument/2006/relationships">
   <p:cSld>
     <p:spTree>
@@ -21194,7 +22543,1473 @@
 </p:sld>
 </file>
 
-<file path=ppt/slides/slide19.xml><?xml version="1.0" encoding="utf-8"?>
+<file path=ppt/slides/slide2.xml><?xml version="1.0" encoding="utf-8"?>
+<p:sld xmlns:a="http://schemas.openxmlformats.org/drawingml/2006/main" xmlns:p="http://schemas.openxmlformats.org/presentationml/2006/main" xmlns:r="http://schemas.openxmlformats.org/officeDocument/2006/relationships">
+  <p:cSld>
+    <p:spTree>
+      <p:nvGrpSpPr>
+        <p:cNvPr id="1" name=""/>
+        <p:cNvGrpSpPr/>
+        <p:nvPr/>
+      </p:nvGrpSpPr>
+      <p:grpSpPr/>
+      <p:sp>
+        <p:nvSpPr>
+          <p:cNvPr id="2" name="Rectangle 1"/>
+          <p:cNvSpPr/>
+          <p:nvPr/>
+        </p:nvSpPr>
+        <p:spPr>
+          <a:xfrm>
+            <a:off x="0" y="0"/>
+            <a:ext cx="12191695" cy="6858000"/>
+          </a:xfrm>
+          <a:prstGeom prst="rect">
+            <a:avLst/>
+          </a:prstGeom>
+          <a:solidFill>
+            <a:srgbClr val="FFFFFF"/>
+          </a:solidFill>
+          <a:ln>
+            <a:noFill/>
+          </a:ln>
+          <a:effectLst/>
+        </p:spPr>
+        <p:style>
+          <a:lnRef idx="1">
+            <a:schemeClr val="accent1"/>
+          </a:lnRef>
+          <a:fillRef idx="3">
+            <a:schemeClr val="accent1"/>
+          </a:fillRef>
+          <a:effectRef idx="2">
+            <a:schemeClr val="accent1"/>
+          </a:effectRef>
+          <a:fontRef idx="minor">
+            <a:schemeClr val="lt1"/>
+          </a:fontRef>
+        </p:style>
+        <p:txBody>
+          <a:bodyPr rtlCol="0" anchor="ctr"/>
+          <a:lstStyle/>
+          <a:p>
+            <a:pPr algn="ctr"/>
+          </a:p>
+        </p:txBody>
+      </p:sp>
+      <p:sp>
+        <p:nvSpPr>
+          <p:cNvPr id="3" name="Rectangle 2"/>
+          <p:cNvSpPr/>
+          <p:nvPr/>
+        </p:nvSpPr>
+        <p:spPr>
+          <a:xfrm>
+            <a:off x="0" y="0"/>
+            <a:ext cx="201168" cy="6858000"/>
+          </a:xfrm>
+          <a:prstGeom prst="rect">
+            <a:avLst/>
+          </a:prstGeom>
+          <a:solidFill>
+            <a:srgbClr val="1B5E20"/>
+          </a:solidFill>
+          <a:ln>
+            <a:noFill/>
+          </a:ln>
+          <a:effectLst/>
+        </p:spPr>
+        <p:style>
+          <a:lnRef idx="1">
+            <a:schemeClr val="accent1"/>
+          </a:lnRef>
+          <a:fillRef idx="3">
+            <a:schemeClr val="accent1"/>
+          </a:fillRef>
+          <a:effectRef idx="2">
+            <a:schemeClr val="accent1"/>
+          </a:effectRef>
+          <a:fontRef idx="minor">
+            <a:schemeClr val="lt1"/>
+          </a:fontRef>
+        </p:style>
+        <p:txBody>
+          <a:bodyPr rtlCol="0" anchor="ctr"/>
+          <a:lstStyle/>
+          <a:p>
+            <a:pPr algn="ctr"/>
+          </a:p>
+        </p:txBody>
+      </p:sp>
+      <p:sp>
+        <p:nvSpPr>
+          <p:cNvPr id="4" name="TextBox 3"/>
+          <p:cNvSpPr txBox="1"/>
+          <p:nvPr/>
+        </p:nvSpPr>
+        <p:spPr>
+          <a:xfrm>
+            <a:off x="548640" y="310896"/>
+            <a:ext cx="10332720" cy="566928"/>
+          </a:xfrm>
+          <a:prstGeom prst="rect">
+            <a:avLst/>
+          </a:prstGeom>
+          <a:noFill/>
+        </p:spPr>
+        <p:txBody>
+          <a:bodyPr wrap="square" anchor="ctr" lIns="25400" rIns="25400" tIns="25400" bIns="25400">
+            <a:spAutoFit/>
+          </a:bodyPr>
+          <a:lstStyle/>
+          <a:p>
+            <a:pPr algn="l">
+              <a:lnSpc>
+                <a:spcPct val="100000"/>
+              </a:lnSpc>
+              <a:spcAft>
+                <a:spcPts val="400"/>
+              </a:spcAft>
+            </a:pPr>
+            <a:r>
+              <a:rPr sz="2800" b="1" i="0">
+                <a:solidFill>
+                  <a:srgbClr val="1B5E20"/>
+                </a:solidFill>
+                <a:latin typeface="Calibri"/>
+              </a:rPr>
+              <a:t>Sommaire</a:t>
+            </a:r>
+          </a:p>
+        </p:txBody>
+      </p:sp>
+      <p:sp>
+        <p:nvSpPr>
+          <p:cNvPr id="5" name="Rectangle 4"/>
+          <p:cNvSpPr/>
+          <p:nvPr/>
+        </p:nvSpPr>
+        <p:spPr>
+          <a:xfrm>
+            <a:off x="548640" y="1225296"/>
+            <a:ext cx="10058400" cy="27940"/>
+          </a:xfrm>
+          <a:prstGeom prst="rect">
+            <a:avLst/>
+          </a:prstGeom>
+          <a:solidFill>
+            <a:srgbClr val="2E7D32"/>
+          </a:solidFill>
+          <a:ln>
+            <a:noFill/>
+          </a:ln>
+          <a:effectLst/>
+        </p:spPr>
+        <p:style>
+          <a:lnRef idx="1">
+            <a:schemeClr val="accent1"/>
+          </a:lnRef>
+          <a:fillRef idx="3">
+            <a:schemeClr val="accent1"/>
+          </a:fillRef>
+          <a:effectRef idx="2">
+            <a:schemeClr val="accent1"/>
+          </a:effectRef>
+          <a:fontRef idx="minor">
+            <a:schemeClr val="lt1"/>
+          </a:fontRef>
+        </p:style>
+        <p:txBody>
+          <a:bodyPr rtlCol="0" anchor="ctr"/>
+          <a:lstStyle/>
+          <a:p>
+            <a:pPr algn="ctr"/>
+          </a:p>
+        </p:txBody>
+      </p:sp>
+      <p:sp>
+        <p:nvSpPr>
+          <p:cNvPr id="6" name="TextBox 5"/>
+          <p:cNvSpPr txBox="1"/>
+          <p:nvPr/>
+        </p:nvSpPr>
+        <p:spPr>
+          <a:xfrm>
+            <a:off x="502920" y="6473952"/>
+            <a:ext cx="8229600" cy="292608"/>
+          </a:xfrm>
+          <a:prstGeom prst="rect">
+            <a:avLst/>
+          </a:prstGeom>
+          <a:noFill/>
+        </p:spPr>
+        <p:txBody>
+          <a:bodyPr wrap="square" anchor="t" lIns="25400" rIns="25400" tIns="25400" bIns="25400">
+            <a:spAutoFit/>
+          </a:bodyPr>
+          <a:lstStyle/>
+          <a:p>
+            <a:pPr algn="l">
+              <a:lnSpc>
+                <a:spcPct val="100000"/>
+              </a:lnSpc>
+              <a:spcAft>
+                <a:spcPts val="400"/>
+              </a:spcAft>
+            </a:pPr>
+            <a:r>
+              <a:rPr sz="900" b="0" i="0">
+                <a:solidFill>
+                  <a:srgbClr val="90A4AE"/>
+                </a:solidFill>
+                <a:latin typeface="Calibri"/>
+              </a:rPr>
+              <a:t>Renovation energetique - Saint-Jean-de-Chevelu (73) - Bloc 1</a:t>
+            </a:r>
+          </a:p>
+        </p:txBody>
+      </p:sp>
+      <p:sp>
+        <p:nvSpPr>
+          <p:cNvPr id="7" name="TextBox 6"/>
+          <p:cNvSpPr txBox="1"/>
+          <p:nvPr/>
+        </p:nvSpPr>
+        <p:spPr>
+          <a:xfrm>
+            <a:off x="9418320" y="6473952"/>
+            <a:ext cx="2286000" cy="292608"/>
+          </a:xfrm>
+          <a:prstGeom prst="rect">
+            <a:avLst/>
+          </a:prstGeom>
+          <a:noFill/>
+        </p:spPr>
+        <p:txBody>
+          <a:bodyPr wrap="square" anchor="t" lIns="25400" rIns="25400" tIns="25400" bIns="25400">
+            <a:spAutoFit/>
+          </a:bodyPr>
+          <a:lstStyle/>
+          <a:p>
+            <a:pPr algn="r">
+              <a:lnSpc>
+                <a:spcPct val="100000"/>
+              </a:lnSpc>
+              <a:spcAft>
+                <a:spcPts val="400"/>
+              </a:spcAft>
+            </a:pPr>
+            <a:r>
+              <a:rPr sz="900" b="0" i="0">
+                <a:solidFill>
+                  <a:srgbClr val="90A4AE"/>
+                </a:solidFill>
+                <a:latin typeface="Calibri"/>
+              </a:rPr>
+              <a:t>Guillaume Tardy</a:t>
+            </a:r>
+          </a:p>
+        </p:txBody>
+      </p:sp>
+      <p:sp>
+        <p:nvSpPr>
+          <p:cNvPr id="8" name="Oval 7"/>
+          <p:cNvSpPr/>
+          <p:nvPr/>
+        </p:nvSpPr>
+        <p:spPr>
+          <a:xfrm>
+            <a:off x="822960" y="1554480"/>
+            <a:ext cx="475488" cy="475488"/>
+          </a:xfrm>
+          <a:prstGeom prst="ellipse">
+            <a:avLst/>
+          </a:prstGeom>
+          <a:solidFill>
+            <a:srgbClr val="1B5E20"/>
+          </a:solidFill>
+          <a:ln>
+            <a:noFill/>
+          </a:ln>
+          <a:effectLst/>
+        </p:spPr>
+        <p:style>
+          <a:lnRef idx="1">
+            <a:schemeClr val="accent1"/>
+          </a:lnRef>
+          <a:fillRef idx="3">
+            <a:schemeClr val="accent1"/>
+          </a:fillRef>
+          <a:effectRef idx="2">
+            <a:schemeClr val="accent1"/>
+          </a:effectRef>
+          <a:fontRef idx="minor">
+            <a:schemeClr val="lt1"/>
+          </a:fontRef>
+        </p:style>
+        <p:txBody>
+          <a:bodyPr rtlCol="0" anchor="ctr"/>
+          <a:lstStyle/>
+          <a:p>
+            <a:pPr algn="ctr"/>
+          </a:p>
+        </p:txBody>
+      </p:sp>
+      <p:sp>
+        <p:nvSpPr>
+          <p:cNvPr id="9" name="TextBox 8"/>
+          <p:cNvSpPr txBox="1"/>
+          <p:nvPr/>
+        </p:nvSpPr>
+        <p:spPr>
+          <a:xfrm>
+            <a:off x="822960" y="1554480"/>
+            <a:ext cx="475488" cy="475488"/>
+          </a:xfrm>
+          <a:prstGeom prst="rect">
+            <a:avLst/>
+          </a:prstGeom>
+          <a:noFill/>
+        </p:spPr>
+        <p:txBody>
+          <a:bodyPr wrap="square" anchor="ctr" lIns="25400" rIns="25400" tIns="25400" bIns="25400">
+            <a:spAutoFit/>
+          </a:bodyPr>
+          <a:lstStyle/>
+          <a:p>
+            <a:pPr algn="ctr">
+              <a:lnSpc>
+                <a:spcPct val="100000"/>
+              </a:lnSpc>
+              <a:spcAft>
+                <a:spcPts val="400"/>
+              </a:spcAft>
+            </a:pPr>
+            <a:r>
+              <a:rPr sz="1700" b="1" i="0">
+                <a:solidFill>
+                  <a:srgbClr val="FFFFFF"/>
+                </a:solidFill>
+                <a:latin typeface="Calibri"/>
+              </a:rPr>
+              <a:t>1</a:t>
+            </a:r>
+          </a:p>
+        </p:txBody>
+      </p:sp>
+      <p:sp>
+        <p:nvSpPr>
+          <p:cNvPr id="10" name="TextBox 9"/>
+          <p:cNvSpPr txBox="1"/>
+          <p:nvPr/>
+        </p:nvSpPr>
+        <p:spPr>
+          <a:xfrm>
+            <a:off x="1508760" y="1527048"/>
+            <a:ext cx="7315200" cy="365760"/>
+          </a:xfrm>
+          <a:prstGeom prst="rect">
+            <a:avLst/>
+          </a:prstGeom>
+          <a:noFill/>
+        </p:spPr>
+        <p:txBody>
+          <a:bodyPr wrap="square" anchor="ctr" lIns="25400" rIns="25400" tIns="25400" bIns="25400">
+            <a:spAutoFit/>
+          </a:bodyPr>
+          <a:lstStyle/>
+          <a:p>
+            <a:pPr algn="l">
+              <a:lnSpc>
+                <a:spcPct val="100000"/>
+              </a:lnSpc>
+              <a:spcAft>
+                <a:spcPts val="400"/>
+              </a:spcAft>
+            </a:pPr>
+            <a:r>
+              <a:rPr sz="1700" b="1" i="0">
+                <a:solidFill>
+                  <a:srgbClr val="37474F"/>
+                </a:solidFill>
+                <a:latin typeface="Calibri"/>
+              </a:rPr>
+              <a:t>Situation, foyer &amp; objectifs</a:t>
+            </a:r>
+          </a:p>
+        </p:txBody>
+      </p:sp>
+      <p:sp>
+        <p:nvSpPr>
+          <p:cNvPr id="11" name="TextBox 10"/>
+          <p:cNvSpPr txBox="1"/>
+          <p:nvPr/>
+        </p:nvSpPr>
+        <p:spPr>
+          <a:xfrm>
+            <a:off x="1508760" y="1828800"/>
+            <a:ext cx="9601200" cy="274320"/>
+          </a:xfrm>
+          <a:prstGeom prst="rect">
+            <a:avLst/>
+          </a:prstGeom>
+          <a:noFill/>
+        </p:spPr>
+        <p:txBody>
+          <a:bodyPr wrap="square" anchor="t" lIns="25400" rIns="25400" tIns="25400" bIns="25400">
+            <a:spAutoFit/>
+          </a:bodyPr>
+          <a:lstStyle/>
+          <a:p>
+            <a:pPr algn="l">
+              <a:lnSpc>
+                <a:spcPct val="100000"/>
+              </a:lnSpc>
+              <a:spcAft>
+                <a:spcPts val="400"/>
+              </a:spcAft>
+            </a:pPr>
+            <a:r>
+              <a:rPr sz="1200" b="0" i="1">
+                <a:solidFill>
+                  <a:srgbClr val="90A4AE"/>
+                </a:solidFill>
+                <a:latin typeface="Calibri"/>
+              </a:rPr>
+              <a:t>Contexte, moyens du MOA, confort vise</a:t>
+            </a:r>
+          </a:p>
+        </p:txBody>
+      </p:sp>
+      <p:sp>
+        <p:nvSpPr>
+          <p:cNvPr id="12" name="Oval 11"/>
+          <p:cNvSpPr/>
+          <p:nvPr/>
+        </p:nvSpPr>
+        <p:spPr>
+          <a:xfrm>
+            <a:off x="822960" y="2194560"/>
+            <a:ext cx="475488" cy="475488"/>
+          </a:xfrm>
+          <a:prstGeom prst="ellipse">
+            <a:avLst/>
+          </a:prstGeom>
+          <a:solidFill>
+            <a:srgbClr val="1B5E20"/>
+          </a:solidFill>
+          <a:ln>
+            <a:noFill/>
+          </a:ln>
+          <a:effectLst/>
+        </p:spPr>
+        <p:style>
+          <a:lnRef idx="1">
+            <a:schemeClr val="accent1"/>
+          </a:lnRef>
+          <a:fillRef idx="3">
+            <a:schemeClr val="accent1"/>
+          </a:fillRef>
+          <a:effectRef idx="2">
+            <a:schemeClr val="accent1"/>
+          </a:effectRef>
+          <a:fontRef idx="minor">
+            <a:schemeClr val="lt1"/>
+          </a:fontRef>
+        </p:style>
+        <p:txBody>
+          <a:bodyPr rtlCol="0" anchor="ctr"/>
+          <a:lstStyle/>
+          <a:p>
+            <a:pPr algn="ctr"/>
+          </a:p>
+        </p:txBody>
+      </p:sp>
+      <p:sp>
+        <p:nvSpPr>
+          <p:cNvPr id="13" name="TextBox 12"/>
+          <p:cNvSpPr txBox="1"/>
+          <p:nvPr/>
+        </p:nvSpPr>
+        <p:spPr>
+          <a:xfrm>
+            <a:off x="822960" y="2194560"/>
+            <a:ext cx="475488" cy="475488"/>
+          </a:xfrm>
+          <a:prstGeom prst="rect">
+            <a:avLst/>
+          </a:prstGeom>
+          <a:noFill/>
+        </p:spPr>
+        <p:txBody>
+          <a:bodyPr wrap="square" anchor="ctr" lIns="25400" rIns="25400" tIns="25400" bIns="25400">
+            <a:spAutoFit/>
+          </a:bodyPr>
+          <a:lstStyle/>
+          <a:p>
+            <a:pPr algn="ctr">
+              <a:lnSpc>
+                <a:spcPct val="100000"/>
+              </a:lnSpc>
+              <a:spcAft>
+                <a:spcPts val="400"/>
+              </a:spcAft>
+            </a:pPr>
+            <a:r>
+              <a:rPr sz="1700" b="1" i="0">
+                <a:solidFill>
+                  <a:srgbClr val="FFFFFF"/>
+                </a:solidFill>
+                <a:latin typeface="Calibri"/>
+              </a:rPr>
+              <a:t>2</a:t>
+            </a:r>
+          </a:p>
+        </p:txBody>
+      </p:sp>
+      <p:sp>
+        <p:nvSpPr>
+          <p:cNvPr id="14" name="TextBox 13"/>
+          <p:cNvSpPr txBox="1"/>
+          <p:nvPr/>
+        </p:nvSpPr>
+        <p:spPr>
+          <a:xfrm>
+            <a:off x="1508760" y="2167128"/>
+            <a:ext cx="7315200" cy="365760"/>
+          </a:xfrm>
+          <a:prstGeom prst="rect">
+            <a:avLst/>
+          </a:prstGeom>
+          <a:noFill/>
+        </p:spPr>
+        <p:txBody>
+          <a:bodyPr wrap="square" anchor="ctr" lIns="25400" rIns="25400" tIns="25400" bIns="25400">
+            <a:spAutoFit/>
+          </a:bodyPr>
+          <a:lstStyle/>
+          <a:p>
+            <a:pPr algn="l">
+              <a:lnSpc>
+                <a:spcPct val="100000"/>
+              </a:lnSpc>
+              <a:spcAft>
+                <a:spcPts val="400"/>
+              </a:spcAft>
+            </a:pPr>
+            <a:r>
+              <a:rPr sz="1700" b="1" i="0">
+                <a:solidFill>
+                  <a:srgbClr val="37474F"/>
+                </a:solidFill>
+                <a:latin typeface="Calibri"/>
+              </a:rPr>
+              <a:t>Diagnostic technique de l'existant</a:t>
+            </a:r>
+          </a:p>
+        </p:txBody>
+      </p:sp>
+      <p:sp>
+        <p:nvSpPr>
+          <p:cNvPr id="15" name="TextBox 14"/>
+          <p:cNvSpPr txBox="1"/>
+          <p:nvPr/>
+        </p:nvSpPr>
+        <p:spPr>
+          <a:xfrm>
+            <a:off x="1508760" y="2468880"/>
+            <a:ext cx="9601200" cy="274320"/>
+          </a:xfrm>
+          <a:prstGeom prst="rect">
+            <a:avLst/>
+          </a:prstGeom>
+          <a:noFill/>
+        </p:spPr>
+        <p:txBody>
+          <a:bodyPr wrap="square" anchor="t" lIns="25400" rIns="25400" tIns="25400" bIns="25400">
+            <a:spAutoFit/>
+          </a:bodyPr>
+          <a:lstStyle/>
+          <a:p>
+            <a:pPr algn="l">
+              <a:lnSpc>
+                <a:spcPct val="100000"/>
+              </a:lnSpc>
+              <a:spcAft>
+                <a:spcPts val="400"/>
+              </a:spcAft>
+            </a:pPr>
+            <a:r>
+              <a:rPr sz="1200" b="0" i="1">
+                <a:solidFill>
+                  <a:srgbClr val="90A4AE"/>
+                </a:solidFill>
+                <a:latin typeface="Calibri"/>
+              </a:rPr>
+              <a:t>Consommations, enveloppe, systemes, eclairage</a:t>
+            </a:r>
+          </a:p>
+        </p:txBody>
+      </p:sp>
+      <p:sp>
+        <p:nvSpPr>
+          <p:cNvPr id="16" name="Oval 15"/>
+          <p:cNvSpPr/>
+          <p:nvPr/>
+        </p:nvSpPr>
+        <p:spPr>
+          <a:xfrm>
+            <a:off x="822960" y="2834640"/>
+            <a:ext cx="475488" cy="475488"/>
+          </a:xfrm>
+          <a:prstGeom prst="ellipse">
+            <a:avLst/>
+          </a:prstGeom>
+          <a:solidFill>
+            <a:srgbClr val="1B5E20"/>
+          </a:solidFill>
+          <a:ln>
+            <a:noFill/>
+          </a:ln>
+          <a:effectLst/>
+        </p:spPr>
+        <p:style>
+          <a:lnRef idx="1">
+            <a:schemeClr val="accent1"/>
+          </a:lnRef>
+          <a:fillRef idx="3">
+            <a:schemeClr val="accent1"/>
+          </a:fillRef>
+          <a:effectRef idx="2">
+            <a:schemeClr val="accent1"/>
+          </a:effectRef>
+          <a:fontRef idx="minor">
+            <a:schemeClr val="lt1"/>
+          </a:fontRef>
+        </p:style>
+        <p:txBody>
+          <a:bodyPr rtlCol="0" anchor="ctr"/>
+          <a:lstStyle/>
+          <a:p>
+            <a:pPr algn="ctr"/>
+          </a:p>
+        </p:txBody>
+      </p:sp>
+      <p:sp>
+        <p:nvSpPr>
+          <p:cNvPr id="17" name="TextBox 16"/>
+          <p:cNvSpPr txBox="1"/>
+          <p:nvPr/>
+        </p:nvSpPr>
+        <p:spPr>
+          <a:xfrm>
+            <a:off x="822960" y="2834640"/>
+            <a:ext cx="475488" cy="475488"/>
+          </a:xfrm>
+          <a:prstGeom prst="rect">
+            <a:avLst/>
+          </a:prstGeom>
+          <a:noFill/>
+        </p:spPr>
+        <p:txBody>
+          <a:bodyPr wrap="square" anchor="ctr" lIns="25400" rIns="25400" tIns="25400" bIns="25400">
+            <a:spAutoFit/>
+          </a:bodyPr>
+          <a:lstStyle/>
+          <a:p>
+            <a:pPr algn="ctr">
+              <a:lnSpc>
+                <a:spcPct val="100000"/>
+              </a:lnSpc>
+              <a:spcAft>
+                <a:spcPts val="400"/>
+              </a:spcAft>
+            </a:pPr>
+            <a:r>
+              <a:rPr sz="1700" b="1" i="0">
+                <a:solidFill>
+                  <a:srgbClr val="FFFFFF"/>
+                </a:solidFill>
+                <a:latin typeface="Calibri"/>
+              </a:rPr>
+              <a:t>3</a:t>
+            </a:r>
+          </a:p>
+        </p:txBody>
+      </p:sp>
+      <p:sp>
+        <p:nvSpPr>
+          <p:cNvPr id="18" name="TextBox 17"/>
+          <p:cNvSpPr txBox="1"/>
+          <p:nvPr/>
+        </p:nvSpPr>
+        <p:spPr>
+          <a:xfrm>
+            <a:off x="1508760" y="2807208"/>
+            <a:ext cx="7315200" cy="365760"/>
+          </a:xfrm>
+          <a:prstGeom prst="rect">
+            <a:avLst/>
+          </a:prstGeom>
+          <a:noFill/>
+        </p:spPr>
+        <p:txBody>
+          <a:bodyPr wrap="square" anchor="ctr" lIns="25400" rIns="25400" tIns="25400" bIns="25400">
+            <a:spAutoFit/>
+          </a:bodyPr>
+          <a:lstStyle/>
+          <a:p>
+            <a:pPr algn="l">
+              <a:lnSpc>
+                <a:spcPct val="100000"/>
+              </a:lnSpc>
+              <a:spcAft>
+                <a:spcPts val="400"/>
+              </a:spcAft>
+            </a:pPr>
+            <a:r>
+              <a:rPr sz="1700" b="1" i="0">
+                <a:solidFill>
+                  <a:srgbClr val="37474F"/>
+                </a:solidFill>
+                <a:latin typeface="Calibri"/>
+              </a:rPr>
+              <a:t>Deperditions &amp; DPE de l'existant</a:t>
+            </a:r>
+          </a:p>
+        </p:txBody>
+      </p:sp>
+      <p:sp>
+        <p:nvSpPr>
+          <p:cNvPr id="19" name="TextBox 18"/>
+          <p:cNvSpPr txBox="1"/>
+          <p:nvPr/>
+        </p:nvSpPr>
+        <p:spPr>
+          <a:xfrm>
+            <a:off x="1508760" y="3108960"/>
+            <a:ext cx="9601200" cy="274320"/>
+          </a:xfrm>
+          <a:prstGeom prst="rect">
+            <a:avLst/>
+          </a:prstGeom>
+          <a:noFill/>
+        </p:spPr>
+        <p:txBody>
+          <a:bodyPr wrap="square" anchor="t" lIns="25400" rIns="25400" tIns="25400" bIns="25400">
+            <a:spAutoFit/>
+          </a:bodyPr>
+          <a:lstStyle/>
+          <a:p>
+            <a:pPr algn="l">
+              <a:lnSpc>
+                <a:spcPct val="100000"/>
+              </a:lnSpc>
+              <a:spcAft>
+                <a:spcPts val="400"/>
+              </a:spcAft>
+            </a:pPr>
+            <a:r>
+              <a:rPr sz="1200" b="0" i="1">
+                <a:solidFill>
+                  <a:srgbClr val="90A4AE"/>
+                </a:solidFill>
+                <a:latin typeface="Calibri"/>
+              </a:rPr>
+              <a:t>Calcul thermique, etiquette G</a:t>
+            </a:r>
+          </a:p>
+        </p:txBody>
+      </p:sp>
+      <p:sp>
+        <p:nvSpPr>
+          <p:cNvPr id="20" name="Oval 19"/>
+          <p:cNvSpPr/>
+          <p:nvPr/>
+        </p:nvSpPr>
+        <p:spPr>
+          <a:xfrm>
+            <a:off x="822960" y="3474720"/>
+            <a:ext cx="475488" cy="475488"/>
+          </a:xfrm>
+          <a:prstGeom prst="ellipse">
+            <a:avLst/>
+          </a:prstGeom>
+          <a:solidFill>
+            <a:srgbClr val="1B5E20"/>
+          </a:solidFill>
+          <a:ln>
+            <a:noFill/>
+          </a:ln>
+          <a:effectLst/>
+        </p:spPr>
+        <p:style>
+          <a:lnRef idx="1">
+            <a:schemeClr val="accent1"/>
+          </a:lnRef>
+          <a:fillRef idx="3">
+            <a:schemeClr val="accent1"/>
+          </a:fillRef>
+          <a:effectRef idx="2">
+            <a:schemeClr val="accent1"/>
+          </a:effectRef>
+          <a:fontRef idx="minor">
+            <a:schemeClr val="lt1"/>
+          </a:fontRef>
+        </p:style>
+        <p:txBody>
+          <a:bodyPr rtlCol="0" anchor="ctr"/>
+          <a:lstStyle/>
+          <a:p>
+            <a:pPr algn="ctr"/>
+          </a:p>
+        </p:txBody>
+      </p:sp>
+      <p:sp>
+        <p:nvSpPr>
+          <p:cNvPr id="21" name="TextBox 20"/>
+          <p:cNvSpPr txBox="1"/>
+          <p:nvPr/>
+        </p:nvSpPr>
+        <p:spPr>
+          <a:xfrm>
+            <a:off x="822960" y="3474720"/>
+            <a:ext cx="475488" cy="475488"/>
+          </a:xfrm>
+          <a:prstGeom prst="rect">
+            <a:avLst/>
+          </a:prstGeom>
+          <a:noFill/>
+        </p:spPr>
+        <p:txBody>
+          <a:bodyPr wrap="square" anchor="ctr" lIns="25400" rIns="25400" tIns="25400" bIns="25400">
+            <a:spAutoFit/>
+          </a:bodyPr>
+          <a:lstStyle/>
+          <a:p>
+            <a:pPr algn="ctr">
+              <a:lnSpc>
+                <a:spcPct val="100000"/>
+              </a:lnSpc>
+              <a:spcAft>
+                <a:spcPts val="400"/>
+              </a:spcAft>
+            </a:pPr>
+            <a:r>
+              <a:rPr sz="1700" b="1" i="0">
+                <a:solidFill>
+                  <a:srgbClr val="FFFFFF"/>
+                </a:solidFill>
+                <a:latin typeface="Calibri"/>
+              </a:rPr>
+              <a:t>4</a:t>
+            </a:r>
+          </a:p>
+        </p:txBody>
+      </p:sp>
+      <p:sp>
+        <p:nvSpPr>
+          <p:cNvPr id="22" name="TextBox 21"/>
+          <p:cNvSpPr txBox="1"/>
+          <p:nvPr/>
+        </p:nvSpPr>
+        <p:spPr>
+          <a:xfrm>
+            <a:off x="1508760" y="3447288"/>
+            <a:ext cx="7315200" cy="365760"/>
+          </a:xfrm>
+          <a:prstGeom prst="rect">
+            <a:avLst/>
+          </a:prstGeom>
+          <a:noFill/>
+        </p:spPr>
+        <p:txBody>
+          <a:bodyPr wrap="square" anchor="ctr" lIns="25400" rIns="25400" tIns="25400" bIns="25400">
+            <a:spAutoFit/>
+          </a:bodyPr>
+          <a:lstStyle/>
+          <a:p>
+            <a:pPr algn="l">
+              <a:lnSpc>
+                <a:spcPct val="100000"/>
+              </a:lnSpc>
+              <a:spcAft>
+                <a:spcPts val="400"/>
+              </a:spcAft>
+            </a:pPr>
+            <a:r>
+              <a:rPr sz="1700" b="1" i="0">
+                <a:solidFill>
+                  <a:srgbClr val="37474F"/>
+                </a:solidFill>
+                <a:latin typeface="Calibri"/>
+              </a:rPr>
+              <a:t>Deux scenarios de renovation</a:t>
+            </a:r>
+          </a:p>
+        </p:txBody>
+      </p:sp>
+      <p:sp>
+        <p:nvSpPr>
+          <p:cNvPr id="23" name="TextBox 22"/>
+          <p:cNvSpPr txBox="1"/>
+          <p:nvPr/>
+        </p:nvSpPr>
+        <p:spPr>
+          <a:xfrm>
+            <a:off x="1508760" y="3749040"/>
+            <a:ext cx="9601200" cy="274320"/>
+          </a:xfrm>
+          <a:prstGeom prst="rect">
+            <a:avLst/>
+          </a:prstGeom>
+          <a:noFill/>
+        </p:spPr>
+        <p:txBody>
+          <a:bodyPr wrap="square" anchor="t" lIns="25400" rIns="25400" tIns="25400" bIns="25400">
+            <a:spAutoFit/>
+          </a:bodyPr>
+          <a:lstStyle/>
+          <a:p>
+            <a:pPr algn="l">
+              <a:lnSpc>
+                <a:spcPct val="100000"/>
+              </a:lnSpc>
+              <a:spcAft>
+                <a:spcPts val="400"/>
+              </a:spcAft>
+            </a:pPr>
+            <a:r>
+              <a:rPr sz="1200" b="0" i="1">
+                <a:solidFill>
+                  <a:srgbClr val="90A4AE"/>
+                </a:solidFill>
+                <a:latin typeface="Calibri"/>
+              </a:rPr>
+              <a:t>Par etapes (D) et global (B)</a:t>
+            </a:r>
+          </a:p>
+        </p:txBody>
+      </p:sp>
+      <p:sp>
+        <p:nvSpPr>
+          <p:cNvPr id="24" name="Oval 23"/>
+          <p:cNvSpPr/>
+          <p:nvPr/>
+        </p:nvSpPr>
+        <p:spPr>
+          <a:xfrm>
+            <a:off x="822960" y="4114800"/>
+            <a:ext cx="475488" cy="475488"/>
+          </a:xfrm>
+          <a:prstGeom prst="ellipse">
+            <a:avLst/>
+          </a:prstGeom>
+          <a:solidFill>
+            <a:srgbClr val="1B5E20"/>
+          </a:solidFill>
+          <a:ln>
+            <a:noFill/>
+          </a:ln>
+          <a:effectLst/>
+        </p:spPr>
+        <p:style>
+          <a:lnRef idx="1">
+            <a:schemeClr val="accent1"/>
+          </a:lnRef>
+          <a:fillRef idx="3">
+            <a:schemeClr val="accent1"/>
+          </a:fillRef>
+          <a:effectRef idx="2">
+            <a:schemeClr val="accent1"/>
+          </a:effectRef>
+          <a:fontRef idx="minor">
+            <a:schemeClr val="lt1"/>
+          </a:fontRef>
+        </p:style>
+        <p:txBody>
+          <a:bodyPr rtlCol="0" anchor="ctr"/>
+          <a:lstStyle/>
+          <a:p>
+            <a:pPr algn="ctr"/>
+          </a:p>
+        </p:txBody>
+      </p:sp>
+      <p:sp>
+        <p:nvSpPr>
+          <p:cNvPr id="25" name="TextBox 24"/>
+          <p:cNvSpPr txBox="1"/>
+          <p:nvPr/>
+        </p:nvSpPr>
+        <p:spPr>
+          <a:xfrm>
+            <a:off x="822960" y="4114800"/>
+            <a:ext cx="475488" cy="475488"/>
+          </a:xfrm>
+          <a:prstGeom prst="rect">
+            <a:avLst/>
+          </a:prstGeom>
+          <a:noFill/>
+        </p:spPr>
+        <p:txBody>
+          <a:bodyPr wrap="square" anchor="ctr" lIns="25400" rIns="25400" tIns="25400" bIns="25400">
+            <a:spAutoFit/>
+          </a:bodyPr>
+          <a:lstStyle/>
+          <a:p>
+            <a:pPr algn="ctr">
+              <a:lnSpc>
+                <a:spcPct val="100000"/>
+              </a:lnSpc>
+              <a:spcAft>
+                <a:spcPts val="400"/>
+              </a:spcAft>
+            </a:pPr>
+            <a:r>
+              <a:rPr sz="1700" b="1" i="0">
+                <a:solidFill>
+                  <a:srgbClr val="FFFFFF"/>
+                </a:solidFill>
+                <a:latin typeface="Calibri"/>
+              </a:rPr>
+              <a:t>5</a:t>
+            </a:r>
+          </a:p>
+        </p:txBody>
+      </p:sp>
+      <p:sp>
+        <p:nvSpPr>
+          <p:cNvPr id="26" name="TextBox 25"/>
+          <p:cNvSpPr txBox="1"/>
+          <p:nvPr/>
+        </p:nvSpPr>
+        <p:spPr>
+          <a:xfrm>
+            <a:off x="1508760" y="4087368"/>
+            <a:ext cx="7315200" cy="365760"/>
+          </a:xfrm>
+          <a:prstGeom prst="rect">
+            <a:avLst/>
+          </a:prstGeom>
+          <a:noFill/>
+        </p:spPr>
+        <p:txBody>
+          <a:bodyPr wrap="square" anchor="ctr" lIns="25400" rIns="25400" tIns="25400" bIns="25400">
+            <a:spAutoFit/>
+          </a:bodyPr>
+          <a:lstStyle/>
+          <a:p>
+            <a:pPr algn="l">
+              <a:lnSpc>
+                <a:spcPct val="100000"/>
+              </a:lnSpc>
+              <a:spcAft>
+                <a:spcPts val="400"/>
+              </a:spcAft>
+            </a:pPr>
+            <a:r>
+              <a:rPr sz="1700" b="1" i="0">
+                <a:solidFill>
+                  <a:srgbClr val="37474F"/>
+                </a:solidFill>
+                <a:latin typeface="Calibri"/>
+              </a:rPr>
+              <a:t>DPE des scenarios &amp; dimensionnement</a:t>
+            </a:r>
+          </a:p>
+        </p:txBody>
+      </p:sp>
+      <p:sp>
+        <p:nvSpPr>
+          <p:cNvPr id="27" name="TextBox 26"/>
+          <p:cNvSpPr txBox="1"/>
+          <p:nvPr/>
+        </p:nvSpPr>
+        <p:spPr>
+          <a:xfrm>
+            <a:off x="1508760" y="4389120"/>
+            <a:ext cx="9601200" cy="274320"/>
+          </a:xfrm>
+          <a:prstGeom prst="rect">
+            <a:avLst/>
+          </a:prstGeom>
+          <a:noFill/>
+        </p:spPr>
+        <p:txBody>
+          <a:bodyPr wrap="square" anchor="t" lIns="25400" rIns="25400" tIns="25400" bIns="25400">
+            <a:spAutoFit/>
+          </a:bodyPr>
+          <a:lstStyle/>
+          <a:p>
+            <a:pPr algn="l">
+              <a:lnSpc>
+                <a:spcPct val="100000"/>
+              </a:lnSpc>
+              <a:spcAft>
+                <a:spcPts val="400"/>
+              </a:spcAft>
+            </a:pPr>
+            <a:r>
+              <a:rPr sz="1200" b="0" i="1">
+                <a:solidFill>
+                  <a:srgbClr val="90A4AE"/>
+                </a:solidFill>
+                <a:latin typeface="Calibri"/>
+              </a:rPr>
+              <a:t>Calculs DPE, regulation, ECS, materiaux</a:t>
+            </a:r>
+          </a:p>
+        </p:txBody>
+      </p:sp>
+      <p:sp>
+        <p:nvSpPr>
+          <p:cNvPr id="28" name="Oval 27"/>
+          <p:cNvSpPr/>
+          <p:nvPr/>
+        </p:nvSpPr>
+        <p:spPr>
+          <a:xfrm>
+            <a:off x="822960" y="4754880"/>
+            <a:ext cx="475488" cy="475488"/>
+          </a:xfrm>
+          <a:prstGeom prst="ellipse">
+            <a:avLst/>
+          </a:prstGeom>
+          <a:solidFill>
+            <a:srgbClr val="1B5E20"/>
+          </a:solidFill>
+          <a:ln>
+            <a:noFill/>
+          </a:ln>
+          <a:effectLst/>
+        </p:spPr>
+        <p:style>
+          <a:lnRef idx="1">
+            <a:schemeClr val="accent1"/>
+          </a:lnRef>
+          <a:fillRef idx="3">
+            <a:schemeClr val="accent1"/>
+          </a:fillRef>
+          <a:effectRef idx="2">
+            <a:schemeClr val="accent1"/>
+          </a:effectRef>
+          <a:fontRef idx="minor">
+            <a:schemeClr val="lt1"/>
+          </a:fontRef>
+        </p:style>
+        <p:txBody>
+          <a:bodyPr rtlCol="0" anchor="ctr"/>
+          <a:lstStyle/>
+          <a:p>
+            <a:pPr algn="ctr"/>
+          </a:p>
+        </p:txBody>
+      </p:sp>
+      <p:sp>
+        <p:nvSpPr>
+          <p:cNvPr id="29" name="TextBox 28"/>
+          <p:cNvSpPr txBox="1"/>
+          <p:nvPr/>
+        </p:nvSpPr>
+        <p:spPr>
+          <a:xfrm>
+            <a:off x="822960" y="4754880"/>
+            <a:ext cx="475488" cy="475488"/>
+          </a:xfrm>
+          <a:prstGeom prst="rect">
+            <a:avLst/>
+          </a:prstGeom>
+          <a:noFill/>
+        </p:spPr>
+        <p:txBody>
+          <a:bodyPr wrap="square" anchor="ctr" lIns="25400" rIns="25400" tIns="25400" bIns="25400">
+            <a:spAutoFit/>
+          </a:bodyPr>
+          <a:lstStyle/>
+          <a:p>
+            <a:pPr algn="ctr">
+              <a:lnSpc>
+                <a:spcPct val="100000"/>
+              </a:lnSpc>
+              <a:spcAft>
+                <a:spcPts val="400"/>
+              </a:spcAft>
+            </a:pPr>
+            <a:r>
+              <a:rPr sz="1700" b="1" i="0">
+                <a:solidFill>
+                  <a:srgbClr val="FFFFFF"/>
+                </a:solidFill>
+                <a:latin typeface="Calibri"/>
+              </a:rPr>
+              <a:t>6</a:t>
+            </a:r>
+          </a:p>
+        </p:txBody>
+      </p:sp>
+      <p:sp>
+        <p:nvSpPr>
+          <p:cNvPr id="30" name="TextBox 29"/>
+          <p:cNvSpPr txBox="1"/>
+          <p:nvPr/>
+        </p:nvSpPr>
+        <p:spPr>
+          <a:xfrm>
+            <a:off x="1508760" y="4727448"/>
+            <a:ext cx="7315200" cy="365760"/>
+          </a:xfrm>
+          <a:prstGeom prst="rect">
+            <a:avLst/>
+          </a:prstGeom>
+          <a:noFill/>
+        </p:spPr>
+        <p:txBody>
+          <a:bodyPr wrap="square" anchor="ctr" lIns="25400" rIns="25400" tIns="25400" bIns="25400">
+            <a:spAutoFit/>
+          </a:bodyPr>
+          <a:lstStyle/>
+          <a:p>
+            <a:pPr algn="l">
+              <a:lnSpc>
+                <a:spcPct val="100000"/>
+              </a:lnSpc>
+              <a:spcAft>
+                <a:spcPts val="400"/>
+              </a:spcAft>
+            </a:pPr>
+            <a:r>
+              <a:rPr sz="1700" b="1" i="0">
+                <a:solidFill>
+                  <a:srgbClr val="37474F"/>
+                </a:solidFill>
+                <a:latin typeface="Calibri"/>
+              </a:rPr>
+              <a:t>Analyse economique en cout global</a:t>
+            </a:r>
+          </a:p>
+        </p:txBody>
+      </p:sp>
+      <p:sp>
+        <p:nvSpPr>
+          <p:cNvPr id="31" name="TextBox 30"/>
+          <p:cNvSpPr txBox="1"/>
+          <p:nvPr/>
+        </p:nvSpPr>
+        <p:spPr>
+          <a:xfrm>
+            <a:off x="1508760" y="5029200"/>
+            <a:ext cx="9601200" cy="274320"/>
+          </a:xfrm>
+          <a:prstGeom prst="rect">
+            <a:avLst/>
+          </a:prstGeom>
+          <a:noFill/>
+        </p:spPr>
+        <p:txBody>
+          <a:bodyPr wrap="square" anchor="t" lIns="25400" rIns="25400" tIns="25400" bIns="25400">
+            <a:spAutoFit/>
+          </a:bodyPr>
+          <a:lstStyle/>
+          <a:p>
+            <a:pPr algn="l">
+              <a:lnSpc>
+                <a:spcPct val="100000"/>
+              </a:lnSpc>
+              <a:spcAft>
+                <a:spcPts val="400"/>
+              </a:spcAft>
+            </a:pPr>
+            <a:r>
+              <a:rPr sz="1200" b="0" i="1">
+                <a:solidFill>
+                  <a:srgbClr val="90A4AE"/>
+                </a:solidFill>
+                <a:latin typeface="Calibri"/>
+              </a:rPr>
+              <a:t>Chiffrage, aides, reste a charge, ROI</a:t>
+            </a:r>
+          </a:p>
+        </p:txBody>
+      </p:sp>
+      <p:sp>
+        <p:nvSpPr>
+          <p:cNvPr id="32" name="Oval 31"/>
+          <p:cNvSpPr/>
+          <p:nvPr/>
+        </p:nvSpPr>
+        <p:spPr>
+          <a:xfrm>
+            <a:off x="822960" y="5394960"/>
+            <a:ext cx="475488" cy="475488"/>
+          </a:xfrm>
+          <a:prstGeom prst="ellipse">
+            <a:avLst/>
+          </a:prstGeom>
+          <a:solidFill>
+            <a:srgbClr val="1B5E20"/>
+          </a:solidFill>
+          <a:ln>
+            <a:noFill/>
+          </a:ln>
+          <a:effectLst/>
+        </p:spPr>
+        <p:style>
+          <a:lnRef idx="1">
+            <a:schemeClr val="accent1"/>
+          </a:lnRef>
+          <a:fillRef idx="3">
+            <a:schemeClr val="accent1"/>
+          </a:fillRef>
+          <a:effectRef idx="2">
+            <a:schemeClr val="accent1"/>
+          </a:effectRef>
+          <a:fontRef idx="minor">
+            <a:schemeClr val="lt1"/>
+          </a:fontRef>
+        </p:style>
+        <p:txBody>
+          <a:bodyPr rtlCol="0" anchor="ctr"/>
+          <a:lstStyle/>
+          <a:p>
+            <a:pPr algn="ctr"/>
+          </a:p>
+        </p:txBody>
+      </p:sp>
+      <p:sp>
+        <p:nvSpPr>
+          <p:cNvPr id="33" name="TextBox 32"/>
+          <p:cNvSpPr txBox="1"/>
+          <p:nvPr/>
+        </p:nvSpPr>
+        <p:spPr>
+          <a:xfrm>
+            <a:off x="822960" y="5394960"/>
+            <a:ext cx="475488" cy="475488"/>
+          </a:xfrm>
+          <a:prstGeom prst="rect">
+            <a:avLst/>
+          </a:prstGeom>
+          <a:noFill/>
+        </p:spPr>
+        <p:txBody>
+          <a:bodyPr wrap="square" anchor="ctr" lIns="25400" rIns="25400" tIns="25400" bIns="25400">
+            <a:spAutoFit/>
+          </a:bodyPr>
+          <a:lstStyle/>
+          <a:p>
+            <a:pPr algn="ctr">
+              <a:lnSpc>
+                <a:spcPct val="100000"/>
+              </a:lnSpc>
+              <a:spcAft>
+                <a:spcPts val="400"/>
+              </a:spcAft>
+            </a:pPr>
+            <a:r>
+              <a:rPr sz="1700" b="1" i="0">
+                <a:solidFill>
+                  <a:srgbClr val="FFFFFF"/>
+                </a:solidFill>
+                <a:latin typeface="Calibri"/>
+              </a:rPr>
+              <a:t>7</a:t>
+            </a:r>
+          </a:p>
+        </p:txBody>
+      </p:sp>
+      <p:sp>
+        <p:nvSpPr>
+          <p:cNvPr id="34" name="TextBox 33"/>
+          <p:cNvSpPr txBox="1"/>
+          <p:nvPr/>
+        </p:nvSpPr>
+        <p:spPr>
+          <a:xfrm>
+            <a:off x="1508760" y="5367528"/>
+            <a:ext cx="7315200" cy="365760"/>
+          </a:xfrm>
+          <a:prstGeom prst="rect">
+            <a:avLst/>
+          </a:prstGeom>
+          <a:noFill/>
+        </p:spPr>
+        <p:txBody>
+          <a:bodyPr wrap="square" anchor="ctr" lIns="25400" rIns="25400" tIns="25400" bIns="25400">
+            <a:spAutoFit/>
+          </a:bodyPr>
+          <a:lstStyle/>
+          <a:p>
+            <a:pPr algn="l">
+              <a:lnSpc>
+                <a:spcPct val="100000"/>
+              </a:lnSpc>
+              <a:spcAft>
+                <a:spcPts val="400"/>
+              </a:spcAft>
+            </a:pPr>
+            <a:r>
+              <a:rPr sz="1700" b="1" i="0">
+                <a:solidFill>
+                  <a:srgbClr val="37474F"/>
+                </a:solidFill>
+                <a:latin typeface="Calibri"/>
+              </a:rPr>
+              <a:t>Sobriete &amp; conclusion</a:t>
+            </a:r>
+          </a:p>
+        </p:txBody>
+      </p:sp>
+      <p:sp>
+        <p:nvSpPr>
+          <p:cNvPr id="35" name="TextBox 34"/>
+          <p:cNvSpPr txBox="1"/>
+          <p:nvPr/>
+        </p:nvSpPr>
+        <p:spPr>
+          <a:xfrm>
+            <a:off x="1508760" y="5669280"/>
+            <a:ext cx="9601200" cy="274320"/>
+          </a:xfrm>
+          <a:prstGeom prst="rect">
+            <a:avLst/>
+          </a:prstGeom>
+          <a:noFill/>
+        </p:spPr>
+        <p:txBody>
+          <a:bodyPr wrap="square" anchor="t" lIns="25400" rIns="25400" tIns="25400" bIns="25400">
+            <a:spAutoFit/>
+          </a:bodyPr>
+          <a:lstStyle/>
+          <a:p>
+            <a:pPr algn="l">
+              <a:lnSpc>
+                <a:spcPct val="100000"/>
+              </a:lnSpc>
+              <a:spcAft>
+                <a:spcPts val="400"/>
+              </a:spcAft>
+            </a:pPr>
+            <a:r>
+              <a:rPr sz="1200" b="0" i="1">
+                <a:solidFill>
+                  <a:srgbClr val="90A4AE"/>
+                </a:solidFill>
+                <a:latin typeface="Calibri"/>
+              </a:rPr>
+              <a:t>Conseils occupants, recommandation</a:t>
+            </a:r>
+          </a:p>
+        </p:txBody>
+      </p:sp>
+    </p:spTree>
+  </p:cSld>
+  <p:clrMapOvr>
+    <a:masterClrMapping/>
+  </p:clrMapOvr>
+</p:sld>
+</file>
+
+<file path=ppt/slides/slide20.xml><?xml version="1.0" encoding="utf-8"?>
 <p:sld xmlns:a="http://schemas.openxmlformats.org/drawingml/2006/main" xmlns:p="http://schemas.openxmlformats.org/presentationml/2006/main" xmlns:r="http://schemas.openxmlformats.org/officeDocument/2006/relationships">
   <p:cSld>
     <p:spTree>
@@ -22279,1473 +25094,7 @@
 </p:sld>
 </file>
 
-<file path=ppt/slides/slide2.xml><?xml version="1.0" encoding="utf-8"?>
-<p:sld xmlns:a="http://schemas.openxmlformats.org/drawingml/2006/main" xmlns:p="http://schemas.openxmlformats.org/presentationml/2006/main" xmlns:r="http://schemas.openxmlformats.org/officeDocument/2006/relationships">
-  <p:cSld>
-    <p:spTree>
-      <p:nvGrpSpPr>
-        <p:cNvPr id="1" name=""/>
-        <p:cNvGrpSpPr/>
-        <p:nvPr/>
-      </p:nvGrpSpPr>
-      <p:grpSpPr/>
-      <p:sp>
-        <p:nvSpPr>
-          <p:cNvPr id="2" name="Rectangle 1"/>
-          <p:cNvSpPr/>
-          <p:nvPr/>
-        </p:nvSpPr>
-        <p:spPr>
-          <a:xfrm>
-            <a:off x="0" y="0"/>
-            <a:ext cx="12191695" cy="6858000"/>
-          </a:xfrm>
-          <a:prstGeom prst="rect">
-            <a:avLst/>
-          </a:prstGeom>
-          <a:solidFill>
-            <a:srgbClr val="FFFFFF"/>
-          </a:solidFill>
-          <a:ln>
-            <a:noFill/>
-          </a:ln>
-          <a:effectLst/>
-        </p:spPr>
-        <p:style>
-          <a:lnRef idx="1">
-            <a:schemeClr val="accent1"/>
-          </a:lnRef>
-          <a:fillRef idx="3">
-            <a:schemeClr val="accent1"/>
-          </a:fillRef>
-          <a:effectRef idx="2">
-            <a:schemeClr val="accent1"/>
-          </a:effectRef>
-          <a:fontRef idx="minor">
-            <a:schemeClr val="lt1"/>
-          </a:fontRef>
-        </p:style>
-        <p:txBody>
-          <a:bodyPr rtlCol="0" anchor="ctr"/>
-          <a:lstStyle/>
-          <a:p>
-            <a:pPr algn="ctr"/>
-          </a:p>
-        </p:txBody>
-      </p:sp>
-      <p:sp>
-        <p:nvSpPr>
-          <p:cNvPr id="3" name="Rectangle 2"/>
-          <p:cNvSpPr/>
-          <p:nvPr/>
-        </p:nvSpPr>
-        <p:spPr>
-          <a:xfrm>
-            <a:off x="0" y="0"/>
-            <a:ext cx="201168" cy="6858000"/>
-          </a:xfrm>
-          <a:prstGeom prst="rect">
-            <a:avLst/>
-          </a:prstGeom>
-          <a:solidFill>
-            <a:srgbClr val="1B5E20"/>
-          </a:solidFill>
-          <a:ln>
-            <a:noFill/>
-          </a:ln>
-          <a:effectLst/>
-        </p:spPr>
-        <p:style>
-          <a:lnRef idx="1">
-            <a:schemeClr val="accent1"/>
-          </a:lnRef>
-          <a:fillRef idx="3">
-            <a:schemeClr val="accent1"/>
-          </a:fillRef>
-          <a:effectRef idx="2">
-            <a:schemeClr val="accent1"/>
-          </a:effectRef>
-          <a:fontRef idx="minor">
-            <a:schemeClr val="lt1"/>
-          </a:fontRef>
-        </p:style>
-        <p:txBody>
-          <a:bodyPr rtlCol="0" anchor="ctr"/>
-          <a:lstStyle/>
-          <a:p>
-            <a:pPr algn="ctr"/>
-          </a:p>
-        </p:txBody>
-      </p:sp>
-      <p:sp>
-        <p:nvSpPr>
-          <p:cNvPr id="4" name="TextBox 3"/>
-          <p:cNvSpPr txBox="1"/>
-          <p:nvPr/>
-        </p:nvSpPr>
-        <p:spPr>
-          <a:xfrm>
-            <a:off x="548640" y="310896"/>
-            <a:ext cx="10332720" cy="566928"/>
-          </a:xfrm>
-          <a:prstGeom prst="rect">
-            <a:avLst/>
-          </a:prstGeom>
-          <a:noFill/>
-        </p:spPr>
-        <p:txBody>
-          <a:bodyPr wrap="square" anchor="ctr" lIns="25400" rIns="25400" tIns="25400" bIns="25400">
-            <a:spAutoFit/>
-          </a:bodyPr>
-          <a:lstStyle/>
-          <a:p>
-            <a:pPr algn="l">
-              <a:lnSpc>
-                <a:spcPct val="100000"/>
-              </a:lnSpc>
-              <a:spcAft>
-                <a:spcPts val="400"/>
-              </a:spcAft>
-            </a:pPr>
-            <a:r>
-              <a:rPr sz="2800" b="1" i="0">
-                <a:solidFill>
-                  <a:srgbClr val="1B5E20"/>
-                </a:solidFill>
-                <a:latin typeface="Calibri"/>
-              </a:rPr>
-              <a:t>Sommaire</a:t>
-            </a:r>
-          </a:p>
-        </p:txBody>
-      </p:sp>
-      <p:sp>
-        <p:nvSpPr>
-          <p:cNvPr id="5" name="Rectangle 4"/>
-          <p:cNvSpPr/>
-          <p:nvPr/>
-        </p:nvSpPr>
-        <p:spPr>
-          <a:xfrm>
-            <a:off x="548640" y="1225296"/>
-            <a:ext cx="10058400" cy="27940"/>
-          </a:xfrm>
-          <a:prstGeom prst="rect">
-            <a:avLst/>
-          </a:prstGeom>
-          <a:solidFill>
-            <a:srgbClr val="2E7D32"/>
-          </a:solidFill>
-          <a:ln>
-            <a:noFill/>
-          </a:ln>
-          <a:effectLst/>
-        </p:spPr>
-        <p:style>
-          <a:lnRef idx="1">
-            <a:schemeClr val="accent1"/>
-          </a:lnRef>
-          <a:fillRef idx="3">
-            <a:schemeClr val="accent1"/>
-          </a:fillRef>
-          <a:effectRef idx="2">
-            <a:schemeClr val="accent1"/>
-          </a:effectRef>
-          <a:fontRef idx="minor">
-            <a:schemeClr val="lt1"/>
-          </a:fontRef>
-        </p:style>
-        <p:txBody>
-          <a:bodyPr rtlCol="0" anchor="ctr"/>
-          <a:lstStyle/>
-          <a:p>
-            <a:pPr algn="ctr"/>
-          </a:p>
-        </p:txBody>
-      </p:sp>
-      <p:sp>
-        <p:nvSpPr>
-          <p:cNvPr id="6" name="TextBox 5"/>
-          <p:cNvSpPr txBox="1"/>
-          <p:nvPr/>
-        </p:nvSpPr>
-        <p:spPr>
-          <a:xfrm>
-            <a:off x="502920" y="6473952"/>
-            <a:ext cx="8229600" cy="292608"/>
-          </a:xfrm>
-          <a:prstGeom prst="rect">
-            <a:avLst/>
-          </a:prstGeom>
-          <a:noFill/>
-        </p:spPr>
-        <p:txBody>
-          <a:bodyPr wrap="square" anchor="t" lIns="25400" rIns="25400" tIns="25400" bIns="25400">
-            <a:spAutoFit/>
-          </a:bodyPr>
-          <a:lstStyle/>
-          <a:p>
-            <a:pPr algn="l">
-              <a:lnSpc>
-                <a:spcPct val="100000"/>
-              </a:lnSpc>
-              <a:spcAft>
-                <a:spcPts val="400"/>
-              </a:spcAft>
-            </a:pPr>
-            <a:r>
-              <a:rPr sz="900" b="0" i="0">
-                <a:solidFill>
-                  <a:srgbClr val="90A4AE"/>
-                </a:solidFill>
-                <a:latin typeface="Calibri"/>
-              </a:rPr>
-              <a:t>Renovation energetique - Saint-Jean-de-Chevelu (73) - Bloc 1</a:t>
-            </a:r>
-          </a:p>
-        </p:txBody>
-      </p:sp>
-      <p:sp>
-        <p:nvSpPr>
-          <p:cNvPr id="7" name="TextBox 6"/>
-          <p:cNvSpPr txBox="1"/>
-          <p:nvPr/>
-        </p:nvSpPr>
-        <p:spPr>
-          <a:xfrm>
-            <a:off x="9418320" y="6473952"/>
-            <a:ext cx="2286000" cy="292608"/>
-          </a:xfrm>
-          <a:prstGeom prst="rect">
-            <a:avLst/>
-          </a:prstGeom>
-          <a:noFill/>
-        </p:spPr>
-        <p:txBody>
-          <a:bodyPr wrap="square" anchor="t" lIns="25400" rIns="25400" tIns="25400" bIns="25400">
-            <a:spAutoFit/>
-          </a:bodyPr>
-          <a:lstStyle/>
-          <a:p>
-            <a:pPr algn="r">
-              <a:lnSpc>
-                <a:spcPct val="100000"/>
-              </a:lnSpc>
-              <a:spcAft>
-                <a:spcPts val="400"/>
-              </a:spcAft>
-            </a:pPr>
-            <a:r>
-              <a:rPr sz="900" b="0" i="0">
-                <a:solidFill>
-                  <a:srgbClr val="90A4AE"/>
-                </a:solidFill>
-                <a:latin typeface="Calibri"/>
-              </a:rPr>
-              <a:t>Guillaume Tardy</a:t>
-            </a:r>
-          </a:p>
-        </p:txBody>
-      </p:sp>
-      <p:sp>
-        <p:nvSpPr>
-          <p:cNvPr id="8" name="Oval 7"/>
-          <p:cNvSpPr/>
-          <p:nvPr/>
-        </p:nvSpPr>
-        <p:spPr>
-          <a:xfrm>
-            <a:off x="822960" y="1554480"/>
-            <a:ext cx="475488" cy="475488"/>
-          </a:xfrm>
-          <a:prstGeom prst="ellipse">
-            <a:avLst/>
-          </a:prstGeom>
-          <a:solidFill>
-            <a:srgbClr val="1B5E20"/>
-          </a:solidFill>
-          <a:ln>
-            <a:noFill/>
-          </a:ln>
-          <a:effectLst/>
-        </p:spPr>
-        <p:style>
-          <a:lnRef idx="1">
-            <a:schemeClr val="accent1"/>
-          </a:lnRef>
-          <a:fillRef idx="3">
-            <a:schemeClr val="accent1"/>
-          </a:fillRef>
-          <a:effectRef idx="2">
-            <a:schemeClr val="accent1"/>
-          </a:effectRef>
-          <a:fontRef idx="minor">
-            <a:schemeClr val="lt1"/>
-          </a:fontRef>
-        </p:style>
-        <p:txBody>
-          <a:bodyPr rtlCol="0" anchor="ctr"/>
-          <a:lstStyle/>
-          <a:p>
-            <a:pPr algn="ctr"/>
-          </a:p>
-        </p:txBody>
-      </p:sp>
-      <p:sp>
-        <p:nvSpPr>
-          <p:cNvPr id="9" name="TextBox 8"/>
-          <p:cNvSpPr txBox="1"/>
-          <p:nvPr/>
-        </p:nvSpPr>
-        <p:spPr>
-          <a:xfrm>
-            <a:off x="822960" y="1554480"/>
-            <a:ext cx="475488" cy="475488"/>
-          </a:xfrm>
-          <a:prstGeom prst="rect">
-            <a:avLst/>
-          </a:prstGeom>
-          <a:noFill/>
-        </p:spPr>
-        <p:txBody>
-          <a:bodyPr wrap="square" anchor="ctr" lIns="25400" rIns="25400" tIns="25400" bIns="25400">
-            <a:spAutoFit/>
-          </a:bodyPr>
-          <a:lstStyle/>
-          <a:p>
-            <a:pPr algn="ctr">
-              <a:lnSpc>
-                <a:spcPct val="100000"/>
-              </a:lnSpc>
-              <a:spcAft>
-                <a:spcPts val="400"/>
-              </a:spcAft>
-            </a:pPr>
-            <a:r>
-              <a:rPr sz="1700" b="1" i="0">
-                <a:solidFill>
-                  <a:srgbClr val="FFFFFF"/>
-                </a:solidFill>
-                <a:latin typeface="Calibri"/>
-              </a:rPr>
-              <a:t>1</a:t>
-            </a:r>
-          </a:p>
-        </p:txBody>
-      </p:sp>
-      <p:sp>
-        <p:nvSpPr>
-          <p:cNvPr id="10" name="TextBox 9"/>
-          <p:cNvSpPr txBox="1"/>
-          <p:nvPr/>
-        </p:nvSpPr>
-        <p:spPr>
-          <a:xfrm>
-            <a:off x="1508760" y="1527048"/>
-            <a:ext cx="7315200" cy="365760"/>
-          </a:xfrm>
-          <a:prstGeom prst="rect">
-            <a:avLst/>
-          </a:prstGeom>
-          <a:noFill/>
-        </p:spPr>
-        <p:txBody>
-          <a:bodyPr wrap="square" anchor="ctr" lIns="25400" rIns="25400" tIns="25400" bIns="25400">
-            <a:spAutoFit/>
-          </a:bodyPr>
-          <a:lstStyle/>
-          <a:p>
-            <a:pPr algn="l">
-              <a:lnSpc>
-                <a:spcPct val="100000"/>
-              </a:lnSpc>
-              <a:spcAft>
-                <a:spcPts val="400"/>
-              </a:spcAft>
-            </a:pPr>
-            <a:r>
-              <a:rPr sz="1700" b="1" i="0">
-                <a:solidFill>
-                  <a:srgbClr val="37474F"/>
-                </a:solidFill>
-                <a:latin typeface="Calibri"/>
-              </a:rPr>
-              <a:t>Situation, foyer &amp; objectifs</a:t>
-            </a:r>
-          </a:p>
-        </p:txBody>
-      </p:sp>
-      <p:sp>
-        <p:nvSpPr>
-          <p:cNvPr id="11" name="TextBox 10"/>
-          <p:cNvSpPr txBox="1"/>
-          <p:nvPr/>
-        </p:nvSpPr>
-        <p:spPr>
-          <a:xfrm>
-            <a:off x="1508760" y="1828800"/>
-            <a:ext cx="9601200" cy="274320"/>
-          </a:xfrm>
-          <a:prstGeom prst="rect">
-            <a:avLst/>
-          </a:prstGeom>
-          <a:noFill/>
-        </p:spPr>
-        <p:txBody>
-          <a:bodyPr wrap="square" anchor="t" lIns="25400" rIns="25400" tIns="25400" bIns="25400">
-            <a:spAutoFit/>
-          </a:bodyPr>
-          <a:lstStyle/>
-          <a:p>
-            <a:pPr algn="l">
-              <a:lnSpc>
-                <a:spcPct val="100000"/>
-              </a:lnSpc>
-              <a:spcAft>
-                <a:spcPts val="400"/>
-              </a:spcAft>
-            </a:pPr>
-            <a:r>
-              <a:rPr sz="1200" b="0" i="1">
-                <a:solidFill>
-                  <a:srgbClr val="90A4AE"/>
-                </a:solidFill>
-                <a:latin typeface="Calibri"/>
-              </a:rPr>
-              <a:t>Contexte, moyens du MOA, confort vise</a:t>
-            </a:r>
-          </a:p>
-        </p:txBody>
-      </p:sp>
-      <p:sp>
-        <p:nvSpPr>
-          <p:cNvPr id="12" name="Oval 11"/>
-          <p:cNvSpPr/>
-          <p:nvPr/>
-        </p:nvSpPr>
-        <p:spPr>
-          <a:xfrm>
-            <a:off x="822960" y="2194560"/>
-            <a:ext cx="475488" cy="475488"/>
-          </a:xfrm>
-          <a:prstGeom prst="ellipse">
-            <a:avLst/>
-          </a:prstGeom>
-          <a:solidFill>
-            <a:srgbClr val="1B5E20"/>
-          </a:solidFill>
-          <a:ln>
-            <a:noFill/>
-          </a:ln>
-          <a:effectLst/>
-        </p:spPr>
-        <p:style>
-          <a:lnRef idx="1">
-            <a:schemeClr val="accent1"/>
-          </a:lnRef>
-          <a:fillRef idx="3">
-            <a:schemeClr val="accent1"/>
-          </a:fillRef>
-          <a:effectRef idx="2">
-            <a:schemeClr val="accent1"/>
-          </a:effectRef>
-          <a:fontRef idx="minor">
-            <a:schemeClr val="lt1"/>
-          </a:fontRef>
-        </p:style>
-        <p:txBody>
-          <a:bodyPr rtlCol="0" anchor="ctr"/>
-          <a:lstStyle/>
-          <a:p>
-            <a:pPr algn="ctr"/>
-          </a:p>
-        </p:txBody>
-      </p:sp>
-      <p:sp>
-        <p:nvSpPr>
-          <p:cNvPr id="13" name="TextBox 12"/>
-          <p:cNvSpPr txBox="1"/>
-          <p:nvPr/>
-        </p:nvSpPr>
-        <p:spPr>
-          <a:xfrm>
-            <a:off x="822960" y="2194560"/>
-            <a:ext cx="475488" cy="475488"/>
-          </a:xfrm>
-          <a:prstGeom prst="rect">
-            <a:avLst/>
-          </a:prstGeom>
-          <a:noFill/>
-        </p:spPr>
-        <p:txBody>
-          <a:bodyPr wrap="square" anchor="ctr" lIns="25400" rIns="25400" tIns="25400" bIns="25400">
-            <a:spAutoFit/>
-          </a:bodyPr>
-          <a:lstStyle/>
-          <a:p>
-            <a:pPr algn="ctr">
-              <a:lnSpc>
-                <a:spcPct val="100000"/>
-              </a:lnSpc>
-              <a:spcAft>
-                <a:spcPts val="400"/>
-              </a:spcAft>
-            </a:pPr>
-            <a:r>
-              <a:rPr sz="1700" b="1" i="0">
-                <a:solidFill>
-                  <a:srgbClr val="FFFFFF"/>
-                </a:solidFill>
-                <a:latin typeface="Calibri"/>
-              </a:rPr>
-              <a:t>2</a:t>
-            </a:r>
-          </a:p>
-        </p:txBody>
-      </p:sp>
-      <p:sp>
-        <p:nvSpPr>
-          <p:cNvPr id="14" name="TextBox 13"/>
-          <p:cNvSpPr txBox="1"/>
-          <p:nvPr/>
-        </p:nvSpPr>
-        <p:spPr>
-          <a:xfrm>
-            <a:off x="1508760" y="2167128"/>
-            <a:ext cx="7315200" cy="365760"/>
-          </a:xfrm>
-          <a:prstGeom prst="rect">
-            <a:avLst/>
-          </a:prstGeom>
-          <a:noFill/>
-        </p:spPr>
-        <p:txBody>
-          <a:bodyPr wrap="square" anchor="ctr" lIns="25400" rIns="25400" tIns="25400" bIns="25400">
-            <a:spAutoFit/>
-          </a:bodyPr>
-          <a:lstStyle/>
-          <a:p>
-            <a:pPr algn="l">
-              <a:lnSpc>
-                <a:spcPct val="100000"/>
-              </a:lnSpc>
-              <a:spcAft>
-                <a:spcPts val="400"/>
-              </a:spcAft>
-            </a:pPr>
-            <a:r>
-              <a:rPr sz="1700" b="1" i="0">
-                <a:solidFill>
-                  <a:srgbClr val="37474F"/>
-                </a:solidFill>
-                <a:latin typeface="Calibri"/>
-              </a:rPr>
-              <a:t>Diagnostic technique de l'existant</a:t>
-            </a:r>
-          </a:p>
-        </p:txBody>
-      </p:sp>
-      <p:sp>
-        <p:nvSpPr>
-          <p:cNvPr id="15" name="TextBox 14"/>
-          <p:cNvSpPr txBox="1"/>
-          <p:nvPr/>
-        </p:nvSpPr>
-        <p:spPr>
-          <a:xfrm>
-            <a:off x="1508760" y="2468880"/>
-            <a:ext cx="9601200" cy="274320"/>
-          </a:xfrm>
-          <a:prstGeom prst="rect">
-            <a:avLst/>
-          </a:prstGeom>
-          <a:noFill/>
-        </p:spPr>
-        <p:txBody>
-          <a:bodyPr wrap="square" anchor="t" lIns="25400" rIns="25400" tIns="25400" bIns="25400">
-            <a:spAutoFit/>
-          </a:bodyPr>
-          <a:lstStyle/>
-          <a:p>
-            <a:pPr algn="l">
-              <a:lnSpc>
-                <a:spcPct val="100000"/>
-              </a:lnSpc>
-              <a:spcAft>
-                <a:spcPts val="400"/>
-              </a:spcAft>
-            </a:pPr>
-            <a:r>
-              <a:rPr sz="1200" b="0" i="1">
-                <a:solidFill>
-                  <a:srgbClr val="90A4AE"/>
-                </a:solidFill>
-                <a:latin typeface="Calibri"/>
-              </a:rPr>
-              <a:t>Consommations, enveloppe, systemes, eclairage</a:t>
-            </a:r>
-          </a:p>
-        </p:txBody>
-      </p:sp>
-      <p:sp>
-        <p:nvSpPr>
-          <p:cNvPr id="16" name="Oval 15"/>
-          <p:cNvSpPr/>
-          <p:nvPr/>
-        </p:nvSpPr>
-        <p:spPr>
-          <a:xfrm>
-            <a:off x="822960" y="2834640"/>
-            <a:ext cx="475488" cy="475488"/>
-          </a:xfrm>
-          <a:prstGeom prst="ellipse">
-            <a:avLst/>
-          </a:prstGeom>
-          <a:solidFill>
-            <a:srgbClr val="1B5E20"/>
-          </a:solidFill>
-          <a:ln>
-            <a:noFill/>
-          </a:ln>
-          <a:effectLst/>
-        </p:spPr>
-        <p:style>
-          <a:lnRef idx="1">
-            <a:schemeClr val="accent1"/>
-          </a:lnRef>
-          <a:fillRef idx="3">
-            <a:schemeClr val="accent1"/>
-          </a:fillRef>
-          <a:effectRef idx="2">
-            <a:schemeClr val="accent1"/>
-          </a:effectRef>
-          <a:fontRef idx="minor">
-            <a:schemeClr val="lt1"/>
-          </a:fontRef>
-        </p:style>
-        <p:txBody>
-          <a:bodyPr rtlCol="0" anchor="ctr"/>
-          <a:lstStyle/>
-          <a:p>
-            <a:pPr algn="ctr"/>
-          </a:p>
-        </p:txBody>
-      </p:sp>
-      <p:sp>
-        <p:nvSpPr>
-          <p:cNvPr id="17" name="TextBox 16"/>
-          <p:cNvSpPr txBox="1"/>
-          <p:nvPr/>
-        </p:nvSpPr>
-        <p:spPr>
-          <a:xfrm>
-            <a:off x="822960" y="2834640"/>
-            <a:ext cx="475488" cy="475488"/>
-          </a:xfrm>
-          <a:prstGeom prst="rect">
-            <a:avLst/>
-          </a:prstGeom>
-          <a:noFill/>
-        </p:spPr>
-        <p:txBody>
-          <a:bodyPr wrap="square" anchor="ctr" lIns="25400" rIns="25400" tIns="25400" bIns="25400">
-            <a:spAutoFit/>
-          </a:bodyPr>
-          <a:lstStyle/>
-          <a:p>
-            <a:pPr algn="ctr">
-              <a:lnSpc>
-                <a:spcPct val="100000"/>
-              </a:lnSpc>
-              <a:spcAft>
-                <a:spcPts val="400"/>
-              </a:spcAft>
-            </a:pPr>
-            <a:r>
-              <a:rPr sz="1700" b="1" i="0">
-                <a:solidFill>
-                  <a:srgbClr val="FFFFFF"/>
-                </a:solidFill>
-                <a:latin typeface="Calibri"/>
-              </a:rPr>
-              <a:t>3</a:t>
-            </a:r>
-          </a:p>
-        </p:txBody>
-      </p:sp>
-      <p:sp>
-        <p:nvSpPr>
-          <p:cNvPr id="18" name="TextBox 17"/>
-          <p:cNvSpPr txBox="1"/>
-          <p:nvPr/>
-        </p:nvSpPr>
-        <p:spPr>
-          <a:xfrm>
-            <a:off x="1508760" y="2807208"/>
-            <a:ext cx="7315200" cy="365760"/>
-          </a:xfrm>
-          <a:prstGeom prst="rect">
-            <a:avLst/>
-          </a:prstGeom>
-          <a:noFill/>
-        </p:spPr>
-        <p:txBody>
-          <a:bodyPr wrap="square" anchor="ctr" lIns="25400" rIns="25400" tIns="25400" bIns="25400">
-            <a:spAutoFit/>
-          </a:bodyPr>
-          <a:lstStyle/>
-          <a:p>
-            <a:pPr algn="l">
-              <a:lnSpc>
-                <a:spcPct val="100000"/>
-              </a:lnSpc>
-              <a:spcAft>
-                <a:spcPts val="400"/>
-              </a:spcAft>
-            </a:pPr>
-            <a:r>
-              <a:rPr sz="1700" b="1" i="0">
-                <a:solidFill>
-                  <a:srgbClr val="37474F"/>
-                </a:solidFill>
-                <a:latin typeface="Calibri"/>
-              </a:rPr>
-              <a:t>Deperditions &amp; DPE de l'existant</a:t>
-            </a:r>
-          </a:p>
-        </p:txBody>
-      </p:sp>
-      <p:sp>
-        <p:nvSpPr>
-          <p:cNvPr id="19" name="TextBox 18"/>
-          <p:cNvSpPr txBox="1"/>
-          <p:nvPr/>
-        </p:nvSpPr>
-        <p:spPr>
-          <a:xfrm>
-            <a:off x="1508760" y="3108960"/>
-            <a:ext cx="9601200" cy="274320"/>
-          </a:xfrm>
-          <a:prstGeom prst="rect">
-            <a:avLst/>
-          </a:prstGeom>
-          <a:noFill/>
-        </p:spPr>
-        <p:txBody>
-          <a:bodyPr wrap="square" anchor="t" lIns="25400" rIns="25400" tIns="25400" bIns="25400">
-            <a:spAutoFit/>
-          </a:bodyPr>
-          <a:lstStyle/>
-          <a:p>
-            <a:pPr algn="l">
-              <a:lnSpc>
-                <a:spcPct val="100000"/>
-              </a:lnSpc>
-              <a:spcAft>
-                <a:spcPts val="400"/>
-              </a:spcAft>
-            </a:pPr>
-            <a:r>
-              <a:rPr sz="1200" b="0" i="1">
-                <a:solidFill>
-                  <a:srgbClr val="90A4AE"/>
-                </a:solidFill>
-                <a:latin typeface="Calibri"/>
-              </a:rPr>
-              <a:t>Calcul thermique, etiquette G</a:t>
-            </a:r>
-          </a:p>
-        </p:txBody>
-      </p:sp>
-      <p:sp>
-        <p:nvSpPr>
-          <p:cNvPr id="20" name="Oval 19"/>
-          <p:cNvSpPr/>
-          <p:nvPr/>
-        </p:nvSpPr>
-        <p:spPr>
-          <a:xfrm>
-            <a:off x="822960" y="3474720"/>
-            <a:ext cx="475488" cy="475488"/>
-          </a:xfrm>
-          <a:prstGeom prst="ellipse">
-            <a:avLst/>
-          </a:prstGeom>
-          <a:solidFill>
-            <a:srgbClr val="1B5E20"/>
-          </a:solidFill>
-          <a:ln>
-            <a:noFill/>
-          </a:ln>
-          <a:effectLst/>
-        </p:spPr>
-        <p:style>
-          <a:lnRef idx="1">
-            <a:schemeClr val="accent1"/>
-          </a:lnRef>
-          <a:fillRef idx="3">
-            <a:schemeClr val="accent1"/>
-          </a:fillRef>
-          <a:effectRef idx="2">
-            <a:schemeClr val="accent1"/>
-          </a:effectRef>
-          <a:fontRef idx="minor">
-            <a:schemeClr val="lt1"/>
-          </a:fontRef>
-        </p:style>
-        <p:txBody>
-          <a:bodyPr rtlCol="0" anchor="ctr"/>
-          <a:lstStyle/>
-          <a:p>
-            <a:pPr algn="ctr"/>
-          </a:p>
-        </p:txBody>
-      </p:sp>
-      <p:sp>
-        <p:nvSpPr>
-          <p:cNvPr id="21" name="TextBox 20"/>
-          <p:cNvSpPr txBox="1"/>
-          <p:nvPr/>
-        </p:nvSpPr>
-        <p:spPr>
-          <a:xfrm>
-            <a:off x="822960" y="3474720"/>
-            <a:ext cx="475488" cy="475488"/>
-          </a:xfrm>
-          <a:prstGeom prst="rect">
-            <a:avLst/>
-          </a:prstGeom>
-          <a:noFill/>
-        </p:spPr>
-        <p:txBody>
-          <a:bodyPr wrap="square" anchor="ctr" lIns="25400" rIns="25400" tIns="25400" bIns="25400">
-            <a:spAutoFit/>
-          </a:bodyPr>
-          <a:lstStyle/>
-          <a:p>
-            <a:pPr algn="ctr">
-              <a:lnSpc>
-                <a:spcPct val="100000"/>
-              </a:lnSpc>
-              <a:spcAft>
-                <a:spcPts val="400"/>
-              </a:spcAft>
-            </a:pPr>
-            <a:r>
-              <a:rPr sz="1700" b="1" i="0">
-                <a:solidFill>
-                  <a:srgbClr val="FFFFFF"/>
-                </a:solidFill>
-                <a:latin typeface="Calibri"/>
-              </a:rPr>
-              <a:t>4</a:t>
-            </a:r>
-          </a:p>
-        </p:txBody>
-      </p:sp>
-      <p:sp>
-        <p:nvSpPr>
-          <p:cNvPr id="22" name="TextBox 21"/>
-          <p:cNvSpPr txBox="1"/>
-          <p:nvPr/>
-        </p:nvSpPr>
-        <p:spPr>
-          <a:xfrm>
-            <a:off x="1508760" y="3447288"/>
-            <a:ext cx="7315200" cy="365760"/>
-          </a:xfrm>
-          <a:prstGeom prst="rect">
-            <a:avLst/>
-          </a:prstGeom>
-          <a:noFill/>
-        </p:spPr>
-        <p:txBody>
-          <a:bodyPr wrap="square" anchor="ctr" lIns="25400" rIns="25400" tIns="25400" bIns="25400">
-            <a:spAutoFit/>
-          </a:bodyPr>
-          <a:lstStyle/>
-          <a:p>
-            <a:pPr algn="l">
-              <a:lnSpc>
-                <a:spcPct val="100000"/>
-              </a:lnSpc>
-              <a:spcAft>
-                <a:spcPts val="400"/>
-              </a:spcAft>
-            </a:pPr>
-            <a:r>
-              <a:rPr sz="1700" b="1" i="0">
-                <a:solidFill>
-                  <a:srgbClr val="37474F"/>
-                </a:solidFill>
-                <a:latin typeface="Calibri"/>
-              </a:rPr>
-              <a:t>Deux scenarios de renovation</a:t>
-            </a:r>
-          </a:p>
-        </p:txBody>
-      </p:sp>
-      <p:sp>
-        <p:nvSpPr>
-          <p:cNvPr id="23" name="TextBox 22"/>
-          <p:cNvSpPr txBox="1"/>
-          <p:nvPr/>
-        </p:nvSpPr>
-        <p:spPr>
-          <a:xfrm>
-            <a:off x="1508760" y="3749040"/>
-            <a:ext cx="9601200" cy="274320"/>
-          </a:xfrm>
-          <a:prstGeom prst="rect">
-            <a:avLst/>
-          </a:prstGeom>
-          <a:noFill/>
-        </p:spPr>
-        <p:txBody>
-          <a:bodyPr wrap="square" anchor="t" lIns="25400" rIns="25400" tIns="25400" bIns="25400">
-            <a:spAutoFit/>
-          </a:bodyPr>
-          <a:lstStyle/>
-          <a:p>
-            <a:pPr algn="l">
-              <a:lnSpc>
-                <a:spcPct val="100000"/>
-              </a:lnSpc>
-              <a:spcAft>
-                <a:spcPts val="400"/>
-              </a:spcAft>
-            </a:pPr>
-            <a:r>
-              <a:rPr sz="1200" b="0" i="1">
-                <a:solidFill>
-                  <a:srgbClr val="90A4AE"/>
-                </a:solidFill>
-                <a:latin typeface="Calibri"/>
-              </a:rPr>
-              <a:t>Par etapes (D) et global (B)</a:t>
-            </a:r>
-          </a:p>
-        </p:txBody>
-      </p:sp>
-      <p:sp>
-        <p:nvSpPr>
-          <p:cNvPr id="24" name="Oval 23"/>
-          <p:cNvSpPr/>
-          <p:nvPr/>
-        </p:nvSpPr>
-        <p:spPr>
-          <a:xfrm>
-            <a:off x="822960" y="4114800"/>
-            <a:ext cx="475488" cy="475488"/>
-          </a:xfrm>
-          <a:prstGeom prst="ellipse">
-            <a:avLst/>
-          </a:prstGeom>
-          <a:solidFill>
-            <a:srgbClr val="1B5E20"/>
-          </a:solidFill>
-          <a:ln>
-            <a:noFill/>
-          </a:ln>
-          <a:effectLst/>
-        </p:spPr>
-        <p:style>
-          <a:lnRef idx="1">
-            <a:schemeClr val="accent1"/>
-          </a:lnRef>
-          <a:fillRef idx="3">
-            <a:schemeClr val="accent1"/>
-          </a:fillRef>
-          <a:effectRef idx="2">
-            <a:schemeClr val="accent1"/>
-          </a:effectRef>
-          <a:fontRef idx="minor">
-            <a:schemeClr val="lt1"/>
-          </a:fontRef>
-        </p:style>
-        <p:txBody>
-          <a:bodyPr rtlCol="0" anchor="ctr"/>
-          <a:lstStyle/>
-          <a:p>
-            <a:pPr algn="ctr"/>
-          </a:p>
-        </p:txBody>
-      </p:sp>
-      <p:sp>
-        <p:nvSpPr>
-          <p:cNvPr id="25" name="TextBox 24"/>
-          <p:cNvSpPr txBox="1"/>
-          <p:nvPr/>
-        </p:nvSpPr>
-        <p:spPr>
-          <a:xfrm>
-            <a:off x="822960" y="4114800"/>
-            <a:ext cx="475488" cy="475488"/>
-          </a:xfrm>
-          <a:prstGeom prst="rect">
-            <a:avLst/>
-          </a:prstGeom>
-          <a:noFill/>
-        </p:spPr>
-        <p:txBody>
-          <a:bodyPr wrap="square" anchor="ctr" lIns="25400" rIns="25400" tIns="25400" bIns="25400">
-            <a:spAutoFit/>
-          </a:bodyPr>
-          <a:lstStyle/>
-          <a:p>
-            <a:pPr algn="ctr">
-              <a:lnSpc>
-                <a:spcPct val="100000"/>
-              </a:lnSpc>
-              <a:spcAft>
-                <a:spcPts val="400"/>
-              </a:spcAft>
-            </a:pPr>
-            <a:r>
-              <a:rPr sz="1700" b="1" i="0">
-                <a:solidFill>
-                  <a:srgbClr val="FFFFFF"/>
-                </a:solidFill>
-                <a:latin typeface="Calibri"/>
-              </a:rPr>
-              <a:t>5</a:t>
-            </a:r>
-          </a:p>
-        </p:txBody>
-      </p:sp>
-      <p:sp>
-        <p:nvSpPr>
-          <p:cNvPr id="26" name="TextBox 25"/>
-          <p:cNvSpPr txBox="1"/>
-          <p:nvPr/>
-        </p:nvSpPr>
-        <p:spPr>
-          <a:xfrm>
-            <a:off x="1508760" y="4087368"/>
-            <a:ext cx="7315200" cy="365760"/>
-          </a:xfrm>
-          <a:prstGeom prst="rect">
-            <a:avLst/>
-          </a:prstGeom>
-          <a:noFill/>
-        </p:spPr>
-        <p:txBody>
-          <a:bodyPr wrap="square" anchor="ctr" lIns="25400" rIns="25400" tIns="25400" bIns="25400">
-            <a:spAutoFit/>
-          </a:bodyPr>
-          <a:lstStyle/>
-          <a:p>
-            <a:pPr algn="l">
-              <a:lnSpc>
-                <a:spcPct val="100000"/>
-              </a:lnSpc>
-              <a:spcAft>
-                <a:spcPts val="400"/>
-              </a:spcAft>
-            </a:pPr>
-            <a:r>
-              <a:rPr sz="1700" b="1" i="0">
-                <a:solidFill>
-                  <a:srgbClr val="37474F"/>
-                </a:solidFill>
-                <a:latin typeface="Calibri"/>
-              </a:rPr>
-              <a:t>DPE des scenarios &amp; dimensionnement</a:t>
-            </a:r>
-          </a:p>
-        </p:txBody>
-      </p:sp>
-      <p:sp>
-        <p:nvSpPr>
-          <p:cNvPr id="27" name="TextBox 26"/>
-          <p:cNvSpPr txBox="1"/>
-          <p:nvPr/>
-        </p:nvSpPr>
-        <p:spPr>
-          <a:xfrm>
-            <a:off x="1508760" y="4389120"/>
-            <a:ext cx="9601200" cy="274320"/>
-          </a:xfrm>
-          <a:prstGeom prst="rect">
-            <a:avLst/>
-          </a:prstGeom>
-          <a:noFill/>
-        </p:spPr>
-        <p:txBody>
-          <a:bodyPr wrap="square" anchor="t" lIns="25400" rIns="25400" tIns="25400" bIns="25400">
-            <a:spAutoFit/>
-          </a:bodyPr>
-          <a:lstStyle/>
-          <a:p>
-            <a:pPr algn="l">
-              <a:lnSpc>
-                <a:spcPct val="100000"/>
-              </a:lnSpc>
-              <a:spcAft>
-                <a:spcPts val="400"/>
-              </a:spcAft>
-            </a:pPr>
-            <a:r>
-              <a:rPr sz="1200" b="0" i="1">
-                <a:solidFill>
-                  <a:srgbClr val="90A4AE"/>
-                </a:solidFill>
-                <a:latin typeface="Calibri"/>
-              </a:rPr>
-              <a:t>Calculs DPE, regulation, ECS, materiaux</a:t>
-            </a:r>
-          </a:p>
-        </p:txBody>
-      </p:sp>
-      <p:sp>
-        <p:nvSpPr>
-          <p:cNvPr id="28" name="Oval 27"/>
-          <p:cNvSpPr/>
-          <p:nvPr/>
-        </p:nvSpPr>
-        <p:spPr>
-          <a:xfrm>
-            <a:off x="822960" y="4754880"/>
-            <a:ext cx="475488" cy="475488"/>
-          </a:xfrm>
-          <a:prstGeom prst="ellipse">
-            <a:avLst/>
-          </a:prstGeom>
-          <a:solidFill>
-            <a:srgbClr val="1B5E20"/>
-          </a:solidFill>
-          <a:ln>
-            <a:noFill/>
-          </a:ln>
-          <a:effectLst/>
-        </p:spPr>
-        <p:style>
-          <a:lnRef idx="1">
-            <a:schemeClr val="accent1"/>
-          </a:lnRef>
-          <a:fillRef idx="3">
-            <a:schemeClr val="accent1"/>
-          </a:fillRef>
-          <a:effectRef idx="2">
-            <a:schemeClr val="accent1"/>
-          </a:effectRef>
-          <a:fontRef idx="minor">
-            <a:schemeClr val="lt1"/>
-          </a:fontRef>
-        </p:style>
-        <p:txBody>
-          <a:bodyPr rtlCol="0" anchor="ctr"/>
-          <a:lstStyle/>
-          <a:p>
-            <a:pPr algn="ctr"/>
-          </a:p>
-        </p:txBody>
-      </p:sp>
-      <p:sp>
-        <p:nvSpPr>
-          <p:cNvPr id="29" name="TextBox 28"/>
-          <p:cNvSpPr txBox="1"/>
-          <p:nvPr/>
-        </p:nvSpPr>
-        <p:spPr>
-          <a:xfrm>
-            <a:off x="822960" y="4754880"/>
-            <a:ext cx="475488" cy="475488"/>
-          </a:xfrm>
-          <a:prstGeom prst="rect">
-            <a:avLst/>
-          </a:prstGeom>
-          <a:noFill/>
-        </p:spPr>
-        <p:txBody>
-          <a:bodyPr wrap="square" anchor="ctr" lIns="25400" rIns="25400" tIns="25400" bIns="25400">
-            <a:spAutoFit/>
-          </a:bodyPr>
-          <a:lstStyle/>
-          <a:p>
-            <a:pPr algn="ctr">
-              <a:lnSpc>
-                <a:spcPct val="100000"/>
-              </a:lnSpc>
-              <a:spcAft>
-                <a:spcPts val="400"/>
-              </a:spcAft>
-            </a:pPr>
-            <a:r>
-              <a:rPr sz="1700" b="1" i="0">
-                <a:solidFill>
-                  <a:srgbClr val="FFFFFF"/>
-                </a:solidFill>
-                <a:latin typeface="Calibri"/>
-              </a:rPr>
-              <a:t>6</a:t>
-            </a:r>
-          </a:p>
-        </p:txBody>
-      </p:sp>
-      <p:sp>
-        <p:nvSpPr>
-          <p:cNvPr id="30" name="TextBox 29"/>
-          <p:cNvSpPr txBox="1"/>
-          <p:nvPr/>
-        </p:nvSpPr>
-        <p:spPr>
-          <a:xfrm>
-            <a:off x="1508760" y="4727448"/>
-            <a:ext cx="7315200" cy="365760"/>
-          </a:xfrm>
-          <a:prstGeom prst="rect">
-            <a:avLst/>
-          </a:prstGeom>
-          <a:noFill/>
-        </p:spPr>
-        <p:txBody>
-          <a:bodyPr wrap="square" anchor="ctr" lIns="25400" rIns="25400" tIns="25400" bIns="25400">
-            <a:spAutoFit/>
-          </a:bodyPr>
-          <a:lstStyle/>
-          <a:p>
-            <a:pPr algn="l">
-              <a:lnSpc>
-                <a:spcPct val="100000"/>
-              </a:lnSpc>
-              <a:spcAft>
-                <a:spcPts val="400"/>
-              </a:spcAft>
-            </a:pPr>
-            <a:r>
-              <a:rPr sz="1700" b="1" i="0">
-                <a:solidFill>
-                  <a:srgbClr val="37474F"/>
-                </a:solidFill>
-                <a:latin typeface="Calibri"/>
-              </a:rPr>
-              <a:t>Analyse economique en cout global</a:t>
-            </a:r>
-          </a:p>
-        </p:txBody>
-      </p:sp>
-      <p:sp>
-        <p:nvSpPr>
-          <p:cNvPr id="31" name="TextBox 30"/>
-          <p:cNvSpPr txBox="1"/>
-          <p:nvPr/>
-        </p:nvSpPr>
-        <p:spPr>
-          <a:xfrm>
-            <a:off x="1508760" y="5029200"/>
-            <a:ext cx="9601200" cy="274320"/>
-          </a:xfrm>
-          <a:prstGeom prst="rect">
-            <a:avLst/>
-          </a:prstGeom>
-          <a:noFill/>
-        </p:spPr>
-        <p:txBody>
-          <a:bodyPr wrap="square" anchor="t" lIns="25400" rIns="25400" tIns="25400" bIns="25400">
-            <a:spAutoFit/>
-          </a:bodyPr>
-          <a:lstStyle/>
-          <a:p>
-            <a:pPr algn="l">
-              <a:lnSpc>
-                <a:spcPct val="100000"/>
-              </a:lnSpc>
-              <a:spcAft>
-                <a:spcPts val="400"/>
-              </a:spcAft>
-            </a:pPr>
-            <a:r>
-              <a:rPr sz="1200" b="0" i="1">
-                <a:solidFill>
-                  <a:srgbClr val="90A4AE"/>
-                </a:solidFill>
-                <a:latin typeface="Calibri"/>
-              </a:rPr>
-              <a:t>Chiffrage, aides, reste a charge, ROI</a:t>
-            </a:r>
-          </a:p>
-        </p:txBody>
-      </p:sp>
-      <p:sp>
-        <p:nvSpPr>
-          <p:cNvPr id="32" name="Oval 31"/>
-          <p:cNvSpPr/>
-          <p:nvPr/>
-        </p:nvSpPr>
-        <p:spPr>
-          <a:xfrm>
-            <a:off x="822960" y="5394960"/>
-            <a:ext cx="475488" cy="475488"/>
-          </a:xfrm>
-          <a:prstGeom prst="ellipse">
-            <a:avLst/>
-          </a:prstGeom>
-          <a:solidFill>
-            <a:srgbClr val="1B5E20"/>
-          </a:solidFill>
-          <a:ln>
-            <a:noFill/>
-          </a:ln>
-          <a:effectLst/>
-        </p:spPr>
-        <p:style>
-          <a:lnRef idx="1">
-            <a:schemeClr val="accent1"/>
-          </a:lnRef>
-          <a:fillRef idx="3">
-            <a:schemeClr val="accent1"/>
-          </a:fillRef>
-          <a:effectRef idx="2">
-            <a:schemeClr val="accent1"/>
-          </a:effectRef>
-          <a:fontRef idx="minor">
-            <a:schemeClr val="lt1"/>
-          </a:fontRef>
-        </p:style>
-        <p:txBody>
-          <a:bodyPr rtlCol="0" anchor="ctr"/>
-          <a:lstStyle/>
-          <a:p>
-            <a:pPr algn="ctr"/>
-          </a:p>
-        </p:txBody>
-      </p:sp>
-      <p:sp>
-        <p:nvSpPr>
-          <p:cNvPr id="33" name="TextBox 32"/>
-          <p:cNvSpPr txBox="1"/>
-          <p:nvPr/>
-        </p:nvSpPr>
-        <p:spPr>
-          <a:xfrm>
-            <a:off x="822960" y="5394960"/>
-            <a:ext cx="475488" cy="475488"/>
-          </a:xfrm>
-          <a:prstGeom prst="rect">
-            <a:avLst/>
-          </a:prstGeom>
-          <a:noFill/>
-        </p:spPr>
-        <p:txBody>
-          <a:bodyPr wrap="square" anchor="ctr" lIns="25400" rIns="25400" tIns="25400" bIns="25400">
-            <a:spAutoFit/>
-          </a:bodyPr>
-          <a:lstStyle/>
-          <a:p>
-            <a:pPr algn="ctr">
-              <a:lnSpc>
-                <a:spcPct val="100000"/>
-              </a:lnSpc>
-              <a:spcAft>
-                <a:spcPts val="400"/>
-              </a:spcAft>
-            </a:pPr>
-            <a:r>
-              <a:rPr sz="1700" b="1" i="0">
-                <a:solidFill>
-                  <a:srgbClr val="FFFFFF"/>
-                </a:solidFill>
-                <a:latin typeface="Calibri"/>
-              </a:rPr>
-              <a:t>7</a:t>
-            </a:r>
-          </a:p>
-        </p:txBody>
-      </p:sp>
-      <p:sp>
-        <p:nvSpPr>
-          <p:cNvPr id="34" name="TextBox 33"/>
-          <p:cNvSpPr txBox="1"/>
-          <p:nvPr/>
-        </p:nvSpPr>
-        <p:spPr>
-          <a:xfrm>
-            <a:off x="1508760" y="5367528"/>
-            <a:ext cx="7315200" cy="365760"/>
-          </a:xfrm>
-          <a:prstGeom prst="rect">
-            <a:avLst/>
-          </a:prstGeom>
-          <a:noFill/>
-        </p:spPr>
-        <p:txBody>
-          <a:bodyPr wrap="square" anchor="ctr" lIns="25400" rIns="25400" tIns="25400" bIns="25400">
-            <a:spAutoFit/>
-          </a:bodyPr>
-          <a:lstStyle/>
-          <a:p>
-            <a:pPr algn="l">
-              <a:lnSpc>
-                <a:spcPct val="100000"/>
-              </a:lnSpc>
-              <a:spcAft>
-                <a:spcPts val="400"/>
-              </a:spcAft>
-            </a:pPr>
-            <a:r>
-              <a:rPr sz="1700" b="1" i="0">
-                <a:solidFill>
-                  <a:srgbClr val="37474F"/>
-                </a:solidFill>
-                <a:latin typeface="Calibri"/>
-              </a:rPr>
-              <a:t>Sobriete &amp; conclusion</a:t>
-            </a:r>
-          </a:p>
-        </p:txBody>
-      </p:sp>
-      <p:sp>
-        <p:nvSpPr>
-          <p:cNvPr id="35" name="TextBox 34"/>
-          <p:cNvSpPr txBox="1"/>
-          <p:nvPr/>
-        </p:nvSpPr>
-        <p:spPr>
-          <a:xfrm>
-            <a:off x="1508760" y="5669280"/>
-            <a:ext cx="9601200" cy="274320"/>
-          </a:xfrm>
-          <a:prstGeom prst="rect">
-            <a:avLst/>
-          </a:prstGeom>
-          <a:noFill/>
-        </p:spPr>
-        <p:txBody>
-          <a:bodyPr wrap="square" anchor="t" lIns="25400" rIns="25400" tIns="25400" bIns="25400">
-            <a:spAutoFit/>
-          </a:bodyPr>
-          <a:lstStyle/>
-          <a:p>
-            <a:pPr algn="l">
-              <a:lnSpc>
-                <a:spcPct val="100000"/>
-              </a:lnSpc>
-              <a:spcAft>
-                <a:spcPts val="400"/>
-              </a:spcAft>
-            </a:pPr>
-            <a:r>
-              <a:rPr sz="1200" b="0" i="1">
-                <a:solidFill>
-                  <a:srgbClr val="90A4AE"/>
-                </a:solidFill>
-                <a:latin typeface="Calibri"/>
-              </a:rPr>
-              <a:t>Conseils occupants, recommandation</a:t>
-            </a:r>
-          </a:p>
-        </p:txBody>
-      </p:sp>
-    </p:spTree>
-  </p:cSld>
-  <p:clrMapOvr>
-    <a:masterClrMapping/>
-  </p:clrMapOvr>
-</p:sld>
-</file>
-
-<file path=ppt/slides/slide20.xml><?xml version="1.0" encoding="utf-8"?>
+<file path=ppt/slides/slide21.xml><?xml version="1.0" encoding="utf-8"?>
 <p:sld xmlns:a="http://schemas.openxmlformats.org/drawingml/2006/main" xmlns:p="http://schemas.openxmlformats.org/presentationml/2006/main" xmlns:r="http://schemas.openxmlformats.org/officeDocument/2006/relationships">
   <p:cSld>
     <p:spTree>
@@ -24789,7 +26138,7 @@
 </p:sld>
 </file>
 
-<file path=ppt/slides/slide21.xml><?xml version="1.0" encoding="utf-8"?>
+<file path=ppt/slides/slide22.xml><?xml version="1.0" encoding="utf-8"?>
 <p:sld xmlns:a="http://schemas.openxmlformats.org/drawingml/2006/main" xmlns:p="http://schemas.openxmlformats.org/presentationml/2006/main" xmlns:r="http://schemas.openxmlformats.org/officeDocument/2006/relationships">
   <p:cSld>
     <p:spTree>
@@ -26119,7 +27468,7 @@
 </p:sld>
 </file>
 
-<file path=ppt/slides/slide22.xml><?xml version="1.0" encoding="utf-8"?>
+<file path=ppt/slides/slide23.xml><?xml version="1.0" encoding="utf-8"?>
 <p:sld xmlns:a="http://schemas.openxmlformats.org/drawingml/2006/main" xmlns:p="http://schemas.openxmlformats.org/presentationml/2006/main" xmlns:r="http://schemas.openxmlformats.org/officeDocument/2006/relationships">
   <p:cSld>
     <p:spTree>
@@ -26866,7 +28215,7 @@
 </p:sld>
 </file>
 
-<file path=ppt/slides/slide23.xml><?xml version="1.0" encoding="utf-8"?>
+<file path=ppt/slides/slide24.xml><?xml version="1.0" encoding="utf-8"?>
 <p:sld xmlns:a="http://schemas.openxmlformats.org/drawingml/2006/main" xmlns:p="http://schemas.openxmlformats.org/presentationml/2006/main" xmlns:r="http://schemas.openxmlformats.org/officeDocument/2006/relationships">
   <p:cSld>
     <p:spTree>
@@ -33634,7 +34983,7 @@
                 </a:solidFill>
                 <a:latin typeface="Calibri"/>
               </a:rPr>
-              <a:t>rigueur climatique integree (Savoie, 498 m, zone H1) ; facture reelle ~3 800 €/an (chauffage partiel + appoint bois), sous l'estimation conventionnelle du DPE ; 535 vs ~250 kWhEP/m2.an en moyenne nationale.</a:t>
+              <a:t>rigueur climatique integree (Savoie, 498 m, zone H1) ; facture reelle ~3 800 €/an (chauffage partiel + appoint bois), inferieure a l'estimation conventionnelle du DPE.</a:t>
             </a:r>
           </a:p>
         </p:txBody>
@@ -33868,65 +35217,21 @@
                 </a:solidFill>
                 <a:latin typeface="Calibri"/>
               </a:rPr>
-              <a:t>Diagnostic de l'enveloppe thermique</a:t>
-            </a:r>
-          </a:p>
-        </p:txBody>
-      </p:sp>
-      <p:sp>
-        <p:nvSpPr>
-          <p:cNvPr id="7" name="Rectangle 6"/>
-          <p:cNvSpPr/>
-          <p:nvPr/>
-        </p:nvSpPr>
-        <p:spPr>
-          <a:xfrm>
-            <a:off x="1325880" y="1225296"/>
-            <a:ext cx="10058400" cy="27940"/>
-          </a:xfrm>
-          <a:prstGeom prst="rect">
-            <a:avLst/>
-          </a:prstGeom>
-          <a:solidFill>
-            <a:srgbClr val="2E7D32"/>
-          </a:solidFill>
-          <a:ln>
-            <a:noFill/>
-          </a:ln>
-          <a:effectLst/>
-        </p:spPr>
-        <p:style>
-          <a:lnRef idx="1">
-            <a:schemeClr val="accent1"/>
-          </a:lnRef>
-          <a:fillRef idx="3">
-            <a:schemeClr val="accent1"/>
-          </a:fillRef>
-          <a:effectRef idx="2">
-            <a:schemeClr val="accent1"/>
-          </a:effectRef>
-          <a:fontRef idx="minor">
-            <a:schemeClr val="lt1"/>
-          </a:fontRef>
-        </p:style>
-        <p:txBody>
-          <a:bodyPr rtlCol="0" anchor="ctr"/>
-          <a:lstStyle/>
-          <a:p>
-            <a:pPr algn="ctr"/>
-          </a:p>
-        </p:txBody>
-      </p:sp>
-      <p:sp>
-        <p:nvSpPr>
-          <p:cNvPr id="8" name="TextBox 7"/>
+              <a:t>Postes de depense &amp; comparaison</a:t>
+            </a:r>
+          </a:p>
+        </p:txBody>
+      </p:sp>
+      <p:sp>
+        <p:nvSpPr>
+          <p:cNvPr id="7" name="TextBox 6"/>
           <p:cNvSpPr txBox="1"/>
           <p:nvPr/>
         </p:nvSpPr>
         <p:spPr>
           <a:xfrm>
-            <a:off x="502920" y="6473952"/>
-            <a:ext cx="8229600" cy="292608"/>
+            <a:off x="1325880" y="905256"/>
+            <a:ext cx="10332720" cy="292608"/>
           </a:xfrm>
           <a:prstGeom prst="rect">
             <a:avLst/>
@@ -33948,6 +35253,92 @@
               </a:spcAft>
             </a:pPr>
             <a:r>
+              <a:rPr sz="1350" b="0" i="1">
+                <a:solidFill>
+                  <a:srgbClr val="37474F"/>
+                </a:solidFill>
+                <a:latin typeface="Calibri"/>
+              </a:rPr>
+              <a:t>Repartition des usages et moyenne nationale</a:t>
+            </a:r>
+          </a:p>
+        </p:txBody>
+      </p:sp>
+      <p:sp>
+        <p:nvSpPr>
+          <p:cNvPr id="8" name="Rectangle 7"/>
+          <p:cNvSpPr/>
+          <p:nvPr/>
+        </p:nvSpPr>
+        <p:spPr>
+          <a:xfrm>
+            <a:off x="1325880" y="1225296"/>
+            <a:ext cx="10058400" cy="27940"/>
+          </a:xfrm>
+          <a:prstGeom prst="rect">
+            <a:avLst/>
+          </a:prstGeom>
+          <a:solidFill>
+            <a:srgbClr val="2E7D32"/>
+          </a:solidFill>
+          <a:ln>
+            <a:noFill/>
+          </a:ln>
+          <a:effectLst/>
+        </p:spPr>
+        <p:style>
+          <a:lnRef idx="1">
+            <a:schemeClr val="accent1"/>
+          </a:lnRef>
+          <a:fillRef idx="3">
+            <a:schemeClr val="accent1"/>
+          </a:fillRef>
+          <a:effectRef idx="2">
+            <a:schemeClr val="accent1"/>
+          </a:effectRef>
+          <a:fontRef idx="minor">
+            <a:schemeClr val="lt1"/>
+          </a:fontRef>
+        </p:style>
+        <p:txBody>
+          <a:bodyPr rtlCol="0" anchor="ctr"/>
+          <a:lstStyle/>
+          <a:p>
+            <a:pPr algn="ctr"/>
+          </a:p>
+        </p:txBody>
+      </p:sp>
+      <p:sp>
+        <p:nvSpPr>
+          <p:cNvPr id="9" name="TextBox 8"/>
+          <p:cNvSpPr txBox="1"/>
+          <p:nvPr/>
+        </p:nvSpPr>
+        <p:spPr>
+          <a:xfrm>
+            <a:off x="502920" y="6473952"/>
+            <a:ext cx="8229600" cy="292608"/>
+          </a:xfrm>
+          <a:prstGeom prst="rect">
+            <a:avLst/>
+          </a:prstGeom>
+          <a:noFill/>
+        </p:spPr>
+        <p:txBody>
+          <a:bodyPr wrap="square" anchor="t" lIns="25400" rIns="25400" tIns="25400" bIns="25400">
+            <a:spAutoFit/>
+          </a:bodyPr>
+          <a:lstStyle/>
+          <a:p>
+            <a:pPr algn="l">
+              <a:lnSpc>
+                <a:spcPct val="100000"/>
+              </a:lnSpc>
+              <a:spcAft>
+                <a:spcPts val="400"/>
+              </a:spcAft>
+            </a:pPr>
+            <a:r>
               <a:rPr sz="900" b="0" i="0">
                 <a:solidFill>
                   <a:srgbClr val="90A4AE"/>
@@ -33961,7 +35352,7 @@
       </p:sp>
       <p:sp>
         <p:nvSpPr>
-          <p:cNvPr id="9" name="TextBox 8"/>
+          <p:cNvPr id="10" name="TextBox 9"/>
           <p:cNvSpPr txBox="1"/>
           <p:nvPr/>
         </p:nvSpPr>
@@ -34003,608 +35394,32 @@
       </p:sp>
       <p:graphicFrame>
         <p:nvGraphicFramePr>
-          <p:cNvPr id="10" name="Table 9"/>
+          <p:cNvPr id="11" name="Chart 10"/>
           <p:cNvGraphicFramePr>
             <a:graphicFrameLocks noGrp="1"/>
           </p:cNvGraphicFramePr>
           <p:nvPr/>
         </p:nvGraphicFramePr>
         <p:xfrm>
-          <a:off x="822960" y="1554480"/>
-          <a:ext cx="7315200" cy="3520440"/>
+          <a:off x="548640" y="1645920"/>
+          <a:ext cx="5120640" cy="4114800"/>
         </p:xfrm>
         <a:graphic>
-          <a:graphicData uri="http://schemas.openxmlformats.org/drawingml/2006/table">
-            <a:tbl>
-              <a:tblPr>
-                <a:tableStyleId>{5C22544A-7EE6-4342-B048-85BDC9FD1C3A}</a:tableStyleId>
-              </a:tblPr>
-              <a:tblGrid>
-                <a:gridCol w="2011680"/>
-                <a:gridCol w="3108960"/>
-                <a:gridCol w="2194560"/>
-              </a:tblGrid>
-              <a:tr h="502920">
-                <a:tc>
-                  <a:txBody>
-                    <a:bodyPr wrap="square"/>
-                    <a:lstStyle/>
-                    <a:p>
-                      <a:pPr algn="l"/>
-                      <a:r>
-                        <a:rPr sz="1200" b="1">
-                          <a:solidFill>
-                            <a:srgbClr val="FFFFFF"/>
-                          </a:solidFill>
-                          <a:latin typeface="Calibri"/>
-                        </a:rPr>
-                        <a:t>Element</a:t>
-                      </a:r>
-                    </a:p>
-                  </a:txBody>
-                  <a:tcPr marL="76200" marR="76200" marT="12700" marB="12700" anchor="ctr">
-                    <a:solidFill>
-                      <a:srgbClr val="1B5E20"/>
-                    </a:solidFill>
-                  </a:tcPr>
-                </a:tc>
-                <a:tc>
-                  <a:txBody>
-                    <a:bodyPr wrap="square"/>
-                    <a:lstStyle/>
-                    <a:p>
-                      <a:pPr algn="ctr"/>
-                      <a:r>
-                        <a:rPr sz="1200" b="1">
-                          <a:solidFill>
-                            <a:srgbClr val="FFFFFF"/>
-                          </a:solidFill>
-                          <a:latin typeface="Calibri"/>
-                        </a:rPr>
-                        <a:t>Composition</a:t>
-                      </a:r>
-                    </a:p>
-                  </a:txBody>
-                  <a:tcPr marL="76200" marR="76200" marT="12700" marB="12700" anchor="ctr">
-                    <a:solidFill>
-                      <a:srgbClr val="1B5E20"/>
-                    </a:solidFill>
-                  </a:tcPr>
-                </a:tc>
-                <a:tc>
-                  <a:txBody>
-                    <a:bodyPr wrap="square"/>
-                    <a:lstStyle/>
-                    <a:p>
-                      <a:pPr algn="ctr"/>
-                      <a:r>
-                        <a:rPr sz="1200" b="1">
-                          <a:solidFill>
-                            <a:srgbClr val="FFFFFF"/>
-                          </a:solidFill>
-                          <a:latin typeface="Calibri"/>
-                        </a:rPr>
-                        <a:t>Observation</a:t>
-                      </a:r>
-                    </a:p>
-                  </a:txBody>
-                  <a:tcPr marL="76200" marR="76200" marT="12700" marB="12700" anchor="ctr">
-                    <a:solidFill>
-                      <a:srgbClr val="1B5E20"/>
-                    </a:solidFill>
-                  </a:tcPr>
-                </a:tc>
-              </a:tr>
-              <a:tr h="502920">
-                <a:tc>
-                  <a:txBody>
-                    <a:bodyPr wrap="square"/>
-                    <a:lstStyle/>
-                    <a:p>
-                      <a:pPr algn="l"/>
-                      <a:r>
-                        <a:rPr sz="1150" b="1">
-                          <a:solidFill>
-                            <a:srgbClr val="37474F"/>
-                          </a:solidFill>
-                          <a:latin typeface="Calibri"/>
-                        </a:rPr>
-                        <a:t>Murs exterieurs</a:t>
-                      </a:r>
-                    </a:p>
-                  </a:txBody>
-                  <a:tcPr marL="76200" marR="76200" marT="12700" marB="12700" anchor="ctr">
-                    <a:solidFill>
-                      <a:srgbClr val="FFFFFF"/>
-                    </a:solidFill>
-                  </a:tcPr>
-                </a:tc>
-                <a:tc>
-                  <a:txBody>
-                    <a:bodyPr wrap="square"/>
-                    <a:lstStyle/>
-                    <a:p>
-                      <a:pPr algn="ctr"/>
-                      <a:r>
-                        <a:rPr sz="1150" b="0">
-                          <a:solidFill>
-                            <a:srgbClr val="37474F"/>
-                          </a:solidFill>
-                          <a:latin typeface="Calibri"/>
-                        </a:rPr>
-                        <a:t>Pierre calcaire 50 cm</a:t>
-                      </a:r>
-                    </a:p>
-                  </a:txBody>
-                  <a:tcPr marL="76200" marR="76200" marT="12700" marB="12700" anchor="ctr">
-                    <a:solidFill>
-                      <a:srgbClr val="FFFFFF"/>
-                    </a:solidFill>
-                  </a:tcPr>
-                </a:tc>
-                <a:tc>
-                  <a:txBody>
-                    <a:bodyPr wrap="square"/>
-                    <a:lstStyle/>
-                    <a:p>
-                      <a:pPr algn="ctr"/>
-                      <a:r>
-                        <a:rPr sz="1150" b="0">
-                          <a:solidFill>
-                            <a:srgbClr val="37474F"/>
-                          </a:solidFill>
-                          <a:latin typeface="Calibri"/>
-                        </a:rPr>
-                        <a:t>Forte inertie, faible isolation</a:t>
-                      </a:r>
-                    </a:p>
-                  </a:txBody>
-                  <a:tcPr marL="76200" marR="76200" marT="12700" marB="12700" anchor="ctr">
-                    <a:solidFill>
-                      <a:srgbClr val="FFFFFF"/>
-                    </a:solidFill>
-                  </a:tcPr>
-                </a:tc>
-              </a:tr>
-              <a:tr h="502920">
-                <a:tc>
-                  <a:txBody>
-                    <a:bodyPr wrap="square"/>
-                    <a:lstStyle/>
-                    <a:p>
-                      <a:pPr algn="l"/>
-                      <a:r>
-                        <a:rPr sz="1150" b="1">
-                          <a:solidFill>
-                            <a:srgbClr val="37474F"/>
-                          </a:solidFill>
-                          <a:latin typeface="Calibri"/>
-                        </a:rPr>
-                        <a:t>Toiture / combles</a:t>
-                      </a:r>
-                    </a:p>
-                  </a:txBody>
-                  <a:tcPr marL="76200" marR="76200" marT="12700" marB="12700" anchor="ctr">
-                    <a:solidFill>
-                      <a:srgbClr val="E8F5E9"/>
-                    </a:solidFill>
-                  </a:tcPr>
-                </a:tc>
-                <a:tc>
-                  <a:txBody>
-                    <a:bodyPr wrap="square"/>
-                    <a:lstStyle/>
-                    <a:p>
-                      <a:pPr algn="ctr"/>
-                      <a:r>
-                        <a:rPr sz="1150" b="0">
-                          <a:solidFill>
-                            <a:srgbClr val="37474F"/>
-                          </a:solidFill>
-                          <a:latin typeface="Calibri"/>
-                        </a:rPr>
-                        <a:t>8 cm laine minerale ancienne</a:t>
-                      </a:r>
-                    </a:p>
-                  </a:txBody>
-                  <a:tcPr marL="76200" marR="76200" marT="12700" marB="12700" anchor="ctr">
-                    <a:solidFill>
-                      <a:srgbClr val="E8F5E9"/>
-                    </a:solidFill>
-                  </a:tcPr>
-                </a:tc>
-                <a:tc>
-                  <a:txBody>
-                    <a:bodyPr wrap="square"/>
-                    <a:lstStyle/>
-                    <a:p>
-                      <a:pPr algn="ctr"/>
-                      <a:r>
-                        <a:rPr sz="1150" b="0">
-                          <a:solidFill>
-                            <a:srgbClr val="37474F"/>
-                          </a:solidFill>
-                          <a:latin typeface="Calibri"/>
-                        </a:rPr>
-                        <a:t>Isolation insuffisante</a:t>
-                      </a:r>
-                    </a:p>
-                  </a:txBody>
-                  <a:tcPr marL="76200" marR="76200" marT="12700" marB="12700" anchor="ctr">
-                    <a:solidFill>
-                      <a:srgbClr val="E8F5E9"/>
-                    </a:solidFill>
-                  </a:tcPr>
-                </a:tc>
-              </a:tr>
-              <a:tr h="502920">
-                <a:tc>
-                  <a:txBody>
-                    <a:bodyPr wrap="square"/>
-                    <a:lstStyle/>
-                    <a:p>
-                      <a:pPr algn="l"/>
-                      <a:r>
-                        <a:rPr sz="1150" b="1">
-                          <a:solidFill>
-                            <a:srgbClr val="37474F"/>
-                          </a:solidFill>
-                          <a:latin typeface="Calibri"/>
-                        </a:rPr>
-                        <a:t>Menuiseries</a:t>
-                      </a:r>
-                    </a:p>
-                  </a:txBody>
-                  <a:tcPr marL="76200" marR="76200" marT="12700" marB="12700" anchor="ctr">
-                    <a:solidFill>
-                      <a:srgbClr val="FFFFFF"/>
-                    </a:solidFill>
-                  </a:tcPr>
-                </a:tc>
-                <a:tc>
-                  <a:txBody>
-                    <a:bodyPr wrap="square"/>
-                    <a:lstStyle/>
-                    <a:p>
-                      <a:pPr algn="ctr"/>
-                      <a:r>
-                        <a:rPr sz="1150" b="0">
-                          <a:solidFill>
-                            <a:srgbClr val="37474F"/>
-                          </a:solidFill>
-                          <a:latin typeface="Calibri"/>
-                        </a:rPr>
-                        <a:t>Double vitrage bois 4/16/4 Argon (2019)</a:t>
-                      </a:r>
-                    </a:p>
-                  </a:txBody>
-                  <a:tcPr marL="76200" marR="76200" marT="12700" marB="12700" anchor="ctr">
-                    <a:solidFill>
-                      <a:srgbClr val="FFFFFF"/>
-                    </a:solidFill>
-                  </a:tcPr>
-                </a:tc>
-                <a:tc>
-                  <a:txBody>
-                    <a:bodyPr wrap="square"/>
-                    <a:lstStyle/>
-                    <a:p>
-                      <a:pPr algn="ctr"/>
-                      <a:r>
-                        <a:rPr sz="1150" b="0">
-                          <a:solidFill>
-                            <a:srgbClr val="37474F"/>
-                          </a:solidFill>
-                          <a:latin typeface="Calibri"/>
-                        </a:rPr>
-                        <a:t>Bon etat, performantes</a:t>
-                      </a:r>
-                    </a:p>
-                  </a:txBody>
-                  <a:tcPr marL="76200" marR="76200" marT="12700" marB="12700" anchor="ctr">
-                    <a:solidFill>
-                      <a:srgbClr val="FFFFFF"/>
-                    </a:solidFill>
-                  </a:tcPr>
-                </a:tc>
-              </a:tr>
-              <a:tr h="502920">
-                <a:tc>
-                  <a:txBody>
-                    <a:bodyPr wrap="square"/>
-                    <a:lstStyle/>
-                    <a:p>
-                      <a:pPr algn="l"/>
-                      <a:r>
-                        <a:rPr sz="1150" b="1">
-                          <a:solidFill>
-                            <a:srgbClr val="37474F"/>
-                          </a:solidFill>
-                          <a:latin typeface="Calibri"/>
-                        </a:rPr>
-                        <a:t>Plancher bas</a:t>
-                      </a:r>
-                    </a:p>
-                  </a:txBody>
-                  <a:tcPr marL="76200" marR="76200" marT="12700" marB="12700" anchor="ctr">
-                    <a:solidFill>
-                      <a:srgbClr val="E8F5E9"/>
-                    </a:solidFill>
-                  </a:tcPr>
-                </a:tc>
-                <a:tc>
-                  <a:txBody>
-                    <a:bodyPr wrap="square"/>
-                    <a:lstStyle/>
-                    <a:p>
-                      <a:pPr algn="ctr"/>
-                      <a:r>
-                        <a:rPr sz="1150" b="0">
-                          <a:solidFill>
-                            <a:srgbClr val="37474F"/>
-                          </a:solidFill>
-                          <a:latin typeface="Calibri"/>
-                        </a:rPr>
-                        <a:t>Dalle beton sur terre-plein</a:t>
-                      </a:r>
-                    </a:p>
-                  </a:txBody>
-                  <a:tcPr marL="76200" marR="76200" marT="12700" marB="12700" anchor="ctr">
-                    <a:solidFill>
-                      <a:srgbClr val="E8F5E9"/>
-                    </a:solidFill>
-                  </a:tcPr>
-                </a:tc>
-                <a:tc>
-                  <a:txBody>
-                    <a:bodyPr wrap="square"/>
-                    <a:lstStyle/>
-                    <a:p>
-                      <a:pPr algn="ctr"/>
-                      <a:r>
-                        <a:rPr sz="1150" b="0">
-                          <a:solidFill>
-                            <a:srgbClr val="37474F"/>
-                          </a:solidFill>
-                          <a:latin typeface="Calibri"/>
-                        </a:rPr>
-                        <a:t>Non isole -&gt; deperditions</a:t>
-                      </a:r>
-                    </a:p>
-                  </a:txBody>
-                  <a:tcPr marL="76200" marR="76200" marT="12700" marB="12700" anchor="ctr">
-                    <a:solidFill>
-                      <a:srgbClr val="E8F5E9"/>
-                    </a:solidFill>
-                  </a:tcPr>
-                </a:tc>
-              </a:tr>
-              <a:tr h="502920">
-                <a:tc>
-                  <a:txBody>
-                    <a:bodyPr wrap="square"/>
-                    <a:lstStyle/>
-                    <a:p>
-                      <a:pPr algn="l"/>
-                      <a:r>
-                        <a:rPr sz="1150" b="1">
-                          <a:solidFill>
-                            <a:srgbClr val="37474F"/>
-                          </a:solidFill>
-                          <a:latin typeface="Calibri"/>
-                        </a:rPr>
-                        <a:t>Ponts thermiques</a:t>
-                      </a:r>
-                    </a:p>
-                  </a:txBody>
-                  <a:tcPr marL="76200" marR="76200" marT="12700" marB="12700" anchor="ctr">
-                    <a:solidFill>
-                      <a:srgbClr val="FFFFFF"/>
-                    </a:solidFill>
-                  </a:tcPr>
-                </a:tc>
-                <a:tc>
-                  <a:txBody>
-                    <a:bodyPr wrap="square"/>
-                    <a:lstStyle/>
-                    <a:p>
-                      <a:pPr algn="ctr"/>
-                      <a:r>
-                        <a:rPr sz="1150" b="0">
-                          <a:solidFill>
-                            <a:srgbClr val="37474F"/>
-                          </a:solidFill>
-                          <a:latin typeface="Calibri"/>
-                        </a:rPr>
-                        <a:t>Jonctions des parois</a:t>
-                      </a:r>
-                    </a:p>
-                  </a:txBody>
-                  <a:tcPr marL="76200" marR="76200" marT="12700" marB="12700" anchor="ctr">
-                    <a:solidFill>
-                      <a:srgbClr val="FFFFFF"/>
-                    </a:solidFill>
-                  </a:tcPr>
-                </a:tc>
-                <a:tc>
-                  <a:txBody>
-                    <a:bodyPr wrap="square"/>
-                    <a:lstStyle/>
-                    <a:p>
-                      <a:pPr algn="ctr"/>
-                      <a:r>
-                        <a:rPr sz="1150" b="0">
-                          <a:solidFill>
-                            <a:srgbClr val="37474F"/>
-                          </a:solidFill>
-                          <a:latin typeface="Calibri"/>
-                        </a:rPr>
-                        <a:t>Pertes importantes</a:t>
-                      </a:r>
-                    </a:p>
-                  </a:txBody>
-                  <a:tcPr marL="76200" marR="76200" marT="12700" marB="12700" anchor="ctr">
-                    <a:solidFill>
-                      <a:srgbClr val="FFFFFF"/>
-                    </a:solidFill>
-                  </a:tcPr>
-                </a:tc>
-              </a:tr>
-              <a:tr h="502920">
-                <a:tc>
-                  <a:txBody>
-                    <a:bodyPr wrap="square"/>
-                    <a:lstStyle/>
-                    <a:p>
-                      <a:pPr algn="l"/>
-                      <a:r>
-                        <a:rPr sz="1150" b="1">
-                          <a:solidFill>
-                            <a:srgbClr val="37474F"/>
-                          </a:solidFill>
-                          <a:latin typeface="Calibri"/>
-                        </a:rPr>
-                        <a:t>Etancheite a l'air</a:t>
-                      </a:r>
-                    </a:p>
-                  </a:txBody>
-                  <a:tcPr marL="76200" marR="76200" marT="12700" marB="12700" anchor="ctr">
-                    <a:solidFill>
-                      <a:srgbClr val="E8F5E9"/>
-                    </a:solidFill>
-                  </a:tcPr>
-                </a:tc>
-                <a:tc>
-                  <a:txBody>
-                    <a:bodyPr wrap="square"/>
-                    <a:lstStyle/>
-                    <a:p>
-                      <a:pPr algn="ctr"/>
-                      <a:r>
-                        <a:rPr sz="1150" b="0">
-                          <a:solidFill>
-                            <a:srgbClr val="37474F"/>
-                          </a:solidFill>
-                          <a:latin typeface="Calibri"/>
-                        </a:rPr>
-                        <a:t>Non maitrisee (entrees d'air)</a:t>
-                      </a:r>
-                    </a:p>
-                  </a:txBody>
-                  <a:tcPr marL="76200" marR="76200" marT="12700" marB="12700" anchor="ctr">
-                    <a:solidFill>
-                      <a:srgbClr val="E8F5E9"/>
-                    </a:solidFill>
-                  </a:tcPr>
-                </a:tc>
-                <a:tc>
-                  <a:txBody>
-                    <a:bodyPr wrap="square"/>
-                    <a:lstStyle/>
-                    <a:p>
-                      <a:pPr algn="ctr"/>
-                      <a:r>
-                        <a:rPr sz="1150" b="0">
-                          <a:solidFill>
-                            <a:srgbClr val="37474F"/>
-                          </a:solidFill>
-                          <a:latin typeface="Calibri"/>
-                        </a:rPr>
-                        <a:t>Infiltrations parasites</a:t>
-                      </a:r>
-                    </a:p>
-                  </a:txBody>
-                  <a:tcPr marL="76200" marR="76200" marT="12700" marB="12700" anchor="ctr">
-                    <a:solidFill>
-                      <a:srgbClr val="E8F5E9"/>
-                    </a:solidFill>
-                  </a:tcPr>
-                </a:tc>
-              </a:tr>
-            </a:tbl>
+          <a:graphicData uri="http://schemas.openxmlformats.org/drawingml/2006/chart">
+            <c:chart xmlns:c="http://schemas.openxmlformats.org/drawingml/2006/chart" r:id="rId2"/>
           </a:graphicData>
         </a:graphic>
       </p:graphicFrame>
       <p:sp>
         <p:nvSpPr>
-          <p:cNvPr id="11" name="Rectangle 10"/>
-          <p:cNvSpPr/>
-          <p:nvPr/>
-        </p:nvSpPr>
-        <p:spPr>
-          <a:xfrm>
-            <a:off x="8589356" y="1534480"/>
-            <a:ext cx="2572328" cy="2197984"/>
-          </a:xfrm>
-          <a:prstGeom prst="rect">
-            <a:avLst/>
-          </a:prstGeom>
-          <a:solidFill>
-            <a:srgbClr val="FFFFFF"/>
-          </a:solidFill>
-          <a:ln w="15240">
-            <a:solidFill>
-              <a:srgbClr val="90A4AE"/>
-            </a:solidFill>
-          </a:ln>
-          <a:effectLst/>
-        </p:spPr>
-        <p:style>
-          <a:lnRef idx="1">
-            <a:schemeClr val="accent1"/>
-          </a:lnRef>
-          <a:fillRef idx="3">
-            <a:schemeClr val="accent1"/>
-          </a:fillRef>
-          <a:effectRef idx="2">
-            <a:schemeClr val="accent1"/>
-          </a:effectRef>
-          <a:fontRef idx="minor">
-            <a:schemeClr val="lt1"/>
-          </a:fontRef>
-        </p:style>
-        <p:txBody>
-          <a:bodyPr rtlCol="0" anchor="ctr"/>
-          <a:lstStyle/>
-          <a:p>
-            <a:pPr algn="ctr"/>
-          </a:p>
-        </p:txBody>
-      </p:sp>
-      <p:pic>
-        <p:nvPicPr>
-          <p:cNvPr id="12" name="Picture 11" descr="p06_x62_460x392.png"/>
-          <p:cNvPicPr>
-            <a:picLocks noChangeAspect="1"/>
-          </p:cNvPicPr>
-          <p:nvPr/>
-        </p:nvPicPr>
-        <p:blipFill>
-          <a:blip r:embed="rId2"/>
-          <a:stretch>
-            <a:fillRect/>
-          </a:stretch>
-        </p:blipFill>
-        <p:spPr>
-          <a:xfrm>
-            <a:off x="8609356" y="1554480"/>
-            <a:ext cx="2532328" cy="2157984"/>
-          </a:xfrm>
-          <a:prstGeom prst="rect">
-            <a:avLst/>
-          </a:prstGeom>
-        </p:spPr>
-      </p:pic>
-      <p:sp>
-        <p:nvSpPr>
-          <p:cNvPr id="13" name="TextBox 12"/>
+          <p:cNvPr id="12" name="TextBox 11"/>
           <p:cNvSpPr txBox="1"/>
           <p:nvPr/>
         </p:nvSpPr>
         <p:spPr>
           <a:xfrm>
-            <a:off x="8412480" y="3732464"/>
-            <a:ext cx="2926080" cy="310896"/>
+            <a:off x="6126480" y="1645920"/>
+            <a:ext cx="5303520" cy="365760"/>
           </a:xfrm>
           <a:prstGeom prst="rect">
             <a:avLst/>
@@ -34617,7 +35432,7 @@
           </a:bodyPr>
           <a:lstStyle/>
           <a:p>
-            <a:pPr algn="ctr">
+            <a:pPr algn="l">
               <a:lnSpc>
                 <a:spcPct val="100000"/>
               </a:lnSpc>
@@ -34626,13 +35441,147 @@
               </a:spcAft>
             </a:pPr>
             <a:r>
-              <a:rPr sz="1100" b="0" i="1">
-                <a:solidFill>
-                  <a:srgbClr val="90A4AE"/>
-                </a:solidFill>
-                <a:latin typeface="Calibri"/>
-              </a:rPr>
-              <a:t>Menuiseries bois posees en 2019</a:t>
+              <a:rPr sz="1600" b="1" i="0">
+                <a:solidFill>
+                  <a:srgbClr val="1B5E20"/>
+                </a:solidFill>
+                <a:latin typeface="Calibri"/>
+              </a:rPr>
+              <a:t>Mise en perspective</a:t>
+            </a:r>
+          </a:p>
+        </p:txBody>
+      </p:sp>
+      <p:sp>
+        <p:nvSpPr>
+          <p:cNvPr id="13" name="TextBox 12"/>
+          <p:cNvSpPr txBox="1"/>
+          <p:nvPr/>
+        </p:nvSpPr>
+        <p:spPr>
+          <a:xfrm>
+            <a:off x="6126480" y="2103120"/>
+            <a:ext cx="5394960" cy="2194560"/>
+          </a:xfrm>
+          <a:prstGeom prst="rect">
+            <a:avLst/>
+          </a:prstGeom>
+          <a:noFill/>
+        </p:spPr>
+        <p:txBody>
+          <a:bodyPr wrap="square">
+            <a:spAutoFit/>
+          </a:bodyPr>
+          <a:lstStyle/>
+          <a:p>
+            <a:pPr>
+              <a:lnSpc>
+                <a:spcPct val="105000"/>
+              </a:lnSpc>
+              <a:spcAft>
+                <a:spcPts val="1100"/>
+              </a:spcAft>
+            </a:pPr>
+            <a:r>
+              <a:rPr sz="1350" b="1">
+                <a:solidFill>
+                  <a:srgbClr val="2E7D32"/>
+                </a:solidFill>
+                <a:latin typeface="Calibri"/>
+              </a:rPr>
+              <a:t>●  </a:t>
+            </a:r>
+            <a:r>
+              <a:rPr sz="1350" b="1">
+                <a:solidFill>
+                  <a:srgbClr val="37474F"/>
+                </a:solidFill>
+                <a:latin typeface="Calibri"/>
+              </a:rPr>
+              <a:t>Chauffage = poste dominant : </a:t>
+            </a:r>
+            <a:r>
+              <a:rPr sz="1350">
+                <a:solidFill>
+                  <a:srgbClr val="37474F"/>
+                </a:solidFill>
+                <a:latin typeface="Calibri"/>
+              </a:rPr>
+              <a:t>pres de 80 % de la depense energetique</a:t>
+            </a:r>
+          </a:p>
+          <a:p>
+            <a:pPr>
+              <a:lnSpc>
+                <a:spcPct val="105000"/>
+              </a:lnSpc>
+              <a:spcAft>
+                <a:spcPts val="1100"/>
+              </a:spcAft>
+            </a:pPr>
+            <a:r>
+              <a:rPr sz="1350" b="1">
+                <a:solidFill>
+                  <a:srgbClr val="2E7D32"/>
+                </a:solidFill>
+                <a:latin typeface="Calibri"/>
+              </a:rPr>
+              <a:t>●  </a:t>
+            </a:r>
+            <a:r>
+              <a:rPr sz="1350" b="1">
+                <a:solidFill>
+                  <a:srgbClr val="37474F"/>
+                </a:solidFill>
+                <a:latin typeface="Calibri"/>
+              </a:rPr>
+              <a:t>Rigueur climatique integree : </a:t>
+            </a:r>
+            <a:r>
+              <a:rPr sz="1350">
+                <a:solidFill>
+                  <a:srgbClr val="37474F"/>
+                </a:solidFill>
+                <a:latin typeface="Calibri"/>
+              </a:rPr>
+              <a:t>Savoie, 498 m, zone H1 (climat froid)</a:t>
+            </a:r>
+          </a:p>
+          <a:p>
+            <a:pPr>
+              <a:lnSpc>
+                <a:spcPct val="105000"/>
+              </a:lnSpc>
+              <a:spcAft>
+                <a:spcPts val="1100"/>
+              </a:spcAft>
+            </a:pPr>
+            <a:r>
+              <a:rPr sz="1350" b="1">
+                <a:solidFill>
+                  <a:srgbClr val="2E7D32"/>
+                </a:solidFill>
+                <a:latin typeface="Calibri"/>
+              </a:rPr>
+              <a:t>●  </a:t>
+            </a:r>
+            <a:r>
+              <a:rPr sz="1350" b="1">
+                <a:solidFill>
+                  <a:srgbClr val="37474F"/>
+                </a:solidFill>
+                <a:latin typeface="Calibri"/>
+              </a:rPr>
+              <a:t>Coherence facture / DPE </a:t>
+            </a:r>
+            <a:r>
+              <a:rPr sz="1350">
+                <a:solidFill>
+                  <a:srgbClr val="37474F"/>
+                </a:solidFill>
+                <a:latin typeface="Calibri"/>
+              </a:rPr>
+              <a:t>verifiee (theorique vs reel)</a:t>
             </a:r>
           </a:p>
         </p:txBody>
@@ -34645,14 +35594,14 @@
         </p:nvSpPr>
         <p:spPr>
           <a:xfrm>
-            <a:off x="8412480" y="4343400"/>
-            <a:ext cx="2926080" cy="1417320"/>
+            <a:off x="6126480" y="4343400"/>
+            <a:ext cx="5394960" cy="1417320"/>
           </a:xfrm>
           <a:prstGeom prst="roundRect">
             <a:avLst/>
           </a:prstGeom>
           <a:solidFill>
-            <a:srgbClr val="E8F5E9"/>
+            <a:srgbClr val="FFF3E0"/>
           </a:solidFill>
           <a:ln>
             <a:noFill/>
@@ -34689,8 +35638,8 @@
         </p:nvSpPr>
         <p:spPr>
           <a:xfrm>
-            <a:off x="8595360" y="4434840"/>
-            <a:ext cx="2606040" cy="1280160"/>
+            <a:off x="6355080" y="4480560"/>
+            <a:ext cx="4937760" cy="1234440"/>
           </a:xfrm>
           <a:prstGeom prst="rect">
             <a:avLst/>
@@ -34714,11 +35663,11 @@
             <a:r>
               <a:rPr sz="1300" b="1" i="0">
                 <a:solidFill>
-                  <a:srgbClr val="1B5E20"/>
-                </a:solidFill>
-                <a:latin typeface="Calibri"/>
-              </a:rPr>
-              <a:t>A retenir</a:t>
+                  <a:srgbClr val="E65100"/>
+                </a:solidFill>
+                <a:latin typeface="Calibri"/>
+              </a:rPr>
+              <a:t>Comparaison a la moyenne nationale</a:t>
             </a:r>
           </a:p>
           <a:p>
@@ -34731,13 +35680,13 @@
               </a:spcAft>
             </a:pPr>
             <a:r>
-              <a:rPr sz="1200" b="0" i="0">
+              <a:rPr sz="1600" b="1" i="0">
                 <a:solidFill>
                   <a:srgbClr val="37474F"/>
                 </a:solidFill>
                 <a:latin typeface="Calibri"/>
               </a:rPr>
-              <a:t>Fenetres deja renovees -&gt;</a:t>
+              <a:t>535 kWhEP/m2.an   vs   ~250 kWhEP/m2.an</a:t>
             </a:r>
           </a:p>
           <a:p>
@@ -34750,13 +35699,13 @@
               </a:spcAft>
             </a:pPr>
             <a:r>
-              <a:rPr sz="1300" b="1" i="0">
-                <a:solidFill>
-                  <a:srgbClr val="1B5E20"/>
-                </a:solidFill>
-                <a:latin typeface="Calibri"/>
-              </a:rPr>
-              <a:t>priorite : murs + toiture</a:t>
+              <a:rPr sz="1200" b="0" i="0">
+                <a:solidFill>
+                  <a:srgbClr val="37474F"/>
+                </a:solidFill>
+                <a:latin typeface="Calibri"/>
+              </a:rPr>
+              <a:t>-&gt; consommation plus du double d'une habitation moyenne</a:t>
             </a:r>
           </a:p>
         </p:txBody>
